--- a/docs/ir/RIVEA_IR_deck.pptx
+++ b/docs/ir/RIVEA_IR_deck.pptx
@@ -689,7 +689,7 @@
           <a:p>
             <a:r>
               <a:rPr lang="en-US" dirty="0"/>
-              <a:t/>
+              <a:t>1인 팀은 숨기는 게 최악. 만든 것과 뽑을 자리를 같이 보여주면 Ask 슬라이드로 자연스럽게 넘어간다.</a:t>
             </a:r>
             <a:endParaRPr lang="en-US" dirty="0"/>
           </a:p>
@@ -777,7 +777,7 @@
           <a:p>
             <a:r>
               <a:rPr lang="en-US" dirty="0"/>
-              <a:t/>
+              <a:t>3.5억은 추산이다. 대표 급여와 채용 시점이 바뀌면 숫자가 바뀐다 — 산출 근거 줄이 방어선이다.</a:t>
             </a:r>
             <a:endParaRPr lang="en-US" dirty="0"/>
           </a:p>
@@ -3159,18 +3159,57 @@
       </p:sp>
       <p:sp>
         <p:nvSpPr>
-          <p:cNvPr id="5" name="Shape 3"/>
-          <p:cNvSpPr/>
-          <p:nvPr/>
-        </p:nvSpPr>
-        <p:spPr>
-          <a:xfrm>
-            <a:off x="640080" y="2011680"/>
-            <a:ext cx="3383280" cy="2194560"/>
+          <p:cNvPr id="5" name="Text 3"/>
+          <p:cNvSpPr/>
+          <p:nvPr/>
+        </p:nvSpPr>
+        <p:spPr>
+          <a:xfrm>
+            <a:off x="640080" y="1737360"/>
+            <a:ext cx="10881360" cy="292608"/>
+          </a:xfrm>
+          <a:prstGeom prst="rect">
+            <a:avLst/>
+          </a:prstGeom>
+          <a:noFill/>
+          <a:ln/>
+        </p:spPr>
+        <p:txBody>
+          <a:bodyPr wrap="square" lIns="0" tIns="0" rIns="0" bIns="0" rtlCol="0" anchor="ctr"/>
+          <a:lstStyle/>
+          <a:p>
+            <a:pPr indent="0" marL="0">
+              <a:buNone/>
+            </a:pPr>
+            <a:r>
+              <a:rPr lang="en-US" sz="1400" dirty="0">
+                <a:solidFill>
+                  <a:srgbClr val="565463"/>
+                </a:solidFill>
+                <a:latin typeface="Apple SD Gothic Neo" pitchFamily="34" charset="0"/>
+                <a:ea typeface="Apple SD Gothic Neo" pitchFamily="34" charset="-122"/>
+                <a:cs typeface="Apple SD Gothic Neo" pitchFamily="34" charset="-120"/>
+              </a:rPr>
+              <a:t>현재 1인입니다. 숨기지 않고, 혼자 어디까지 왔는지와 누구를 뽑을지를 같이 놓습니다.</a:t>
+            </a:r>
+            <a:endParaRPr lang="en-US" sz="1400" dirty="0"/>
+          </a:p>
+        </p:txBody>
+      </p:sp>
+      <p:sp>
+        <p:nvSpPr>
+          <p:cNvPr id="6" name="Shape 4"/>
+          <p:cNvSpPr/>
+          <p:nvPr/>
+        </p:nvSpPr>
+        <p:spPr>
+          <a:xfrm>
+            <a:off x="640080" y="2103120"/>
+            <a:ext cx="4846320" cy="3566160"/>
           </a:xfrm>
           <a:prstGeom prst="roundRect">
             <a:avLst>
-              <a:gd name="adj" fmla="val 5000"/>
+              <a:gd name="adj" fmla="val 3077"/>
             </a:avLst>
           </a:prstGeom>
           <a:solidFill>
@@ -3186,14 +3225,14 @@
       </p:sp>
       <p:sp>
         <p:nvSpPr>
-          <p:cNvPr id="6" name="Shape 4"/>
-          <p:cNvSpPr/>
-          <p:nvPr/>
-        </p:nvSpPr>
-        <p:spPr>
-          <a:xfrm>
-            <a:off x="914400" y="2286000"/>
-            <a:ext cx="731520" cy="731520"/>
+          <p:cNvPr id="7" name="Shape 5"/>
+          <p:cNvSpPr/>
+          <p:nvPr/>
+        </p:nvSpPr>
+        <p:spPr>
+          <a:xfrm>
+            <a:off x="1005840" y="2423160"/>
+            <a:ext cx="1005840" cy="1005840"/>
           </a:xfrm>
           <a:prstGeom prst="ellipse">
             <a:avLst/>
@@ -3211,14 +3250,14 @@
       </p:sp>
       <p:sp>
         <p:nvSpPr>
-          <p:cNvPr id="7" name="Text 5"/>
-          <p:cNvSpPr/>
-          <p:nvPr/>
-        </p:nvSpPr>
-        <p:spPr>
-          <a:xfrm>
-            <a:off x="914400" y="3154680"/>
-            <a:ext cx="2834640" cy="274320"/>
+          <p:cNvPr id="8" name="Text 6"/>
+          <p:cNvSpPr/>
+          <p:nvPr/>
+        </p:nvSpPr>
+        <p:spPr>
+          <a:xfrm>
+            <a:off x="1005840" y="3611880"/>
+            <a:ext cx="4114800" cy="274320"/>
           </a:xfrm>
           <a:prstGeom prst="rect">
             <a:avLst/>
@@ -3242,7 +3281,7 @@
                 <a:ea typeface="Apple SD Gothic Neo" pitchFamily="34" charset="-122"/>
                 <a:cs typeface="Apple SD Gothic Neo" pitchFamily="34" charset="-120"/>
               </a:rPr>
-              <a:t>FOUNDER</a:t>
+              <a:t>FOUNDER · 1인</a:t>
             </a:r>
             <a:endParaRPr lang="en-US" sz="1100" dirty="0"/>
           </a:p>
@@ -3250,30 +3289,30 @@
       </p:sp>
       <p:sp>
         <p:nvSpPr>
-          <p:cNvPr id="8" name="Text 6"/>
-          <p:cNvSpPr/>
-          <p:nvPr/>
-        </p:nvSpPr>
-        <p:spPr>
-          <a:xfrm>
-            <a:off x="914400" y="3429000"/>
-            <a:ext cx="2834640" cy="320040"/>
-          </a:xfrm>
-          <a:prstGeom prst="rect">
-            <a:avLst/>
-          </a:prstGeom>
-          <a:noFill/>
-          <a:ln/>
-        </p:spPr>
-        <p:txBody>
-          <a:bodyPr wrap="square" lIns="0" tIns="0" rIns="0" bIns="0" rtlCol="0" anchor="ctr"/>
-          <a:lstStyle/>
-          <a:p>
-            <a:pPr indent="0" marL="0">
-              <a:buNone/>
-            </a:pPr>
-            <a:r>
-              <a:rPr lang="en-US" sz="1600" b="1" dirty="0">
+          <p:cNvPr id="9" name="Text 7"/>
+          <p:cNvSpPr/>
+          <p:nvPr/>
+        </p:nvSpPr>
+        <p:spPr>
+          <a:xfrm>
+            <a:off x="1005840" y="3913632"/>
+            <a:ext cx="4114800" cy="384048"/>
+          </a:xfrm>
+          <a:prstGeom prst="rect">
+            <a:avLst/>
+          </a:prstGeom>
+          <a:noFill/>
+          <a:ln/>
+        </p:spPr>
+        <p:txBody>
+          <a:bodyPr wrap="square" lIns="0" tIns="0" rIns="0" bIns="0" rtlCol="0" anchor="ctr"/>
+          <a:lstStyle/>
+          <a:p>
+            <a:pPr indent="0" marL="0">
+              <a:buNone/>
+            </a:pPr>
+            <a:r>
+              <a:rPr lang="en-US" sz="2200" b="1" dirty="0">
                 <a:solidFill>
                   <a:srgbClr val="B8873A"/>
                 </a:solidFill>
@@ -3281,22 +3320,84 @@
                 <a:ea typeface="Apple SD Gothic Neo" pitchFamily="34" charset="-122"/>
                 <a:cs typeface="Apple SD Gothic Neo" pitchFamily="34" charset="-120"/>
               </a:rPr>
-              <a:t>이름 · 역할 (채워주세요)</a:t>
-            </a:r>
-            <a:endParaRPr lang="en-US" sz="1600" dirty="0"/>
-          </a:p>
-        </p:txBody>
-      </p:sp>
-      <p:sp>
-        <p:nvSpPr>
-          <p:cNvPr id="9" name="Text 7"/>
-          <p:cNvSpPr/>
-          <p:nvPr/>
-        </p:nvSpPr>
-        <p:spPr>
-          <a:xfrm>
-            <a:off x="914400" y="3749040"/>
-            <a:ext cx="2834640" cy="457200"/>
+              <a:t>이름 (채워주세요)</a:t>
+            </a:r>
+            <a:endParaRPr lang="en-US" sz="2200" dirty="0"/>
+          </a:p>
+        </p:txBody>
+      </p:sp>
+      <p:sp>
+        <p:nvSpPr>
+          <p:cNvPr id="10" name="Text 8"/>
+          <p:cNvSpPr/>
+          <p:nvPr/>
+        </p:nvSpPr>
+        <p:spPr>
+          <a:xfrm>
+            <a:off x="1005840" y="4370832"/>
+            <a:ext cx="4114800" cy="685800"/>
+          </a:xfrm>
+          <a:prstGeom prst="rect">
+            <a:avLst/>
+          </a:prstGeom>
+          <a:noFill/>
+          <a:ln/>
+        </p:spPr>
+        <p:txBody>
+          <a:bodyPr wrap="square" lIns="0" tIns="0" rIns="0" bIns="0" rtlCol="0" anchor="ctr"/>
+          <a:lstStyle/>
+          <a:p>
+            <a:pPr indent="0" marL="0">
+              <a:lnSpc>
+                <a:spcPts val="2100"/>
+              </a:lnSpc>
+              <a:buNone/>
+            </a:pPr>
+            <a:r>
+              <a:rPr lang="en-US" sz="1350" dirty="0">
+                <a:solidFill>
+                  <a:srgbClr val="565463"/>
+                </a:solidFill>
+                <a:latin typeface="Apple SD Gothic Neo" pitchFamily="34" charset="0"/>
+                <a:ea typeface="Apple SD Gothic Neo" pitchFamily="34" charset="-122"/>
+                <a:cs typeface="Apple SD Gothic Neo" pitchFamily="34" charset="-120"/>
+              </a:rPr>
+              <a:t>기획 · 디자인 · 개발을 혼자 했습니다.</a:t>
+            </a:r>
+            <a:endParaRPr lang="en-US" sz="1350" dirty="0"/>
+          </a:p>
+          <a:p>
+            <a:pPr indent="0" marL="0">
+              <a:lnSpc>
+                <a:spcPts val="2100"/>
+              </a:lnSpc>
+              <a:buNone/>
+            </a:pPr>
+            <a:r>
+              <a:rPr lang="en-US" sz="1350" dirty="0">
+                <a:solidFill>
+                  <a:srgbClr val="565463"/>
+                </a:solidFill>
+                <a:latin typeface="Apple SD Gothic Neo" pitchFamily="34" charset="0"/>
+                <a:ea typeface="Apple SD Gothic Neo" pitchFamily="34" charset="-122"/>
+                <a:cs typeface="Apple SD Gothic Neo" pitchFamily="34" charset="-120"/>
+              </a:rPr>
+              <a:t>커밋 43개 · 12,560줄 · 배포된 웹앱.</a:t>
+            </a:r>
+            <a:endParaRPr lang="en-US" sz="1350" dirty="0"/>
+          </a:p>
+        </p:txBody>
+      </p:sp>
+      <p:sp>
+        <p:nvSpPr>
+          <p:cNvPr id="11" name="Text 9"/>
+          <p:cNvSpPr/>
+          <p:nvPr/>
+        </p:nvSpPr>
+        <p:spPr>
+          <a:xfrm>
+            <a:off x="1005840" y="5120640"/>
+            <a:ext cx="4114800" cy="457200"/>
           </a:xfrm>
           <a:prstGeom prst="rect">
             <a:avLst/>
@@ -3323,7 +3424,7 @@
                 <a:ea typeface="Apple SD Gothic Neo" pitchFamily="34" charset="-122"/>
                 <a:cs typeface="Apple SD Gothic Neo" pitchFamily="34" charset="-120"/>
               </a:rPr>
-              <a:t>이 문제를 왜 당신이 푸는지 — 한 문장</a:t>
+              <a:t>「이 문제를 왜 내가 푸는지」 한 문장을 여기 넣으세요 — 1인 팀에서 이 문장이 팀 슬라이드 전체를 대신합니다.</a:t>
             </a:r>
             <a:endParaRPr lang="en-US" sz="1200" dirty="0"/>
           </a:p>
@@ -3331,18 +3432,126 @@
       </p:sp>
       <p:sp>
         <p:nvSpPr>
-          <p:cNvPr id="10" name="Shape 8"/>
-          <p:cNvSpPr/>
-          <p:nvPr/>
-        </p:nvSpPr>
-        <p:spPr>
-          <a:xfrm>
-            <a:off x="4389120" y="2011680"/>
-            <a:ext cx="3383280" cy="2194560"/>
+          <p:cNvPr id="12" name="Shape 10"/>
+          <p:cNvSpPr/>
+          <p:nvPr/>
+        </p:nvSpPr>
+        <p:spPr>
+          <a:xfrm>
+            <a:off x="5852160" y="2103120"/>
+            <a:ext cx="5669280" cy="1600200"/>
           </a:xfrm>
           <a:prstGeom prst="roundRect">
             <a:avLst>
-              <a:gd name="adj" fmla="val 5000"/>
+              <a:gd name="adj" fmla="val 6857"/>
+            </a:avLst>
+          </a:prstGeom>
+          <a:solidFill>
+            <a:srgbClr val="F4EFE7"/>
+          </a:solidFill>
+          <a:ln w="9525">
+            <a:solidFill>
+              <a:srgbClr val="E7DCC9"/>
+            </a:solidFill>
+            <a:prstDash val="solid"/>
+          </a:ln>
+        </p:spPr>
+      </p:sp>
+      <p:sp>
+        <p:nvSpPr>
+          <p:cNvPr id="13" name="Text 11"/>
+          <p:cNvSpPr/>
+          <p:nvPr/>
+        </p:nvSpPr>
+        <p:spPr>
+          <a:xfrm>
+            <a:off x="6144768" y="2286000"/>
+            <a:ext cx="5084064" cy="292608"/>
+          </a:xfrm>
+          <a:prstGeom prst="rect">
+            <a:avLst/>
+          </a:prstGeom>
+          <a:noFill/>
+          <a:ln/>
+        </p:spPr>
+        <p:txBody>
+          <a:bodyPr wrap="square" lIns="0" tIns="0" rIns="0" bIns="0" rtlCol="0" anchor="ctr"/>
+          <a:lstStyle/>
+          <a:p>
+            <a:pPr indent="0" marL="0">
+              <a:buNone/>
+            </a:pPr>
+            <a:r>
+              <a:rPr lang="en-US" sz="1600" b="1" dirty="0">
+                <a:solidFill>
+                  <a:srgbClr val="26242E"/>
+                </a:solidFill>
+                <a:latin typeface="Apple SD Gothic Neo" pitchFamily="34" charset="0"/>
+                <a:ea typeface="Apple SD Gothic Neo" pitchFamily="34" charset="-122"/>
+                <a:cs typeface="Apple SD Gothic Neo" pitchFamily="34" charset="-120"/>
+              </a:rPr>
+              <a:t>1인이 약점이 아닌 이유</a:t>
+            </a:r>
+            <a:endParaRPr lang="en-US" sz="1600" dirty="0"/>
+          </a:p>
+        </p:txBody>
+      </p:sp>
+      <p:sp>
+        <p:nvSpPr>
+          <p:cNvPr id="14" name="Text 12"/>
+          <p:cNvSpPr/>
+          <p:nvPr/>
+        </p:nvSpPr>
+        <p:spPr>
+          <a:xfrm>
+            <a:off x="6144768" y="2633472"/>
+            <a:ext cx="5084064" cy="914400"/>
+          </a:xfrm>
+          <a:prstGeom prst="rect">
+            <a:avLst/>
+          </a:prstGeom>
+          <a:noFill/>
+          <a:ln/>
+        </p:spPr>
+        <p:txBody>
+          <a:bodyPr wrap="square" lIns="0" tIns="0" rIns="0" bIns="0" rtlCol="0" anchor="ctr"/>
+          <a:lstStyle/>
+          <a:p>
+            <a:pPr indent="0" marL="0">
+              <a:lnSpc>
+                <a:spcPts val="1900"/>
+              </a:lnSpc>
+              <a:buNone/>
+            </a:pPr>
+            <a:r>
+              <a:rPr lang="en-US" sz="1250" dirty="0">
+                <a:solidFill>
+                  <a:srgbClr val="565463"/>
+                </a:solidFill>
+                <a:latin typeface="Apple SD Gothic Neo" pitchFamily="34" charset="0"/>
+                <a:ea typeface="Apple SD Gothic Neo" pitchFamily="34" charset="-122"/>
+                <a:cs typeface="Apple SD Gothic Neo" pitchFamily="34" charset="-120"/>
+              </a:rPr>
+              <a:t>초기 팀의 가장 큰 위험은 사람이 적은 게 아니라 만든 게 없는 것입니다. 기획부터 배포까지 한 사람 안에서 돌았기 때문에 의사결정에 전달 손실이 없고, 지금 바로 열리는 링크가 그 증거입니다.</a:t>
+            </a:r>
+            <a:endParaRPr lang="en-US" sz="1250" dirty="0"/>
+          </a:p>
+        </p:txBody>
+      </p:sp>
+      <p:sp>
+        <p:nvSpPr>
+          <p:cNvPr id="15" name="Shape 13"/>
+          <p:cNvSpPr/>
+          <p:nvPr/>
+        </p:nvSpPr>
+        <p:spPr>
+          <a:xfrm>
+            <a:off x="5852160" y="3886200"/>
+            <a:ext cx="5669280" cy="1783080"/>
+          </a:xfrm>
+          <a:prstGeom prst="roundRect">
+            <a:avLst>
+              <a:gd name="adj" fmla="val 6154"/>
             </a:avLst>
           </a:prstGeom>
           <a:solidFill>
@@ -3358,55 +3567,69 @@
       </p:sp>
       <p:sp>
         <p:nvSpPr>
-          <p:cNvPr id="11" name="Shape 9"/>
-          <p:cNvSpPr/>
-          <p:nvPr/>
-        </p:nvSpPr>
-        <p:spPr>
-          <a:xfrm>
-            <a:off x="4663440" y="2286000"/>
-            <a:ext cx="731520" cy="731520"/>
-          </a:xfrm>
-          <a:prstGeom prst="ellipse">
-            <a:avLst/>
-          </a:prstGeom>
-          <a:solidFill>
-            <a:srgbClr val="E6E9F0"/>
-          </a:solidFill>
-          <a:ln w="9525">
-            <a:solidFill>
-              <a:srgbClr val="E7DCC9"/>
-            </a:solidFill>
-            <a:prstDash val="solid"/>
-          </a:ln>
-        </p:spPr>
-      </p:sp>
-      <p:sp>
-        <p:nvSpPr>
-          <p:cNvPr id="12" name="Text 10"/>
-          <p:cNvSpPr/>
-          <p:nvPr/>
-        </p:nvSpPr>
-        <p:spPr>
-          <a:xfrm>
-            <a:off x="4663440" y="3154680"/>
-            <a:ext cx="2834640" cy="274320"/>
-          </a:xfrm>
-          <a:prstGeom prst="rect">
-            <a:avLst/>
-          </a:prstGeom>
-          <a:noFill/>
-          <a:ln/>
-        </p:spPr>
-        <p:txBody>
-          <a:bodyPr wrap="square" lIns="0" tIns="0" rIns="0" bIns="0" rtlCol="0" anchor="ctr"/>
-          <a:lstStyle/>
-          <a:p>
-            <a:pPr indent="0" marL="0">
-              <a:buNone/>
-            </a:pPr>
-            <a:r>
-              <a:rPr lang="en-US" sz="1100" b="1" spc="150" kern="0" dirty="0">
+          <p:cNvPr id="16" name="Text 14"/>
+          <p:cNvSpPr/>
+          <p:nvPr/>
+        </p:nvSpPr>
+        <p:spPr>
+          <a:xfrm>
+            <a:off x="6144768" y="4069080"/>
+            <a:ext cx="5084064" cy="292608"/>
+          </a:xfrm>
+          <a:prstGeom prst="rect">
+            <a:avLst/>
+          </a:prstGeom>
+          <a:noFill/>
+          <a:ln/>
+        </p:spPr>
+        <p:txBody>
+          <a:bodyPr wrap="square" lIns="0" tIns="0" rIns="0" bIns="0" rtlCol="0" anchor="ctr"/>
+          <a:lstStyle/>
+          <a:p>
+            <a:pPr indent="0" marL="0">
+              <a:buNone/>
+            </a:pPr>
+            <a:r>
+              <a:rPr lang="en-US" sz="1600" b="1" dirty="0">
+                <a:solidFill>
+                  <a:srgbClr val="26242E"/>
+                </a:solidFill>
+                <a:latin typeface="Apple SD Gothic Neo" pitchFamily="34" charset="0"/>
+                <a:ea typeface="Apple SD Gothic Neo" pitchFamily="34" charset="-122"/>
+                <a:cs typeface="Apple SD Gothic Neo" pitchFamily="34" charset="-120"/>
+              </a:rPr>
+              <a:t>투자금으로 채울 자리 (18개월)</a:t>
+            </a:r>
+            <a:endParaRPr lang="en-US" sz="1600" dirty="0"/>
+          </a:p>
+        </p:txBody>
+      </p:sp>
+      <p:sp>
+        <p:nvSpPr>
+          <p:cNvPr id="17" name="Text 15"/>
+          <p:cNvSpPr/>
+          <p:nvPr/>
+        </p:nvSpPr>
+        <p:spPr>
+          <a:xfrm>
+            <a:off x="6144768" y="4434840"/>
+            <a:ext cx="2286000" cy="274320"/>
+          </a:xfrm>
+          <a:prstGeom prst="rect">
+            <a:avLst/>
+          </a:prstGeom>
+          <a:noFill/>
+          <a:ln/>
+        </p:spPr>
+        <p:txBody>
+          <a:bodyPr wrap="square" lIns="0" tIns="0" rIns="0" bIns="0" rtlCol="0" anchor="ctr"/>
+          <a:lstStyle/>
+          <a:p>
+            <a:pPr indent="0" marL="0">
+              <a:buNone/>
+            </a:pPr>
+            <a:r>
+              <a:rPr lang="en-US" sz="1300" b="1" dirty="0">
                 <a:solidFill>
                   <a:srgbClr val="4A5A86"/>
                 </a:solidFill>
@@ -3414,61 +3637,22 @@
                 <a:ea typeface="Apple SD Gothic Neo" pitchFamily="34" charset="-122"/>
                 <a:cs typeface="Apple SD Gothic Neo" pitchFamily="34" charset="-120"/>
               </a:rPr>
-              <a:t>MEMBER</a:t>
-            </a:r>
-            <a:endParaRPr lang="en-US" sz="1100" dirty="0"/>
-          </a:p>
-        </p:txBody>
-      </p:sp>
-      <p:sp>
-        <p:nvSpPr>
-          <p:cNvPr id="13" name="Text 11"/>
-          <p:cNvSpPr/>
-          <p:nvPr/>
-        </p:nvSpPr>
-        <p:spPr>
-          <a:xfrm>
-            <a:off x="4663440" y="3429000"/>
-            <a:ext cx="2834640" cy="320040"/>
-          </a:xfrm>
-          <a:prstGeom prst="rect">
-            <a:avLst/>
-          </a:prstGeom>
-          <a:noFill/>
-          <a:ln/>
-        </p:spPr>
-        <p:txBody>
-          <a:bodyPr wrap="square" lIns="0" tIns="0" rIns="0" bIns="0" rtlCol="0" anchor="ctr"/>
-          <a:lstStyle/>
-          <a:p>
-            <a:pPr indent="0" marL="0">
-              <a:buNone/>
-            </a:pPr>
-            <a:r>
-              <a:rPr lang="en-US" sz="1600" b="1" dirty="0">
-                <a:solidFill>
-                  <a:srgbClr val="B8873A"/>
-                </a:solidFill>
-                <a:latin typeface="Apple SD Gothic Neo" pitchFamily="34" charset="0"/>
-                <a:ea typeface="Apple SD Gothic Neo" pitchFamily="34" charset="-122"/>
-                <a:cs typeface="Apple SD Gothic Neo" pitchFamily="34" charset="-120"/>
-              </a:rPr>
-              <a:t>이름 · 역할 (채워주세요)</a:t>
-            </a:r>
-            <a:endParaRPr lang="en-US" sz="1600" dirty="0"/>
-          </a:p>
-        </p:txBody>
-      </p:sp>
-      <p:sp>
-        <p:nvSpPr>
-          <p:cNvPr id="14" name="Text 12"/>
-          <p:cNvSpPr/>
-          <p:nvPr/>
-        </p:nvSpPr>
-        <p:spPr>
-          <a:xfrm>
-            <a:off x="4663440" y="3749040"/>
-            <a:ext cx="2834640" cy="457200"/>
+              <a:t>·  브랜드 입점 · MD</a:t>
+            </a:r>
+            <a:endParaRPr lang="en-US" sz="1300" dirty="0"/>
+          </a:p>
+        </p:txBody>
+      </p:sp>
+      <p:sp>
+        <p:nvSpPr>
+          <p:cNvPr id="18" name="Text 16"/>
+          <p:cNvSpPr/>
+          <p:nvPr/>
+        </p:nvSpPr>
+        <p:spPr>
+          <a:xfrm>
+            <a:off x="8458200" y="4434840"/>
+            <a:ext cx="2743200" cy="502920"/>
           </a:xfrm>
           <a:prstGeom prst="rect">
             <a:avLst/>
@@ -3489,13 +3673,13 @@
             <a:r>
               <a:rPr lang="en-US" sz="1200" dirty="0">
                 <a:solidFill>
-                  <a:srgbClr val="7B7989"/>
-                </a:solidFill>
-                <a:latin typeface="Apple SD Gothic Neo" pitchFamily="34" charset="0"/>
-                <a:ea typeface="Apple SD Gothic Neo" pitchFamily="34" charset="-122"/>
-                <a:cs typeface="Apple SD Gothic Neo" pitchFamily="34" charset="-120"/>
-              </a:rPr>
-              <a:t>관련 경험</a:t>
+                  <a:srgbClr val="565463"/>
+                </a:solidFill>
+                <a:latin typeface="Apple SD Gothic Neo" pitchFamily="34" charset="0"/>
+                <a:ea typeface="Apple SD Gothic Neo" pitchFamily="34" charset="-122"/>
+                <a:cs typeface="Apple SD Gothic Neo" pitchFamily="34" charset="-120"/>
+              </a:rPr>
+              <a:t>카탈로그를 늘리는 사람. 규칙 엔진은 상품이 늘수록 강해집니다.</a:t>
             </a:r>
             <a:endParaRPr lang="en-US" sz="1200" dirty="0"/>
           </a:p>
@@ -3503,82 +3687,30 @@
       </p:sp>
       <p:sp>
         <p:nvSpPr>
-          <p:cNvPr id="15" name="Shape 13"/>
-          <p:cNvSpPr/>
-          <p:nvPr/>
-        </p:nvSpPr>
-        <p:spPr>
-          <a:xfrm>
-            <a:off x="8138160" y="2011680"/>
-            <a:ext cx="3383280" cy="2194560"/>
-          </a:xfrm>
-          <a:prstGeom prst="roundRect">
-            <a:avLst>
-              <a:gd name="adj" fmla="val 5000"/>
-            </a:avLst>
-          </a:prstGeom>
-          <a:solidFill>
-            <a:srgbClr val="FFFFFF"/>
-          </a:solidFill>
-          <a:ln w="9525">
-            <a:solidFill>
-              <a:srgbClr val="E7DCC9"/>
-            </a:solidFill>
-            <a:prstDash val="solid"/>
-          </a:ln>
-        </p:spPr>
-      </p:sp>
-      <p:sp>
-        <p:nvSpPr>
-          <p:cNvPr id="16" name="Shape 14"/>
-          <p:cNvSpPr/>
-          <p:nvPr/>
-        </p:nvSpPr>
-        <p:spPr>
-          <a:xfrm>
-            <a:off x="8412480" y="2286000"/>
-            <a:ext cx="731520" cy="731520"/>
-          </a:xfrm>
-          <a:prstGeom prst="ellipse">
-            <a:avLst/>
-          </a:prstGeom>
-          <a:solidFill>
-            <a:srgbClr val="E6E9F0"/>
-          </a:solidFill>
-          <a:ln w="9525">
-            <a:solidFill>
-              <a:srgbClr val="E7DCC9"/>
-            </a:solidFill>
-            <a:prstDash val="solid"/>
-          </a:ln>
-        </p:spPr>
-      </p:sp>
-      <p:sp>
-        <p:nvSpPr>
-          <p:cNvPr id="17" name="Text 15"/>
-          <p:cNvSpPr/>
-          <p:nvPr/>
-        </p:nvSpPr>
-        <p:spPr>
-          <a:xfrm>
-            <a:off x="8412480" y="3154680"/>
-            <a:ext cx="2834640" cy="274320"/>
-          </a:xfrm>
-          <a:prstGeom prst="rect">
-            <a:avLst/>
-          </a:prstGeom>
-          <a:noFill/>
-          <a:ln/>
-        </p:spPr>
-        <p:txBody>
-          <a:bodyPr wrap="square" lIns="0" tIns="0" rIns="0" bIns="0" rtlCol="0" anchor="ctr"/>
-          <a:lstStyle/>
-          <a:p>
-            <a:pPr indent="0" marL="0">
-              <a:buNone/>
-            </a:pPr>
-            <a:r>
-              <a:rPr lang="en-US" sz="1100" b="1" spc="150" kern="0" dirty="0">
+          <p:cNvPr id="19" name="Text 17"/>
+          <p:cNvSpPr/>
+          <p:nvPr/>
+        </p:nvSpPr>
+        <p:spPr>
+          <a:xfrm>
+            <a:off x="6144768" y="5001768"/>
+            <a:ext cx="2286000" cy="274320"/>
+          </a:xfrm>
+          <a:prstGeom prst="rect">
+            <a:avLst/>
+          </a:prstGeom>
+          <a:noFill/>
+          <a:ln/>
+        </p:spPr>
+        <p:txBody>
+          <a:bodyPr wrap="square" lIns="0" tIns="0" rIns="0" bIns="0" rtlCol="0" anchor="ctr"/>
+          <a:lstStyle/>
+          <a:p>
+            <a:pPr indent="0" marL="0">
+              <a:buNone/>
+            </a:pPr>
+            <a:r>
+              <a:rPr lang="en-US" sz="1300" b="1" dirty="0">
                 <a:solidFill>
                   <a:srgbClr val="4A5A86"/>
                 </a:solidFill>
@@ -3586,61 +3718,22 @@
                 <a:ea typeface="Apple SD Gothic Neo" pitchFamily="34" charset="-122"/>
                 <a:cs typeface="Apple SD Gothic Neo" pitchFamily="34" charset="-120"/>
               </a:rPr>
-              <a:t>MEMBER</a:t>
-            </a:r>
-            <a:endParaRPr lang="en-US" sz="1100" dirty="0"/>
-          </a:p>
-        </p:txBody>
-      </p:sp>
-      <p:sp>
-        <p:nvSpPr>
-          <p:cNvPr id="18" name="Text 16"/>
-          <p:cNvSpPr/>
-          <p:nvPr/>
-        </p:nvSpPr>
-        <p:spPr>
-          <a:xfrm>
-            <a:off x="8412480" y="3429000"/>
-            <a:ext cx="2834640" cy="320040"/>
-          </a:xfrm>
-          <a:prstGeom prst="rect">
-            <a:avLst/>
-          </a:prstGeom>
-          <a:noFill/>
-          <a:ln/>
-        </p:spPr>
-        <p:txBody>
-          <a:bodyPr wrap="square" lIns="0" tIns="0" rIns="0" bIns="0" rtlCol="0" anchor="ctr"/>
-          <a:lstStyle/>
-          <a:p>
-            <a:pPr indent="0" marL="0">
-              <a:buNone/>
-            </a:pPr>
-            <a:r>
-              <a:rPr lang="en-US" sz="1600" b="1" dirty="0">
-                <a:solidFill>
-                  <a:srgbClr val="B8873A"/>
-                </a:solidFill>
-                <a:latin typeface="Apple SD Gothic Neo" pitchFamily="34" charset="0"/>
-                <a:ea typeface="Apple SD Gothic Neo" pitchFamily="34" charset="-122"/>
-                <a:cs typeface="Apple SD Gothic Neo" pitchFamily="34" charset="-120"/>
-              </a:rPr>
-              <a:t>이름 · 역할 (채워주세요)</a:t>
-            </a:r>
-            <a:endParaRPr lang="en-US" sz="1600" dirty="0"/>
-          </a:p>
-        </p:txBody>
-      </p:sp>
-      <p:sp>
-        <p:nvSpPr>
-          <p:cNvPr id="19" name="Text 17"/>
-          <p:cNvSpPr/>
-          <p:nvPr/>
-        </p:nvSpPr>
-        <p:spPr>
-          <a:xfrm>
-            <a:off x="8412480" y="3749040"/>
-            <a:ext cx="2834640" cy="457200"/>
+              <a:t>·  프론트엔드 개발</a:t>
+            </a:r>
+            <a:endParaRPr lang="en-US" sz="1300" dirty="0"/>
+          </a:p>
+        </p:txBody>
+      </p:sp>
+      <p:sp>
+        <p:nvSpPr>
+          <p:cNvPr id="20" name="Text 18"/>
+          <p:cNvSpPr/>
+          <p:nvPr/>
+        </p:nvSpPr>
+        <p:spPr>
+          <a:xfrm>
+            <a:off x="8458200" y="5001768"/>
+            <a:ext cx="2743200" cy="502920"/>
           </a:xfrm>
           <a:prstGeom prst="rect">
             <a:avLst/>
@@ -3661,123 +3754,15 @@
             <a:r>
               <a:rPr lang="en-US" sz="1200" dirty="0">
                 <a:solidFill>
-                  <a:srgbClr val="7B7989"/>
-                </a:solidFill>
-                <a:latin typeface="Apple SD Gothic Neo" pitchFamily="34" charset="0"/>
-                <a:ea typeface="Apple SD Gothic Neo" pitchFamily="34" charset="-122"/>
-                <a:cs typeface="Apple SD Gothic Neo" pitchFamily="34" charset="-120"/>
-              </a:rPr>
-              <a:t>관련 경험</a:t>
+                  <a:srgbClr val="565463"/>
+                </a:solidFill>
+                <a:latin typeface="Apple SD Gothic Neo" pitchFamily="34" charset="0"/>
+                <a:ea typeface="Apple SD Gothic Neo" pitchFamily="34" charset="-122"/>
+                <a:cs typeface="Apple SD Gothic Neo" pitchFamily="34" charset="-120"/>
+              </a:rPr>
+              <a:t>제가 제품 방향에 시간을 쓸 수 있게 되는 자리.</a:t>
             </a:r>
             <a:endParaRPr lang="en-US" sz="1200" dirty="0"/>
-          </a:p>
-        </p:txBody>
-      </p:sp>
-      <p:sp>
-        <p:nvSpPr>
-          <p:cNvPr id="20" name="Shape 18"/>
-          <p:cNvSpPr/>
-          <p:nvPr/>
-        </p:nvSpPr>
-        <p:spPr>
-          <a:xfrm>
-            <a:off x="640080" y="4434840"/>
-            <a:ext cx="10881360" cy="1188720"/>
-          </a:xfrm>
-          <a:prstGeom prst="roundRect">
-            <a:avLst>
-              <a:gd name="adj" fmla="val 9231"/>
-            </a:avLst>
-          </a:prstGeom>
-          <a:solidFill>
-            <a:srgbClr val="F4EFE7"/>
-          </a:solidFill>
-          <a:ln w="9525">
-            <a:solidFill>
-              <a:srgbClr val="E7DCC9"/>
-            </a:solidFill>
-            <a:prstDash val="solid"/>
-          </a:ln>
-        </p:spPr>
-      </p:sp>
-      <p:sp>
-        <p:nvSpPr>
-          <p:cNvPr id="21" name="Text 19"/>
-          <p:cNvSpPr/>
-          <p:nvPr/>
-        </p:nvSpPr>
-        <p:spPr>
-          <a:xfrm>
-            <a:off x="914400" y="4617720"/>
-            <a:ext cx="10332720" cy="274320"/>
-          </a:xfrm>
-          <a:prstGeom prst="rect">
-            <a:avLst/>
-          </a:prstGeom>
-          <a:noFill/>
-          <a:ln/>
-        </p:spPr>
-        <p:txBody>
-          <a:bodyPr wrap="square" lIns="0" tIns="0" rIns="0" bIns="0" rtlCol="0" anchor="ctr"/>
-          <a:lstStyle/>
-          <a:p>
-            <a:pPr indent="0" marL="0">
-              <a:buNone/>
-            </a:pPr>
-            <a:r>
-              <a:rPr lang="en-US" sz="1600" b="1" dirty="0">
-                <a:solidFill>
-                  <a:srgbClr val="26242E"/>
-                </a:solidFill>
-                <a:latin typeface="Apple SD Gothic Neo" pitchFamily="34" charset="0"/>
-                <a:ea typeface="Apple SD Gothic Neo" pitchFamily="34" charset="-122"/>
-                <a:cs typeface="Apple SD Gothic Neo" pitchFamily="34" charset="-120"/>
-              </a:rPr>
-              <a:t>이미 증명한 것</a:t>
-            </a:r>
-            <a:endParaRPr lang="en-US" sz="1600" dirty="0"/>
-          </a:p>
-        </p:txBody>
-      </p:sp>
-      <p:sp>
-        <p:nvSpPr>
-          <p:cNvPr id="22" name="Text 20"/>
-          <p:cNvSpPr/>
-          <p:nvPr/>
-        </p:nvSpPr>
-        <p:spPr>
-          <a:xfrm>
-            <a:off x="914400" y="4937760"/>
-            <a:ext cx="10332720" cy="502920"/>
-          </a:xfrm>
-          <a:prstGeom prst="rect">
-            <a:avLst/>
-          </a:prstGeom>
-          <a:noFill/>
-          <a:ln/>
-        </p:spPr>
-        <p:txBody>
-          <a:bodyPr wrap="square" lIns="0" tIns="0" rIns="0" bIns="0" rtlCol="0" anchor="ctr"/>
-          <a:lstStyle/>
-          <a:p>
-            <a:pPr indent="0" marL="0">
-              <a:lnSpc>
-                <a:spcPts val="1900"/>
-              </a:lnSpc>
-              <a:buNone/>
-            </a:pPr>
-            <a:r>
-              <a:rPr lang="en-US" sz="1300" dirty="0">
-                <a:solidFill>
-                  <a:srgbClr val="565463"/>
-                </a:solidFill>
-                <a:latin typeface="Apple SD Gothic Neo" pitchFamily="34" charset="0"/>
-                <a:ea typeface="Apple SD Gothic Neo" pitchFamily="34" charset="-122"/>
-                <a:cs typeface="Apple SD Gothic Neo" pitchFamily="34" charset="-120"/>
-              </a:rPr>
-              <a:t>기획 · 디자인 · 개발을 커밋 43개 · 12,560줄로 배포 가능한 상태까지 만들었습니다. 팀 슬라이드가 약할 때 이 항목이 가장 잘 먹힙니다 — 말이 아니라 돌아가는 링크가 근거입니다.</a:t>
-            </a:r>
-            <a:endParaRPr lang="en-US" sz="1300" dirty="0"/>
           </a:p>
         </p:txBody>
       </p:sp>
@@ -3821,8 +3806,8 @@
         </p:nvSpPr>
         <p:spPr>
           <a:xfrm>
-            <a:off x="-2011680" y="3291840"/>
-            <a:ext cx="5852160" cy="5852160"/>
+            <a:off x="-2194560" y="3840480"/>
+            <a:ext cx="5486400" cy="5486400"/>
           </a:xfrm>
           <a:prstGeom prst="ellipse">
             <a:avLst/>
@@ -3846,7 +3831,7 @@
         </p:nvSpPr>
         <p:spPr>
           <a:xfrm>
-            <a:off x="640080" y="640080"/>
+            <a:off x="640080" y="502920"/>
             <a:ext cx="5486400" cy="274320"/>
           </a:xfrm>
           <a:prstGeom prst="rect">
@@ -3885,8 +3870,8 @@
         </p:nvSpPr>
         <p:spPr>
           <a:xfrm>
-            <a:off x="640080" y="960120"/>
-            <a:ext cx="7315200" cy="685800"/>
+            <a:off x="640080" y="822960"/>
+            <a:ext cx="8229600" cy="685800"/>
           </a:xfrm>
           <a:prstGeom prst="rect">
             <a:avLst/>
@@ -3910,7 +3895,7 @@
                 <a:ea typeface="Apple SD Gothic Neo" pitchFamily="34" charset="-122"/>
                 <a:cs typeface="Apple SD Gothic Neo" pitchFamily="34" charset="-120"/>
               </a:rPr>
-              <a:t>요청</a:t>
+              <a:t>3.5억원 · 18개월</a:t>
             </a:r>
             <a:endParaRPr lang="en-US" sz="4000" dirty="0"/>
           </a:p>
@@ -3918,18 +3903,60 @@
       </p:sp>
       <p:sp>
         <p:nvSpPr>
-          <p:cNvPr id="5" name="Shape 3"/>
-          <p:cNvSpPr/>
-          <p:nvPr/>
-        </p:nvSpPr>
-        <p:spPr>
-          <a:xfrm>
-            <a:off x="640080" y="2011680"/>
-            <a:ext cx="5257800" cy="2286000"/>
+          <p:cNvPr id="5" name="Text 3"/>
+          <p:cNvSpPr/>
+          <p:nvPr/>
+        </p:nvSpPr>
+        <p:spPr>
+          <a:xfrm>
+            <a:off x="640080" y="1554480"/>
+            <a:ext cx="10881360" cy="502920"/>
+          </a:xfrm>
+          <a:prstGeom prst="rect">
+            <a:avLst/>
+          </a:prstGeom>
+          <a:noFill/>
+          <a:ln/>
+        </p:spPr>
+        <p:txBody>
+          <a:bodyPr wrap="square" lIns="0" tIns="0" rIns="0" bIns="0" rtlCol="0" anchor="ctr"/>
+          <a:lstStyle/>
+          <a:p>
+            <a:pPr indent="0" marL="0">
+              <a:lnSpc>
+                <a:spcPts val="1800"/>
+              </a:lnSpc>
+              <a:buNone/>
+            </a:pPr>
+            <a:r>
+              <a:rPr lang="en-US" sz="1250" dirty="0">
+                <a:solidFill>
+                  <a:srgbClr val="E6E9F0"/>
+                </a:solidFill>
+                <a:latin typeface="Apple SD Gothic Neo" pitchFamily="34" charset="0"/>
+                <a:ea typeface="Apple SD Gothic Neo" pitchFamily="34" charset="-122"/>
+                <a:cs typeface="Apple SD Gothic Neo" pitchFamily="34" charset="-120"/>
+              </a:rPr>
+              <a:t>18개월은 「만들 시간」이 아니라 재구매율이 나오는 데 걸리는 시간입니다 — 화장품 한 통이 두 달이라 최소 2~3회전이 필요합니다.</a:t>
+            </a:r>
+            <a:endParaRPr lang="en-US" sz="1250" dirty="0"/>
+          </a:p>
+        </p:txBody>
+      </p:sp>
+      <p:sp>
+        <p:nvSpPr>
+          <p:cNvPr id="6" name="Shape 4"/>
+          <p:cNvSpPr/>
+          <p:nvPr/>
+        </p:nvSpPr>
+        <p:spPr>
+          <a:xfrm>
+            <a:off x="640080" y="2103120"/>
+            <a:ext cx="5486400" cy="3246120"/>
           </a:xfrm>
           <a:prstGeom prst="roundRect">
             <a:avLst>
-              <a:gd name="adj" fmla="val 4800"/>
+              <a:gd name="adj" fmla="val 3380"/>
             </a:avLst>
           </a:prstGeom>
           <a:solidFill>
@@ -3945,14 +3972,14 @@
       </p:sp>
       <p:sp>
         <p:nvSpPr>
-          <p:cNvPr id="6" name="Text 4"/>
-          <p:cNvSpPr/>
-          <p:nvPr/>
-        </p:nvSpPr>
-        <p:spPr>
-          <a:xfrm>
-            <a:off x="932688" y="2240280"/>
-            <a:ext cx="4672584" cy="274320"/>
+          <p:cNvPr id="7" name="Text 5"/>
+          <p:cNvSpPr/>
+          <p:nvPr/>
+        </p:nvSpPr>
+        <p:spPr>
+          <a:xfrm>
+            <a:off x="932688" y="2286000"/>
+            <a:ext cx="4901184" cy="274320"/>
           </a:xfrm>
           <a:prstGeom prst="rect">
             <a:avLst/>
@@ -3976,7 +4003,7 @@
                 <a:ea typeface="Apple SD Gothic Neo" pitchFamily="34" charset="-122"/>
                 <a:cs typeface="Apple SD Gothic Neo" pitchFamily="34" charset="-120"/>
               </a:rPr>
-              <a:t>투자 규모</a:t>
+              <a:t>사용처</a:t>
             </a:r>
             <a:endParaRPr lang="en-US" sz="1100" dirty="0"/>
           </a:p>
@@ -3984,53 +4011,14 @@
       </p:sp>
       <p:sp>
         <p:nvSpPr>
-          <p:cNvPr id="7" name="Text 5"/>
-          <p:cNvSpPr/>
-          <p:nvPr/>
-        </p:nvSpPr>
-        <p:spPr>
-          <a:xfrm>
-            <a:off x="932688" y="2606040"/>
-            <a:ext cx="4672584" cy="548640"/>
-          </a:xfrm>
-          <a:prstGeom prst="rect">
-            <a:avLst/>
-          </a:prstGeom>
-          <a:noFill/>
-          <a:ln/>
-        </p:spPr>
-        <p:txBody>
-          <a:bodyPr wrap="square" lIns="0" tIns="0" rIns="0" bIns="0" rtlCol="0" anchor="ctr"/>
-          <a:lstStyle/>
-          <a:p>
-            <a:pPr indent="0" marL="0">
-              <a:buNone/>
-            </a:pPr>
-            <a:r>
-              <a:rPr lang="en-US" sz="2800" b="1" dirty="0">
-                <a:solidFill>
-                  <a:srgbClr val="B8873A"/>
-                </a:solidFill>
-                <a:latin typeface="Apple SD Gothic Neo" pitchFamily="34" charset="0"/>
-                <a:ea typeface="Apple SD Gothic Neo" pitchFamily="34" charset="-122"/>
-                <a:cs typeface="Apple SD Gothic Neo" pitchFamily="34" charset="-120"/>
-              </a:rPr>
-              <a:t>금액 (채워주세요)</a:t>
-            </a:r>
-            <a:endParaRPr lang="en-US" sz="2800" dirty="0"/>
-          </a:p>
-        </p:txBody>
-      </p:sp>
-      <p:sp>
-        <p:nvSpPr>
           <p:cNvPr id="8" name="Text 6"/>
           <p:cNvSpPr/>
           <p:nvPr/>
         </p:nvSpPr>
         <p:spPr>
           <a:xfrm>
-            <a:off x="932688" y="3291840"/>
-            <a:ext cx="4672584" cy="457200"/>
+            <a:off x="932688" y="2651760"/>
+            <a:ext cx="3200400" cy="274320"/>
           </a:xfrm>
           <a:prstGeom prst="rect">
             <a:avLst/>
@@ -4054,7 +4042,7 @@
                 <a:ea typeface="Apple SD Gothic Neo" pitchFamily="34" charset="-122"/>
                 <a:cs typeface="Apple SD Gothic Neo" pitchFamily="34" charset="-120"/>
               </a:rPr>
-              <a:t>런웨이 개월 수 · 사용처 비중 (개발 / 입점 / 마케팅)</a:t>
+              <a:t>인건비 2인 · 18개월</a:t>
             </a:r>
             <a:endParaRPr lang="en-US" sz="1300" dirty="0"/>
           </a:p>
@@ -4062,18 +4050,642 @@
       </p:sp>
       <p:sp>
         <p:nvSpPr>
-          <p:cNvPr id="9" name="Shape 7"/>
-          <p:cNvSpPr/>
-          <p:nvPr/>
-        </p:nvSpPr>
-        <p:spPr>
-          <a:xfrm>
-            <a:off x="6263640" y="2011680"/>
-            <a:ext cx="5257800" cy="2286000"/>
+          <p:cNvPr id="9" name="Text 7"/>
+          <p:cNvSpPr/>
+          <p:nvPr/>
+        </p:nvSpPr>
+        <p:spPr>
+          <a:xfrm>
+            <a:off x="4206240" y="2651760"/>
+            <a:ext cx="822960" cy="274320"/>
+          </a:xfrm>
+          <a:prstGeom prst="rect">
+            <a:avLst/>
+          </a:prstGeom>
+          <a:noFill/>
+          <a:ln/>
+        </p:spPr>
+        <p:txBody>
+          <a:bodyPr wrap="square" lIns="0" tIns="0" rIns="0" bIns="0" rtlCol="0" anchor="ctr"/>
+          <a:lstStyle/>
+          <a:p>
+            <a:pPr algn="r" indent="0" marL="0">
+              <a:buNone/>
+            </a:pPr>
+            <a:r>
+              <a:rPr lang="en-US" sz="1300" b="1" dirty="0">
+                <a:solidFill>
+                  <a:srgbClr val="26242E"/>
+                </a:solidFill>
+                <a:latin typeface="Apple SD Gothic Neo" pitchFamily="34" charset="0"/>
+                <a:ea typeface="Apple SD Gothic Neo" pitchFamily="34" charset="-122"/>
+                <a:cs typeface="Apple SD Gothic Neo" pitchFamily="34" charset="-120"/>
+              </a:rPr>
+              <a:t>2.0억</a:t>
+            </a:r>
+            <a:endParaRPr lang="en-US" sz="1300" dirty="0"/>
+          </a:p>
+        </p:txBody>
+      </p:sp>
+      <p:sp>
+        <p:nvSpPr>
+          <p:cNvPr id="10" name="Text 8"/>
+          <p:cNvSpPr/>
+          <p:nvPr/>
+        </p:nvSpPr>
+        <p:spPr>
+          <a:xfrm>
+            <a:off x="5166360" y="2651760"/>
+            <a:ext cx="685800" cy="274320"/>
+          </a:xfrm>
+          <a:prstGeom prst="rect">
+            <a:avLst/>
+          </a:prstGeom>
+          <a:noFill/>
+          <a:ln/>
+        </p:spPr>
+        <p:txBody>
+          <a:bodyPr wrap="square" lIns="0" tIns="0" rIns="0" bIns="0" rtlCol="0" anchor="ctr"/>
+          <a:lstStyle/>
+          <a:p>
+            <a:pPr algn="r" indent="0" marL="0">
+              <a:buNone/>
+            </a:pPr>
+            <a:r>
+              <a:rPr lang="en-US" sz="1200" dirty="0">
+                <a:solidFill>
+                  <a:srgbClr val="7B7989"/>
+                </a:solidFill>
+                <a:latin typeface="Apple SD Gothic Neo" pitchFamily="34" charset="0"/>
+                <a:ea typeface="Apple SD Gothic Neo" pitchFamily="34" charset="-122"/>
+                <a:cs typeface="Apple SD Gothic Neo" pitchFamily="34" charset="-120"/>
+              </a:rPr>
+              <a:t>58%</a:t>
+            </a:r>
+            <a:endParaRPr lang="en-US" sz="1200" dirty="0"/>
+          </a:p>
+        </p:txBody>
+      </p:sp>
+      <p:sp>
+        <p:nvSpPr>
+          <p:cNvPr id="11" name="Text 9"/>
+          <p:cNvSpPr/>
+          <p:nvPr/>
+        </p:nvSpPr>
+        <p:spPr>
+          <a:xfrm>
+            <a:off x="932688" y="3108960"/>
+            <a:ext cx="3200400" cy="274320"/>
+          </a:xfrm>
+          <a:prstGeom prst="rect">
+            <a:avLst/>
+          </a:prstGeom>
+          <a:noFill/>
+          <a:ln/>
+        </p:spPr>
+        <p:txBody>
+          <a:bodyPr wrap="square" lIns="0" tIns="0" rIns="0" bIns="0" rtlCol="0" anchor="ctr"/>
+          <a:lstStyle/>
+          <a:p>
+            <a:pPr indent="0" marL="0">
+              <a:buNone/>
+            </a:pPr>
+            <a:r>
+              <a:rPr lang="en-US" sz="1300" dirty="0">
+                <a:solidFill>
+                  <a:srgbClr val="565463"/>
+                </a:solidFill>
+                <a:latin typeface="Apple SD Gothic Neo" pitchFamily="34" charset="0"/>
+                <a:ea typeface="Apple SD Gothic Neo" pitchFamily="34" charset="-122"/>
+                <a:cs typeface="Apple SD Gothic Neo" pitchFamily="34" charset="-120"/>
+              </a:rPr>
+              <a:t>브랜드 입점 · 상품 데이터 구축</a:t>
+            </a:r>
+            <a:endParaRPr lang="en-US" sz="1300" dirty="0"/>
+          </a:p>
+        </p:txBody>
+      </p:sp>
+      <p:sp>
+        <p:nvSpPr>
+          <p:cNvPr id="12" name="Text 10"/>
+          <p:cNvSpPr/>
+          <p:nvPr/>
+        </p:nvSpPr>
+        <p:spPr>
+          <a:xfrm>
+            <a:off x="4206240" y="3108960"/>
+            <a:ext cx="822960" cy="274320"/>
+          </a:xfrm>
+          <a:prstGeom prst="rect">
+            <a:avLst/>
+          </a:prstGeom>
+          <a:noFill/>
+          <a:ln/>
+        </p:spPr>
+        <p:txBody>
+          <a:bodyPr wrap="square" lIns="0" tIns="0" rIns="0" bIns="0" rtlCol="0" anchor="ctr"/>
+          <a:lstStyle/>
+          <a:p>
+            <a:pPr algn="r" indent="0" marL="0">
+              <a:buNone/>
+            </a:pPr>
+            <a:r>
+              <a:rPr lang="en-US" sz="1300" b="1" dirty="0">
+                <a:solidFill>
+                  <a:srgbClr val="26242E"/>
+                </a:solidFill>
+                <a:latin typeface="Apple SD Gothic Neo" pitchFamily="34" charset="0"/>
+                <a:ea typeface="Apple SD Gothic Neo" pitchFamily="34" charset="-122"/>
+                <a:cs typeface="Apple SD Gothic Neo" pitchFamily="34" charset="-120"/>
+              </a:rPr>
+              <a:t>0.4억</a:t>
+            </a:r>
+            <a:endParaRPr lang="en-US" sz="1300" dirty="0"/>
+          </a:p>
+        </p:txBody>
+      </p:sp>
+      <p:sp>
+        <p:nvSpPr>
+          <p:cNvPr id="13" name="Text 11"/>
+          <p:cNvSpPr/>
+          <p:nvPr/>
+        </p:nvSpPr>
+        <p:spPr>
+          <a:xfrm>
+            <a:off x="5166360" y="3108960"/>
+            <a:ext cx="685800" cy="274320"/>
+          </a:xfrm>
+          <a:prstGeom prst="rect">
+            <a:avLst/>
+          </a:prstGeom>
+          <a:noFill/>
+          <a:ln/>
+        </p:spPr>
+        <p:txBody>
+          <a:bodyPr wrap="square" lIns="0" tIns="0" rIns="0" bIns="0" rtlCol="0" anchor="ctr"/>
+          <a:lstStyle/>
+          <a:p>
+            <a:pPr algn="r" indent="0" marL="0">
+              <a:buNone/>
+            </a:pPr>
+            <a:r>
+              <a:rPr lang="en-US" sz="1200" dirty="0">
+                <a:solidFill>
+                  <a:srgbClr val="7B7989"/>
+                </a:solidFill>
+                <a:latin typeface="Apple SD Gothic Neo" pitchFamily="34" charset="0"/>
+                <a:ea typeface="Apple SD Gothic Neo" pitchFamily="34" charset="-122"/>
+                <a:cs typeface="Apple SD Gothic Neo" pitchFamily="34" charset="-120"/>
+              </a:rPr>
+              <a:t>11%</a:t>
+            </a:r>
+            <a:endParaRPr lang="en-US" sz="1200" dirty="0"/>
+          </a:p>
+        </p:txBody>
+      </p:sp>
+      <p:sp>
+        <p:nvSpPr>
+          <p:cNvPr id="14" name="Text 12"/>
+          <p:cNvSpPr/>
+          <p:nvPr/>
+        </p:nvSpPr>
+        <p:spPr>
+          <a:xfrm>
+            <a:off x="932688" y="3566160"/>
+            <a:ext cx="3200400" cy="274320"/>
+          </a:xfrm>
+          <a:prstGeom prst="rect">
+            <a:avLst/>
+          </a:prstGeom>
+          <a:noFill/>
+          <a:ln/>
+        </p:spPr>
+        <p:txBody>
+          <a:bodyPr wrap="square" lIns="0" tIns="0" rIns="0" bIns="0" rtlCol="0" anchor="ctr"/>
+          <a:lstStyle/>
+          <a:p>
+            <a:pPr indent="0" marL="0">
+              <a:buNone/>
+            </a:pPr>
+            <a:r>
+              <a:rPr lang="en-US" sz="1300" dirty="0">
+                <a:solidFill>
+                  <a:srgbClr val="565463"/>
+                </a:solidFill>
+                <a:latin typeface="Apple SD Gothic Neo" pitchFamily="34" charset="0"/>
+                <a:ea typeface="Apple SD Gothic Neo" pitchFamily="34" charset="-122"/>
+                <a:cs typeface="Apple SD Gothic Neo" pitchFamily="34" charset="-120"/>
+              </a:rPr>
+              <a:t>초기 유저 확보</a:t>
+            </a:r>
+            <a:endParaRPr lang="en-US" sz="1300" dirty="0"/>
+          </a:p>
+        </p:txBody>
+      </p:sp>
+      <p:sp>
+        <p:nvSpPr>
+          <p:cNvPr id="15" name="Text 13"/>
+          <p:cNvSpPr/>
+          <p:nvPr/>
+        </p:nvSpPr>
+        <p:spPr>
+          <a:xfrm>
+            <a:off x="4206240" y="3566160"/>
+            <a:ext cx="822960" cy="274320"/>
+          </a:xfrm>
+          <a:prstGeom prst="rect">
+            <a:avLst/>
+          </a:prstGeom>
+          <a:noFill/>
+          <a:ln/>
+        </p:spPr>
+        <p:txBody>
+          <a:bodyPr wrap="square" lIns="0" tIns="0" rIns="0" bIns="0" rtlCol="0" anchor="ctr"/>
+          <a:lstStyle/>
+          <a:p>
+            <a:pPr algn="r" indent="0" marL="0">
+              <a:buNone/>
+            </a:pPr>
+            <a:r>
+              <a:rPr lang="en-US" sz="1300" b="1" dirty="0">
+                <a:solidFill>
+                  <a:srgbClr val="26242E"/>
+                </a:solidFill>
+                <a:latin typeface="Apple SD Gothic Neo" pitchFamily="34" charset="0"/>
+                <a:ea typeface="Apple SD Gothic Neo" pitchFamily="34" charset="-122"/>
+                <a:cs typeface="Apple SD Gothic Neo" pitchFamily="34" charset="-120"/>
+              </a:rPr>
+              <a:t>0.5억</a:t>
+            </a:r>
+            <a:endParaRPr lang="en-US" sz="1300" dirty="0"/>
+          </a:p>
+        </p:txBody>
+      </p:sp>
+      <p:sp>
+        <p:nvSpPr>
+          <p:cNvPr id="16" name="Text 14"/>
+          <p:cNvSpPr/>
+          <p:nvPr/>
+        </p:nvSpPr>
+        <p:spPr>
+          <a:xfrm>
+            <a:off x="5166360" y="3566160"/>
+            <a:ext cx="685800" cy="274320"/>
+          </a:xfrm>
+          <a:prstGeom prst="rect">
+            <a:avLst/>
+          </a:prstGeom>
+          <a:noFill/>
+          <a:ln/>
+        </p:spPr>
+        <p:txBody>
+          <a:bodyPr wrap="square" lIns="0" tIns="0" rIns="0" bIns="0" rtlCol="0" anchor="ctr"/>
+          <a:lstStyle/>
+          <a:p>
+            <a:pPr algn="r" indent="0" marL="0">
+              <a:buNone/>
+            </a:pPr>
+            <a:r>
+              <a:rPr lang="en-US" sz="1200" dirty="0">
+                <a:solidFill>
+                  <a:srgbClr val="7B7989"/>
+                </a:solidFill>
+                <a:latin typeface="Apple SD Gothic Neo" pitchFamily="34" charset="0"/>
+                <a:ea typeface="Apple SD Gothic Neo" pitchFamily="34" charset="-122"/>
+                <a:cs typeface="Apple SD Gothic Neo" pitchFamily="34" charset="-120"/>
+              </a:rPr>
+              <a:t>14%</a:t>
+            </a:r>
+            <a:endParaRPr lang="en-US" sz="1200" dirty="0"/>
+          </a:p>
+        </p:txBody>
+      </p:sp>
+      <p:sp>
+        <p:nvSpPr>
+          <p:cNvPr id="17" name="Text 15"/>
+          <p:cNvSpPr/>
+          <p:nvPr/>
+        </p:nvSpPr>
+        <p:spPr>
+          <a:xfrm>
+            <a:off x="932688" y="4023360"/>
+            <a:ext cx="3200400" cy="274320"/>
+          </a:xfrm>
+          <a:prstGeom prst="rect">
+            <a:avLst/>
+          </a:prstGeom>
+          <a:noFill/>
+          <a:ln/>
+        </p:spPr>
+        <p:txBody>
+          <a:bodyPr wrap="square" lIns="0" tIns="0" rIns="0" bIns="0" rtlCol="0" anchor="ctr"/>
+          <a:lstStyle/>
+          <a:p>
+            <a:pPr indent="0" marL="0">
+              <a:buNone/>
+            </a:pPr>
+            <a:r>
+              <a:rPr lang="en-US" sz="1300" dirty="0">
+                <a:solidFill>
+                  <a:srgbClr val="565463"/>
+                </a:solidFill>
+                <a:latin typeface="Apple SD Gothic Neo" pitchFamily="34" charset="0"/>
+                <a:ea typeface="Apple SD Gothic Neo" pitchFamily="34" charset="-122"/>
+                <a:cs typeface="Apple SD Gothic Neo" pitchFamily="34" charset="-120"/>
+              </a:rPr>
+              <a:t>서버 · 법률 · 회계 · 툴</a:t>
+            </a:r>
+            <a:endParaRPr lang="en-US" sz="1300" dirty="0"/>
+          </a:p>
+        </p:txBody>
+      </p:sp>
+      <p:sp>
+        <p:nvSpPr>
+          <p:cNvPr id="18" name="Text 16"/>
+          <p:cNvSpPr/>
+          <p:nvPr/>
+        </p:nvSpPr>
+        <p:spPr>
+          <a:xfrm>
+            <a:off x="4206240" y="4023360"/>
+            <a:ext cx="822960" cy="274320"/>
+          </a:xfrm>
+          <a:prstGeom prst="rect">
+            <a:avLst/>
+          </a:prstGeom>
+          <a:noFill/>
+          <a:ln/>
+        </p:spPr>
+        <p:txBody>
+          <a:bodyPr wrap="square" lIns="0" tIns="0" rIns="0" bIns="0" rtlCol="0" anchor="ctr"/>
+          <a:lstStyle/>
+          <a:p>
+            <a:pPr algn="r" indent="0" marL="0">
+              <a:buNone/>
+            </a:pPr>
+            <a:r>
+              <a:rPr lang="en-US" sz="1300" b="1" dirty="0">
+                <a:solidFill>
+                  <a:srgbClr val="26242E"/>
+                </a:solidFill>
+                <a:latin typeface="Apple SD Gothic Neo" pitchFamily="34" charset="0"/>
+                <a:ea typeface="Apple SD Gothic Neo" pitchFamily="34" charset="-122"/>
+                <a:cs typeface="Apple SD Gothic Neo" pitchFamily="34" charset="-120"/>
+              </a:rPr>
+              <a:t>0.2억</a:t>
+            </a:r>
+            <a:endParaRPr lang="en-US" sz="1300" dirty="0"/>
+          </a:p>
+        </p:txBody>
+      </p:sp>
+      <p:sp>
+        <p:nvSpPr>
+          <p:cNvPr id="19" name="Text 17"/>
+          <p:cNvSpPr/>
+          <p:nvPr/>
+        </p:nvSpPr>
+        <p:spPr>
+          <a:xfrm>
+            <a:off x="5166360" y="4023360"/>
+            <a:ext cx="685800" cy="274320"/>
+          </a:xfrm>
+          <a:prstGeom prst="rect">
+            <a:avLst/>
+          </a:prstGeom>
+          <a:noFill/>
+          <a:ln/>
+        </p:spPr>
+        <p:txBody>
+          <a:bodyPr wrap="square" lIns="0" tIns="0" rIns="0" bIns="0" rtlCol="0" anchor="ctr"/>
+          <a:lstStyle/>
+          <a:p>
+            <a:pPr algn="r" indent="0" marL="0">
+              <a:buNone/>
+            </a:pPr>
+            <a:r>
+              <a:rPr lang="en-US" sz="1200" dirty="0">
+                <a:solidFill>
+                  <a:srgbClr val="7B7989"/>
+                </a:solidFill>
+                <a:latin typeface="Apple SD Gothic Neo" pitchFamily="34" charset="0"/>
+                <a:ea typeface="Apple SD Gothic Neo" pitchFamily="34" charset="-122"/>
+                <a:cs typeface="Apple SD Gothic Neo" pitchFamily="34" charset="-120"/>
+              </a:rPr>
+              <a:t>6%</a:t>
+            </a:r>
+            <a:endParaRPr lang="en-US" sz="1200" dirty="0"/>
+          </a:p>
+        </p:txBody>
+      </p:sp>
+      <p:sp>
+        <p:nvSpPr>
+          <p:cNvPr id="20" name="Text 18"/>
+          <p:cNvSpPr/>
+          <p:nvPr/>
+        </p:nvSpPr>
+        <p:spPr>
+          <a:xfrm>
+            <a:off x="932688" y="4480560"/>
+            <a:ext cx="3200400" cy="274320"/>
+          </a:xfrm>
+          <a:prstGeom prst="rect">
+            <a:avLst/>
+          </a:prstGeom>
+          <a:noFill/>
+          <a:ln/>
+        </p:spPr>
+        <p:txBody>
+          <a:bodyPr wrap="square" lIns="0" tIns="0" rIns="0" bIns="0" rtlCol="0" anchor="ctr"/>
+          <a:lstStyle/>
+          <a:p>
+            <a:pPr indent="0" marL="0">
+              <a:buNone/>
+            </a:pPr>
+            <a:r>
+              <a:rPr lang="en-US" sz="1300" dirty="0">
+                <a:solidFill>
+                  <a:srgbClr val="565463"/>
+                </a:solidFill>
+                <a:latin typeface="Apple SD Gothic Neo" pitchFamily="34" charset="0"/>
+                <a:ea typeface="Apple SD Gothic Neo" pitchFamily="34" charset="-122"/>
+                <a:cs typeface="Apple SD Gothic Neo" pitchFamily="34" charset="-120"/>
+              </a:rPr>
+              <a:t>예비비</a:t>
+            </a:r>
+            <a:endParaRPr lang="en-US" sz="1300" dirty="0"/>
+          </a:p>
+        </p:txBody>
+      </p:sp>
+      <p:sp>
+        <p:nvSpPr>
+          <p:cNvPr id="21" name="Text 19"/>
+          <p:cNvSpPr/>
+          <p:nvPr/>
+        </p:nvSpPr>
+        <p:spPr>
+          <a:xfrm>
+            <a:off x="4206240" y="4480560"/>
+            <a:ext cx="822960" cy="274320"/>
+          </a:xfrm>
+          <a:prstGeom prst="rect">
+            <a:avLst/>
+          </a:prstGeom>
+          <a:noFill/>
+          <a:ln/>
+        </p:spPr>
+        <p:txBody>
+          <a:bodyPr wrap="square" lIns="0" tIns="0" rIns="0" bIns="0" rtlCol="0" anchor="ctr"/>
+          <a:lstStyle/>
+          <a:p>
+            <a:pPr algn="r" indent="0" marL="0">
+              <a:buNone/>
+            </a:pPr>
+            <a:r>
+              <a:rPr lang="en-US" sz="1300" b="1" dirty="0">
+                <a:solidFill>
+                  <a:srgbClr val="26242E"/>
+                </a:solidFill>
+                <a:latin typeface="Apple SD Gothic Neo" pitchFamily="34" charset="0"/>
+                <a:ea typeface="Apple SD Gothic Neo" pitchFamily="34" charset="-122"/>
+                <a:cs typeface="Apple SD Gothic Neo" pitchFamily="34" charset="-120"/>
+              </a:rPr>
+              <a:t>0.4억</a:t>
+            </a:r>
+            <a:endParaRPr lang="en-US" sz="1300" dirty="0"/>
+          </a:p>
+        </p:txBody>
+      </p:sp>
+      <p:sp>
+        <p:nvSpPr>
+          <p:cNvPr id="22" name="Text 20"/>
+          <p:cNvSpPr/>
+          <p:nvPr/>
+        </p:nvSpPr>
+        <p:spPr>
+          <a:xfrm>
+            <a:off x="5166360" y="4480560"/>
+            <a:ext cx="685800" cy="274320"/>
+          </a:xfrm>
+          <a:prstGeom prst="rect">
+            <a:avLst/>
+          </a:prstGeom>
+          <a:noFill/>
+          <a:ln/>
+        </p:spPr>
+        <p:txBody>
+          <a:bodyPr wrap="square" lIns="0" tIns="0" rIns="0" bIns="0" rtlCol="0" anchor="ctr"/>
+          <a:lstStyle/>
+          <a:p>
+            <a:pPr algn="r" indent="0" marL="0">
+              <a:buNone/>
+            </a:pPr>
+            <a:r>
+              <a:rPr lang="en-US" sz="1200" dirty="0">
+                <a:solidFill>
+                  <a:srgbClr val="7B7989"/>
+                </a:solidFill>
+                <a:latin typeface="Apple SD Gothic Neo" pitchFamily="34" charset="0"/>
+                <a:ea typeface="Apple SD Gothic Neo" pitchFamily="34" charset="-122"/>
+                <a:cs typeface="Apple SD Gothic Neo" pitchFamily="34" charset="-120"/>
+              </a:rPr>
+              <a:t>11%</a:t>
+            </a:r>
+            <a:endParaRPr lang="en-US" sz="1200" dirty="0"/>
+          </a:p>
+        </p:txBody>
+      </p:sp>
+      <p:sp>
+        <p:nvSpPr>
+          <p:cNvPr id="23" name="Text 21"/>
+          <p:cNvSpPr/>
+          <p:nvPr/>
+        </p:nvSpPr>
+        <p:spPr>
+          <a:xfrm>
+            <a:off x="932688" y="4983480"/>
+            <a:ext cx="3200400" cy="274320"/>
+          </a:xfrm>
+          <a:prstGeom prst="rect">
+            <a:avLst/>
+          </a:prstGeom>
+          <a:noFill/>
+          <a:ln/>
+        </p:spPr>
+        <p:txBody>
+          <a:bodyPr wrap="square" lIns="0" tIns="0" rIns="0" bIns="0" rtlCol="0" anchor="ctr"/>
+          <a:lstStyle/>
+          <a:p>
+            <a:pPr indent="0" marL="0">
+              <a:buNone/>
+            </a:pPr>
+            <a:r>
+              <a:rPr lang="en-US" sz="1400" b="1" dirty="0">
+                <a:solidFill>
+                  <a:srgbClr val="26242E"/>
+                </a:solidFill>
+                <a:latin typeface="Apple SD Gothic Neo" pitchFamily="34" charset="0"/>
+                <a:ea typeface="Apple SD Gothic Neo" pitchFamily="34" charset="-122"/>
+                <a:cs typeface="Apple SD Gothic Neo" pitchFamily="34" charset="-120"/>
+              </a:rPr>
+              <a:t>합계</a:t>
+            </a:r>
+            <a:endParaRPr lang="en-US" sz="1400" dirty="0"/>
+          </a:p>
+        </p:txBody>
+      </p:sp>
+      <p:sp>
+        <p:nvSpPr>
+          <p:cNvPr id="24" name="Text 22"/>
+          <p:cNvSpPr/>
+          <p:nvPr/>
+        </p:nvSpPr>
+        <p:spPr>
+          <a:xfrm>
+            <a:off x="4206240" y="4956048"/>
+            <a:ext cx="822960" cy="310896"/>
+          </a:xfrm>
+          <a:prstGeom prst="rect">
+            <a:avLst/>
+          </a:prstGeom>
+          <a:noFill/>
+          <a:ln/>
+        </p:spPr>
+        <p:txBody>
+          <a:bodyPr wrap="square" lIns="0" tIns="0" rIns="0" bIns="0" rtlCol="0" anchor="ctr"/>
+          <a:lstStyle/>
+          <a:p>
+            <a:pPr algn="r" indent="0" marL="0">
+              <a:buNone/>
+            </a:pPr>
+            <a:r>
+              <a:rPr lang="en-US" sz="1600" b="1" dirty="0">
+                <a:solidFill>
+                  <a:srgbClr val="4A5A86"/>
+                </a:solidFill>
+                <a:latin typeface="Apple SD Gothic Neo" pitchFamily="34" charset="0"/>
+                <a:ea typeface="Apple SD Gothic Neo" pitchFamily="34" charset="-122"/>
+                <a:cs typeface="Apple SD Gothic Neo" pitchFamily="34" charset="-120"/>
+              </a:rPr>
+              <a:t>3.5억</a:t>
+            </a:r>
+            <a:endParaRPr lang="en-US" sz="1600" dirty="0"/>
+          </a:p>
+        </p:txBody>
+      </p:sp>
+      <p:sp>
+        <p:nvSpPr>
+          <p:cNvPr id="25" name="Shape 23"/>
+          <p:cNvSpPr/>
+          <p:nvPr/>
+        </p:nvSpPr>
+        <p:spPr>
+          <a:xfrm>
+            <a:off x="6492240" y="2103120"/>
+            <a:ext cx="5029200" cy="3246120"/>
           </a:xfrm>
           <a:prstGeom prst="roundRect">
             <a:avLst>
-              <a:gd name="adj" fmla="val 4800"/>
+              <a:gd name="adj" fmla="val 3380"/>
             </a:avLst>
           </a:prstGeom>
           <a:solidFill>
@@ -4089,14 +4701,14 @@
       </p:sp>
       <p:sp>
         <p:nvSpPr>
-          <p:cNvPr id="10" name="Text 8"/>
-          <p:cNvSpPr/>
-          <p:nvPr/>
-        </p:nvSpPr>
-        <p:spPr>
-          <a:xfrm>
-            <a:off x="6556248" y="2240280"/>
-            <a:ext cx="4672584" cy="274320"/>
+          <p:cNvPr id="26" name="Text 24"/>
+          <p:cNvSpPr/>
+          <p:nvPr/>
+        </p:nvSpPr>
+        <p:spPr>
+          <a:xfrm>
+            <a:off x="6784848" y="2286000"/>
+            <a:ext cx="4443984" cy="274320"/>
           </a:xfrm>
           <a:prstGeom prst="rect">
             <a:avLst/>
@@ -4120,7 +4732,7 @@
                 <a:ea typeface="Apple SD Gothic Neo" pitchFamily="34" charset="-122"/>
                 <a:cs typeface="Apple SD Gothic Neo" pitchFamily="34" charset="-120"/>
               </a:rPr>
-              <a:t>이 돈으로 증명할 것</a:t>
+              <a:t>이 돈으로 검증할 가설</a:t>
             </a:r>
             <a:endParaRPr lang="en-US" sz="1100" dirty="0"/>
           </a:p>
@@ -4128,34 +4740,69 @@
       </p:sp>
       <p:sp>
         <p:nvSpPr>
-          <p:cNvPr id="11" name="Text 9"/>
-          <p:cNvSpPr/>
-          <p:nvPr/>
-        </p:nvSpPr>
-        <p:spPr>
-          <a:xfrm>
-            <a:off x="6556248" y="2606040"/>
-            <a:ext cx="4672584" cy="1005840"/>
-          </a:xfrm>
-          <a:prstGeom prst="rect">
-            <a:avLst/>
-          </a:prstGeom>
-          <a:noFill/>
-          <a:ln/>
-        </p:spPr>
-        <p:txBody>
-          <a:bodyPr wrap="square" lIns="0" tIns="0" rIns="0" bIns="0" rtlCol="0" anchor="ctr"/>
-          <a:lstStyle/>
-          <a:p>
-            <a:pPr marL="342900" indent="-342900">
-              <a:spcAft>
-                <a:spcPts val="600"/>
-              </a:spcAft>
-              <a:buSzPct val="100000"/>
-              <a:buChar char="•"/>
-            </a:pPr>
-            <a:r>
-              <a:rPr lang="en-US" sz="1400" dirty="0">
+          <p:cNvPr id="27" name="Text 25"/>
+          <p:cNvSpPr/>
+          <p:nvPr/>
+        </p:nvSpPr>
+        <p:spPr>
+          <a:xfrm>
+            <a:off x="6784848" y="2697480"/>
+            <a:ext cx="914400" cy="274320"/>
+          </a:xfrm>
+          <a:prstGeom prst="rect">
+            <a:avLst/>
+          </a:prstGeom>
+          <a:noFill/>
+          <a:ln/>
+        </p:spPr>
+        <p:txBody>
+          <a:bodyPr wrap="square" lIns="0" tIns="0" rIns="0" bIns="0" rtlCol="0" anchor="ctr"/>
+          <a:lstStyle/>
+          <a:p>
+            <a:pPr indent="0" marL="0">
+              <a:buNone/>
+            </a:pPr>
+            <a:r>
+              <a:rPr lang="en-US" sz="1200" b="1" dirty="0">
+                <a:solidFill>
+                  <a:srgbClr val="7B7989"/>
+                </a:solidFill>
+                <a:latin typeface="Apple SD Gothic Neo" pitchFamily="34" charset="0"/>
+                <a:ea typeface="Apple SD Gothic Neo" pitchFamily="34" charset="-122"/>
+                <a:cs typeface="Apple SD Gothic Neo" pitchFamily="34" charset="-120"/>
+              </a:rPr>
+              <a:t>6개월</a:t>
+            </a:r>
+            <a:endParaRPr lang="en-US" sz="1200" dirty="0"/>
+          </a:p>
+        </p:txBody>
+      </p:sp>
+      <p:sp>
+        <p:nvSpPr>
+          <p:cNvPr id="28" name="Text 26"/>
+          <p:cNvSpPr/>
+          <p:nvPr/>
+        </p:nvSpPr>
+        <p:spPr>
+          <a:xfrm>
+            <a:off x="7726680" y="2679192"/>
+            <a:ext cx="3474720" cy="292608"/>
+          </a:xfrm>
+          <a:prstGeom prst="rect">
+            <a:avLst/>
+          </a:prstGeom>
+          <a:noFill/>
+          <a:ln/>
+        </p:spPr>
+        <p:txBody>
+          <a:bodyPr wrap="square" lIns="0" tIns="0" rIns="0" bIns="0" rtlCol="0" anchor="ctr"/>
+          <a:lstStyle/>
+          <a:p>
+            <a:pPr indent="0" marL="0">
+              <a:buNone/>
+            </a:pPr>
+            <a:r>
+              <a:rPr lang="en-US" sz="1500" b="1" dirty="0">
                 <a:solidFill>
                   <a:srgbClr val="26242E"/>
                 </a:solidFill>
@@ -4163,20 +4810,119 @@
                 <a:ea typeface="Apple SD Gothic Neo" pitchFamily="34" charset="-122"/>
                 <a:cs typeface="Apple SD Gothic Neo" pitchFamily="34" charset="-120"/>
               </a:rPr>
-              <a:t>입점 브랜드 N개</a:t>
-            </a:r>
-            <a:endParaRPr lang="en-US" sz="1400" dirty="0"/>
-          </a:p>
-          <a:p>
-            <a:pPr marL="342900" indent="-342900">
-              <a:spcAft>
-                <a:spcPts val="600"/>
-              </a:spcAft>
-              <a:buSzPct val="100000"/>
-              <a:buChar char="•"/>
-            </a:pPr>
-            <a:r>
-              <a:rPr lang="en-US" sz="1400" dirty="0">
+              <a:t>브랜드가 들어오는가</a:t>
+            </a:r>
+            <a:endParaRPr lang="en-US" sz="1500" dirty="0"/>
+          </a:p>
+        </p:txBody>
+      </p:sp>
+      <p:sp>
+        <p:nvSpPr>
+          <p:cNvPr id="29" name="Text 27"/>
+          <p:cNvSpPr/>
+          <p:nvPr/>
+        </p:nvSpPr>
+        <p:spPr>
+          <a:xfrm>
+            <a:off x="7726680" y="2990088"/>
+            <a:ext cx="3474720" cy="457200"/>
+          </a:xfrm>
+          <a:prstGeom prst="rect">
+            <a:avLst/>
+          </a:prstGeom>
+          <a:noFill/>
+          <a:ln/>
+        </p:spPr>
+        <p:txBody>
+          <a:bodyPr wrap="square" lIns="0" tIns="0" rIns="0" bIns="0" rtlCol="0" anchor="ctr"/>
+          <a:lstStyle/>
+          <a:p>
+            <a:pPr indent="0" marL="0">
+              <a:lnSpc>
+                <a:spcPts val="1700"/>
+              </a:lnSpc>
+              <a:buNone/>
+            </a:pPr>
+            <a:r>
+              <a:rPr lang="en-US" sz="1200" dirty="0">
+                <a:solidFill>
+                  <a:srgbClr val="565463"/>
+                </a:solidFill>
+                <a:latin typeface="Apple SD Gothic Neo" pitchFamily="34" charset="0"/>
+                <a:ea typeface="Apple SD Gothic Neo" pitchFamily="34" charset="-122"/>
+                <a:cs typeface="Apple SD Gothic Neo" pitchFamily="34" charset="-120"/>
+              </a:rPr>
+              <a:t>입점 20개 · 상품 300개. 통합 비교가 성립할 최소 밀도.</a:t>
+            </a:r>
+            <a:endParaRPr lang="en-US" sz="1200" dirty="0"/>
+          </a:p>
+        </p:txBody>
+      </p:sp>
+      <p:sp>
+        <p:nvSpPr>
+          <p:cNvPr id="30" name="Text 28"/>
+          <p:cNvSpPr/>
+          <p:nvPr/>
+        </p:nvSpPr>
+        <p:spPr>
+          <a:xfrm>
+            <a:off x="6784848" y="3566160"/>
+            <a:ext cx="914400" cy="274320"/>
+          </a:xfrm>
+          <a:prstGeom prst="rect">
+            <a:avLst/>
+          </a:prstGeom>
+          <a:noFill/>
+          <a:ln/>
+        </p:spPr>
+        <p:txBody>
+          <a:bodyPr wrap="square" lIns="0" tIns="0" rIns="0" bIns="0" rtlCol="0" anchor="ctr"/>
+          <a:lstStyle/>
+          <a:p>
+            <a:pPr indent="0" marL="0">
+              <a:buNone/>
+            </a:pPr>
+            <a:r>
+              <a:rPr lang="en-US" sz="1200" b="1" dirty="0">
+                <a:solidFill>
+                  <a:srgbClr val="7B7989"/>
+                </a:solidFill>
+                <a:latin typeface="Apple SD Gothic Neo" pitchFamily="34" charset="0"/>
+                <a:ea typeface="Apple SD Gothic Neo" pitchFamily="34" charset="-122"/>
+                <a:cs typeface="Apple SD Gothic Neo" pitchFamily="34" charset="-120"/>
+              </a:rPr>
+              <a:t>12개월</a:t>
+            </a:r>
+            <a:endParaRPr lang="en-US" sz="1200" dirty="0"/>
+          </a:p>
+        </p:txBody>
+      </p:sp>
+      <p:sp>
+        <p:nvSpPr>
+          <p:cNvPr id="31" name="Text 29"/>
+          <p:cNvSpPr/>
+          <p:nvPr/>
+        </p:nvSpPr>
+        <p:spPr>
+          <a:xfrm>
+            <a:off x="7726680" y="3547872"/>
+            <a:ext cx="3474720" cy="292608"/>
+          </a:xfrm>
+          <a:prstGeom prst="rect">
+            <a:avLst/>
+          </a:prstGeom>
+          <a:noFill/>
+          <a:ln/>
+        </p:spPr>
+        <p:txBody>
+          <a:bodyPr wrap="square" lIns="0" tIns="0" rIns="0" bIns="0" rtlCol="0" anchor="ctr"/>
+          <a:lstStyle/>
+          <a:p>
+            <a:pPr indent="0" marL="0">
+              <a:buNone/>
+            </a:pPr>
+            <a:r>
+              <a:rPr lang="en-US" sz="1500" b="1" dirty="0">
                 <a:solidFill>
                   <a:srgbClr val="26242E"/>
                 </a:solidFill>
@@ -4184,20 +4930,119 @@
                 <a:ea typeface="Apple SD Gothic Neo" pitchFamily="34" charset="-122"/>
                 <a:cs typeface="Apple SD Gothic Neo" pitchFamily="34" charset="-120"/>
               </a:rPr>
-              <a:t>첫 거래액 / 재구매율</a:t>
-            </a:r>
-            <a:endParaRPr lang="en-US" sz="1400" dirty="0"/>
-          </a:p>
-          <a:p>
-            <a:pPr marL="342900" indent="-342900">
-              <a:spcAft>
-                <a:spcPts val="600"/>
-              </a:spcAft>
-              <a:buSzPct val="100000"/>
-              <a:buChar char="•"/>
-            </a:pPr>
-            <a:r>
-              <a:rPr lang="en-US" sz="1400" dirty="0">
+              <a:t>루틴이 구매로 이어지는가</a:t>
+            </a:r>
+            <a:endParaRPr lang="en-US" sz="1500" dirty="0"/>
+          </a:p>
+        </p:txBody>
+      </p:sp>
+      <p:sp>
+        <p:nvSpPr>
+          <p:cNvPr id="32" name="Text 30"/>
+          <p:cNvSpPr/>
+          <p:nvPr/>
+        </p:nvSpPr>
+        <p:spPr>
+          <a:xfrm>
+            <a:off x="7726680" y="3858768"/>
+            <a:ext cx="3474720" cy="457200"/>
+          </a:xfrm>
+          <a:prstGeom prst="rect">
+            <a:avLst/>
+          </a:prstGeom>
+          <a:noFill/>
+          <a:ln/>
+        </p:spPr>
+        <p:txBody>
+          <a:bodyPr wrap="square" lIns="0" tIns="0" rIns="0" bIns="0" rtlCol="0" anchor="ctr"/>
+          <a:lstStyle/>
+          <a:p>
+            <a:pPr indent="0" marL="0">
+              <a:lnSpc>
+                <a:spcPts val="1700"/>
+              </a:lnSpc>
+              <a:buNone/>
+            </a:pPr>
+            <a:r>
+              <a:rPr lang="en-US" sz="1200" dirty="0">
+                <a:solidFill>
+                  <a:srgbClr val="565463"/>
+                </a:solidFill>
+                <a:latin typeface="Apple SD Gothic Neo" pitchFamily="34" charset="0"/>
+                <a:ea typeface="Apple SD Gothic Neo" pitchFamily="34" charset="-122"/>
+                <a:cs typeface="Apple SD Gothic Neo" pitchFamily="34" charset="-120"/>
+              </a:rPr>
+              <a:t>루틴 → 담기 전환율. 이 앱의 존재 이유가 여기서 증명됩니다.</a:t>
+            </a:r>
+            <a:endParaRPr lang="en-US" sz="1200" dirty="0"/>
+          </a:p>
+        </p:txBody>
+      </p:sp>
+      <p:sp>
+        <p:nvSpPr>
+          <p:cNvPr id="33" name="Text 31"/>
+          <p:cNvSpPr/>
+          <p:nvPr/>
+        </p:nvSpPr>
+        <p:spPr>
+          <a:xfrm>
+            <a:off x="6784848" y="4434840"/>
+            <a:ext cx="914400" cy="274320"/>
+          </a:xfrm>
+          <a:prstGeom prst="rect">
+            <a:avLst/>
+          </a:prstGeom>
+          <a:noFill/>
+          <a:ln/>
+        </p:spPr>
+        <p:txBody>
+          <a:bodyPr wrap="square" lIns="0" tIns="0" rIns="0" bIns="0" rtlCol="0" anchor="ctr"/>
+          <a:lstStyle/>
+          <a:p>
+            <a:pPr indent="0" marL="0">
+              <a:buNone/>
+            </a:pPr>
+            <a:r>
+              <a:rPr lang="en-US" sz="1200" b="1" dirty="0">
+                <a:solidFill>
+                  <a:srgbClr val="7B7989"/>
+                </a:solidFill>
+                <a:latin typeface="Apple SD Gothic Neo" pitchFamily="34" charset="0"/>
+                <a:ea typeface="Apple SD Gothic Neo" pitchFamily="34" charset="-122"/>
+                <a:cs typeface="Apple SD Gothic Neo" pitchFamily="34" charset="-120"/>
+              </a:rPr>
+              <a:t>18개월</a:t>
+            </a:r>
+            <a:endParaRPr lang="en-US" sz="1200" dirty="0"/>
+          </a:p>
+        </p:txBody>
+      </p:sp>
+      <p:sp>
+        <p:nvSpPr>
+          <p:cNvPr id="34" name="Text 32"/>
+          <p:cNvSpPr/>
+          <p:nvPr/>
+        </p:nvSpPr>
+        <p:spPr>
+          <a:xfrm>
+            <a:off x="7726680" y="4416552"/>
+            <a:ext cx="3474720" cy="292608"/>
+          </a:xfrm>
+          <a:prstGeom prst="rect">
+            <a:avLst/>
+          </a:prstGeom>
+          <a:noFill/>
+          <a:ln/>
+        </p:spPr>
+        <p:txBody>
+          <a:bodyPr wrap="square" lIns="0" tIns="0" rIns="0" bIns="0" rtlCol="0" anchor="ctr"/>
+          <a:lstStyle/>
+          <a:p>
+            <a:pPr indent="0" marL="0">
+              <a:buNone/>
+            </a:pPr>
+            <a:r>
+              <a:rPr lang="en-US" sz="1500" b="1" dirty="0">
                 <a:solidFill>
                   <a:srgbClr val="26242E"/>
                 </a:solidFill>
@@ -4205,46 +5050,49 @@
                 <a:ea typeface="Apple SD Gothic Neo" pitchFamily="34" charset="-122"/>
                 <a:cs typeface="Apple SD Gothic Neo" pitchFamily="34" charset="-120"/>
               </a:rPr>
-              <a:t>루틴 → 구매 전환율</a:t>
-            </a:r>
-            <a:endParaRPr lang="en-US" sz="1400" dirty="0"/>
-          </a:p>
-        </p:txBody>
-      </p:sp>
-      <p:sp>
-        <p:nvSpPr>
-          <p:cNvPr id="12" name="Text 10"/>
-          <p:cNvSpPr/>
-          <p:nvPr/>
-        </p:nvSpPr>
-        <p:spPr>
-          <a:xfrm>
-            <a:off x="6556248" y="3703320"/>
-            <a:ext cx="4672584" cy="411480"/>
-          </a:xfrm>
-          <a:prstGeom prst="rect">
-            <a:avLst/>
-          </a:prstGeom>
-          <a:noFill/>
-          <a:ln/>
-        </p:spPr>
-        <p:txBody>
-          <a:bodyPr wrap="square" lIns="0" tIns="0" rIns="0" bIns="0" rtlCol="0" anchor="ctr"/>
-          <a:lstStyle/>
-          <a:p>
-            <a:pPr indent="0" marL="0">
+              <a:t>다시 사는가</a:t>
+            </a:r>
+            <a:endParaRPr lang="en-US" sz="1500" dirty="0"/>
+          </a:p>
+        </p:txBody>
+      </p:sp>
+      <p:sp>
+        <p:nvSpPr>
+          <p:cNvPr id="35" name="Text 33"/>
+          <p:cNvSpPr/>
+          <p:nvPr/>
+        </p:nvSpPr>
+        <p:spPr>
+          <a:xfrm>
+            <a:off x="7726680" y="4727448"/>
+            <a:ext cx="3474720" cy="457200"/>
+          </a:xfrm>
+          <a:prstGeom prst="rect">
+            <a:avLst/>
+          </a:prstGeom>
+          <a:noFill/>
+          <a:ln/>
+        </p:spPr>
+        <p:txBody>
+          <a:bodyPr wrap="square" lIns="0" tIns="0" rIns="0" bIns="0" rtlCol="0" anchor="ctr"/>
+          <a:lstStyle/>
+          <a:p>
+            <a:pPr indent="0" marL="0">
+              <a:lnSpc>
+                <a:spcPts val="1700"/>
+              </a:lnSpc>
               <a:buNone/>
             </a:pPr>
             <a:r>
               <a:rPr lang="en-US" sz="1200" dirty="0">
                 <a:solidFill>
-                  <a:srgbClr val="7B7989"/>
-                </a:solidFill>
-                <a:latin typeface="Apple SD Gothic Neo" pitchFamily="34" charset="0"/>
-                <a:ea typeface="Apple SD Gothic Neo" pitchFamily="34" charset="-122"/>
-                <a:cs typeface="Apple SD Gothic Neo" pitchFamily="34" charset="-120"/>
-              </a:rPr>
-              <a:t>마일스톤은 「무엇을 만들겠다」가 아니라 「어떤 가설을 검증하겠다」로 씁니다.</a:t>
+                  <a:srgbClr val="565463"/>
+                </a:solidFill>
+                <a:latin typeface="Apple SD Gothic Neo" pitchFamily="34" charset="0"/>
+                <a:ea typeface="Apple SD Gothic Neo" pitchFamily="34" charset="-122"/>
+                <a:cs typeface="Apple SD Gothic Neo" pitchFamily="34" charset="-120"/>
+              </a:rPr>
+              <a:t>재구매율. 리텐션이 광고가 아니라 사용 주기에서 나오는지.</a:t>
             </a:r>
             <a:endParaRPr lang="en-US" sz="1200" dirty="0"/>
           </a:p>
@@ -4252,69 +5100,72 @@
       </p:sp>
       <p:sp>
         <p:nvSpPr>
-          <p:cNvPr id="13" name="Text 11"/>
-          <p:cNvSpPr/>
-          <p:nvPr/>
-        </p:nvSpPr>
-        <p:spPr>
-          <a:xfrm>
-            <a:off x="640080" y="4709160"/>
-            <a:ext cx="8229600" cy="365760"/>
-          </a:xfrm>
-          <a:prstGeom prst="rect">
-            <a:avLst/>
-          </a:prstGeom>
-          <a:noFill/>
-          <a:ln/>
-        </p:spPr>
-        <p:txBody>
-          <a:bodyPr wrap="square" lIns="0" tIns="0" rIns="0" bIns="0" rtlCol="0" anchor="ctr"/>
-          <a:lstStyle/>
-          <a:p>
-            <a:pPr indent="0" marL="0">
-              <a:buNone/>
-            </a:pPr>
-            <a:r>
-              <a:rPr lang="en-US" sz="2000" b="1" dirty="0">
-                <a:solidFill>
-                  <a:srgbClr val="FFFFFF"/>
-                </a:solidFill>
-                <a:latin typeface="Apple SD Gothic Neo" pitchFamily="34" charset="0"/>
-                <a:ea typeface="Apple SD Gothic Neo" pitchFamily="34" charset="-122"/>
-                <a:cs typeface="Apple SD Gothic Neo" pitchFamily="34" charset="-120"/>
-              </a:rPr>
-              <a:t>지금 바로 확인하실 수 있습니다</a:t>
-            </a:r>
-            <a:endParaRPr lang="en-US" sz="2000" dirty="0"/>
-          </a:p>
-        </p:txBody>
-      </p:sp>
-      <p:sp>
-        <p:nvSpPr>
-          <p:cNvPr id="14" name="Text 12"/>
-          <p:cNvSpPr/>
-          <p:nvPr/>
-        </p:nvSpPr>
-        <p:spPr>
-          <a:xfrm>
-            <a:off x="640080" y="5120640"/>
-            <a:ext cx="9144000" cy="365760"/>
-          </a:xfrm>
-          <a:prstGeom prst="rect">
-            <a:avLst/>
-          </a:prstGeom>
-          <a:noFill/>
-          <a:ln/>
-        </p:spPr>
-        <p:txBody>
-          <a:bodyPr wrap="square" lIns="0" tIns="0" rIns="0" bIns="0" rtlCol="0" anchor="ctr"/>
-          <a:lstStyle/>
-          <a:p>
-            <a:pPr indent="0" marL="0">
-              <a:buNone/>
-            </a:pPr>
-            <a:r>
-              <a:rPr lang="en-US" sz="1500" dirty="0">
+          <p:cNvPr id="36" name="Text 34"/>
+          <p:cNvSpPr/>
+          <p:nvPr/>
+        </p:nvSpPr>
+        <p:spPr>
+          <a:xfrm>
+            <a:off x="640080" y="5532120"/>
+            <a:ext cx="10881360" cy="457200"/>
+          </a:xfrm>
+          <a:prstGeom prst="rect">
+            <a:avLst/>
+          </a:prstGeom>
+          <a:noFill/>
+          <a:ln/>
+        </p:spPr>
+        <p:txBody>
+          <a:bodyPr wrap="square" lIns="0" tIns="0" rIns="0" bIns="0" rtlCol="0" anchor="ctr"/>
+          <a:lstStyle/>
+          <a:p>
+            <a:pPr indent="0" marL="0">
+              <a:lnSpc>
+                <a:spcPts val="1600"/>
+              </a:lnSpc>
+              <a:buNone/>
+            </a:pPr>
+            <a:r>
+              <a:rPr lang="en-US" sz="1100" dirty="0">
+                <a:solidFill>
+                  <a:srgbClr val="9AA8BD"/>
+                </a:solidFill>
+                <a:latin typeface="Apple SD Gothic Neo" pitchFamily="34" charset="0"/>
+                <a:ea typeface="Apple SD Gothic Neo" pitchFamily="34" charset="-122"/>
+                <a:cs typeface="Apple SD Gothic Neo" pitchFamily="34" charset="-120"/>
+              </a:rPr>
+              <a:t>산출 근거: 개발 1인 4,500만 + MD 1인 4,000만 + 대표 최소급여 3,000만 · 18개월 · 4대보험·퇴직 포함(×1.2). 정부지원(예비창업패키지·TIPS)을 병행하면 같은 지분으로 런웨이를 늘릴 수 있습니다.</a:t>
+            </a:r>
+            <a:endParaRPr lang="en-US" sz="1100" dirty="0"/>
+          </a:p>
+        </p:txBody>
+      </p:sp>
+      <p:sp>
+        <p:nvSpPr>
+          <p:cNvPr id="37" name="Text 35"/>
+          <p:cNvSpPr/>
+          <p:nvPr/>
+        </p:nvSpPr>
+        <p:spPr>
+          <a:xfrm>
+            <a:off x="640080" y="6080760"/>
+            <a:ext cx="10881360" cy="320040"/>
+          </a:xfrm>
+          <a:prstGeom prst="rect">
+            <a:avLst/>
+          </a:prstGeom>
+          <a:noFill/>
+          <a:ln/>
+        </p:spPr>
+        <p:txBody>
+          <a:bodyPr wrap="square" lIns="0" tIns="0" rIns="0" bIns="0" rtlCol="0" anchor="ctr"/>
+          <a:lstStyle/>
+          <a:p>
+            <a:pPr indent="0" marL="0">
+              <a:buNone/>
+            </a:pPr>
+            <a:r>
+              <a:rPr lang="en-US" sz="1200" b="1" dirty="0">
                 <a:solidFill>
                   <a:srgbClr val="E7DCC9"/>
                 </a:solidFill>
@@ -4322,48 +5173,9 @@
                 <a:ea typeface="Apple SD Gothic Neo" pitchFamily="34" charset="-122"/>
                 <a:cs typeface="Apple SD Gothic Neo" pitchFamily="34" charset="-120"/>
               </a:rPr>
-              <a:t>rivea-app.web.app — 회원가입 없이 둘러보기, 고민 설정 후 「내 루틴」까지</a:t>
-            </a:r>
-            <a:endParaRPr lang="en-US" sz="1500" dirty="0"/>
-          </a:p>
-        </p:txBody>
-      </p:sp>
-      <p:sp>
-        <p:nvSpPr>
-          <p:cNvPr id="15" name="Text 13"/>
-          <p:cNvSpPr/>
-          <p:nvPr/>
-        </p:nvSpPr>
-        <p:spPr>
-          <a:xfrm>
-            <a:off x="640080" y="6126480"/>
-            <a:ext cx="10881360" cy="274320"/>
-          </a:xfrm>
-          <a:prstGeom prst="rect">
-            <a:avLst/>
-          </a:prstGeom>
-          <a:noFill/>
-          <a:ln/>
-        </p:spPr>
-        <p:txBody>
-          <a:bodyPr wrap="square" lIns="0" tIns="0" rIns="0" bIns="0" rtlCol="0" anchor="ctr"/>
-          <a:lstStyle/>
-          <a:p>
-            <a:pPr indent="0" marL="0">
-              <a:buNone/>
-            </a:pPr>
-            <a:r>
-              <a:rPr lang="en-US" sz="1050" dirty="0">
-                <a:solidFill>
-                  <a:srgbClr val="9AA8BD"/>
-                </a:solidFill>
-                <a:latin typeface="Apple SD Gothic Neo" pitchFamily="34" charset="0"/>
-                <a:ea typeface="Apple SD Gothic Neo" pitchFamily="34" charset="-122"/>
-                <a:cs typeface="Apple SD Gothic Neo" pitchFamily="34" charset="-120"/>
-              </a:rPr>
-              <a:t>초안 · 2026.08 · 구조는 Airbnb 2008 시드덱 · 디자인은 macOS 27 UI 킷 · 금색 글씨는 확인되지 않은 값입니다</a:t>
-            </a:r>
-            <a:endParaRPr lang="en-US" sz="1050" dirty="0"/>
+              <a:t>rivea-app.web.app — 회원가입 없이 둘러보기, 고민 설정 후 「내 루틴」까지    ·    초안 2026.08 · 금색 글씨는 채워야 할 자리</a:t>
+            </a:r>
+            <a:endParaRPr lang="en-US" sz="1200" dirty="0"/>
           </a:p>
         </p:txBody>
       </p:sp>

--- a/docs/ir/RIVEA_IR_deck.pptx
+++ b/docs/ir/RIVEA_IR_deck.pptx
@@ -4,6 +4,9 @@
   <p:sldMasterIdLst>
     <p:sldMasterId id="2147483648" r:id="rId1"/>
   </p:sldMasterIdLst>
+  <p:notesMasterIdLst>
+    <p:notesMasterId r:id="rId14"/>
+  </p:notesMasterIdLst>
   <p:sldIdLst>
     <p:sldId id="256" r:id="rId2"/>
     <p:sldId id="257" r:id="rId3"/>
@@ -18,9 +21,6 @@
     <p:sldId id="266" r:id="rId12"/>
     <p:sldId id="267" r:id="rId13"/>
   </p:sldIdLst>
-  <p:notesMasterIdLst>
-    <p:notesMasterId r:id="rId14"/>
-  </p:notesMasterIdLst>
   <p:sldSz cx="12192000" cy="6858000"/>
   <p:notesSz cx="6858000" cy="12192000"/>
   <p:defaultTextStyle>
@@ -115,6 +115,11 @@
       </a:defRPr>
     </a:lvl9pPr>
   </p:defaultTextStyle>
+  <p:extLst>
+    <p:ext uri="{EFAFB233-063F-42B5-8137-9DF3F51BA10A}">
+      <p15:sldGuideLst xmlns:p15="http://schemas.microsoft.com/office/powerpoint/2012/main"/>
+    </p:ext>
+  </p:extLst>
 </p:presentation>
 </file>
 
@@ -140,234 +145,10 @@
           <a:chExt cx="0" cy="0"/>
         </a:xfrm>
       </p:grpSpPr>
-      <p:sp>
-        <p:nvSpPr>
-          <p:cNvPr id="2" name="Header Placeholder 1"/>
-          <p:cNvSpPr>
-            <a:spLocks noGrp="1"/>
-          </p:cNvSpPr>
-          <p:nvPr>
-            <p:ph type="hdr" sz="quarter"/>
-          </p:nvPr>
-        </p:nvSpPr>
-        <p:spPr>
-          <a:xfrm>
-            <a:off x="0" y="0"/>
-            <a:ext cx="2971800" cy="458788"/>
-          </a:xfrm>
-          <a:prstGeom prst="rect">
-            <a:avLst/>
-          </a:prstGeom>
-        </p:spPr>
-        <p:txBody>
-          <a:bodyPr vert="horz" lIns="91440" tIns="45720" rIns="91440" bIns="45720" rtlCol="0"/>
-          <a:lstStyle>
-            <a:lvl1pPr algn="l">
-              <a:defRPr sz="1200"/>
-            </a:lvl1pPr>
-          </a:lstStyle>
-          <a:p>
-            <a:endParaRPr lang="en-US"/>
-          </a:p>
-        </p:txBody>
-      </p:sp>
-      <p:sp>
-        <p:nvSpPr>
-          <p:cNvPr id="3" name="Date Placeholder 2"/>
-          <p:cNvSpPr>
-            <a:spLocks noGrp="1"/>
-          </p:cNvSpPr>
-          <p:nvPr>
-            <p:ph type="dt" idx="1"/>
-          </p:nvPr>
-        </p:nvSpPr>
-        <p:spPr>
-          <a:xfrm>
-            <a:off x="3884613" y="0"/>
-            <a:ext cx="2971800" cy="458788"/>
-          </a:xfrm>
-          <a:prstGeom prst="rect">
-            <a:avLst/>
-          </a:prstGeom>
-        </p:spPr>
-        <p:txBody>
-          <a:bodyPr vert="horz" lIns="91440" tIns="45720" rIns="91440" bIns="45720" rtlCol="0"/>
-          <a:lstStyle>
-            <a:lvl1pPr algn="r">
-              <a:defRPr sz="1200"/>
-            </a:lvl1pPr>
-          </a:lstStyle>
-          <a:p>
-            <a:fld id="{5282F153-3F37-0F45-9E97-73ACFA13230C}" type="datetimeFigureOut">
-              <a:rPr lang="en-US"/>
-              <a:t>7/23/19</a:t>
-            </a:fld>
-            <a:endParaRPr lang="en-US"/>
-          </a:p>
-        </p:txBody>
-      </p:sp>
-      <p:sp>
-        <p:nvSpPr>
-          <p:cNvPr id="4" name="Slide Image Placeholder 3"/>
-          <p:cNvSpPr>
-            <a:spLocks noGrp="1" noRot="1" noChangeAspect="1"/>
-          </p:cNvSpPr>
-          <p:nvPr>
-            <p:ph type="sldImg" idx="2"/>
-          </p:nvPr>
-        </p:nvSpPr>
-        <p:spPr>
-          <a:xfrm>
-            <a:off x="685800" y="1143000"/>
-            <a:ext cx="5486400" cy="3086100"/>
-          </a:xfrm>
-          <a:prstGeom prst="rect">
-            <a:avLst/>
-          </a:prstGeom>
-          <a:noFill/>
-          <a:ln w="12700">
-            <a:solidFill>
-              <a:prstClr val="black"/>
-            </a:solidFill>
-          </a:ln>
-        </p:spPr>
-        <p:txBody>
-          <a:bodyPr vert="horz" lIns="91440" tIns="45720" rIns="91440" bIns="45720" rtlCol="0" anchor="ctr"/>
-          <a:lstStyle/>
-          <a:p>
-            <a:endParaRPr lang="en-US"/>
-          </a:p>
-        </p:txBody>
-      </p:sp>
-      <p:sp>
-        <p:nvSpPr>
-          <p:cNvPr id="5" name="Notes Placeholder 4"/>
-          <p:cNvSpPr>
-            <a:spLocks noGrp="1"/>
-          </p:cNvSpPr>
-          <p:nvPr>
-            <p:ph type="body" sz="quarter" idx="3"/>
-          </p:nvPr>
-        </p:nvSpPr>
-        <p:spPr>
-          <a:xfrm>
-            <a:off x="685800" y="4400550"/>
-            <a:ext cx="5486400" cy="3600450"/>
-          </a:xfrm>
-          <a:prstGeom prst="rect">
-            <a:avLst/>
-          </a:prstGeom>
-        </p:spPr>
-        <p:txBody>
-          <a:bodyPr vert="horz" lIns="91440" tIns="45720" rIns="91440" bIns="45720" rtlCol="0"/>
-          <a:lstStyle/>
-          <a:p>
-            <a:pPr lvl="0"/>
-            <a:r>
-              <a:rPr lang="en-US"/>
-              <a:t>Click to edit Master text styles</a:t>
-            </a:r>
-          </a:p>
-          <a:p>
-            <a:pPr lvl="1"/>
-            <a:r>
-              <a:rPr lang="en-US"/>
-              <a:t>Second level</a:t>
-            </a:r>
-          </a:p>
-          <a:p>
-            <a:pPr lvl="2"/>
-            <a:r>
-              <a:rPr lang="en-US"/>
-              <a:t>Third level</a:t>
-            </a:r>
-          </a:p>
-          <a:p>
-            <a:pPr lvl="3"/>
-            <a:r>
-              <a:rPr lang="en-US"/>
-              <a:t>Fourth level</a:t>
-            </a:r>
-          </a:p>
-          <a:p>
-            <a:pPr lvl="4"/>
-            <a:r>
-              <a:rPr lang="en-US"/>
-              <a:t>Fifth level</a:t>
-            </a:r>
-          </a:p>
-        </p:txBody>
-      </p:sp>
-      <p:sp>
-        <p:nvSpPr>
-          <p:cNvPr id="6" name="Footer Placeholder 5"/>
-          <p:cNvSpPr>
-            <a:spLocks noGrp="1"/>
-          </p:cNvSpPr>
-          <p:nvPr>
-            <p:ph type="ftr" sz="quarter" idx="4"/>
-          </p:nvPr>
-        </p:nvSpPr>
-        <p:spPr>
-          <a:xfrm>
-            <a:off x="0" y="8685213"/>
-            <a:ext cx="2971800" cy="458787"/>
-          </a:xfrm>
-          <a:prstGeom prst="rect">
-            <a:avLst/>
-          </a:prstGeom>
-        </p:spPr>
-        <p:txBody>
-          <a:bodyPr vert="horz" lIns="91440" tIns="45720" rIns="91440" bIns="45720" rtlCol="0" anchor="b"/>
-          <a:lstStyle>
-            <a:lvl1pPr algn="l">
-              <a:defRPr sz="1200"/>
-            </a:lvl1pPr>
-          </a:lstStyle>
-          <a:p>
-            <a:endParaRPr lang="en-US"/>
-          </a:p>
-        </p:txBody>
-      </p:sp>
-      <p:sp>
-        <p:nvSpPr>
-          <p:cNvPr id="7" name="Slide Number Placeholder 6"/>
-          <p:cNvSpPr>
-            <a:spLocks noGrp="1"/>
-          </p:cNvSpPr>
-          <p:nvPr>
-            <p:ph type="sldNum" sz="quarter" idx="5"/>
-          </p:nvPr>
-        </p:nvSpPr>
-        <p:spPr>
-          <a:xfrm>
-            <a:off x="3884613" y="8685213"/>
-            <a:ext cx="2971800" cy="458787"/>
-          </a:xfrm>
-          <a:prstGeom prst="rect">
-            <a:avLst/>
-          </a:prstGeom>
-        </p:spPr>
-        <p:txBody>
-          <a:bodyPr vert="horz" lIns="91440" tIns="45720" rIns="91440" bIns="45720" rtlCol="0" anchor="b"/>
-          <a:lstStyle>
-            <a:lvl1pPr algn="r">
-              <a:defRPr sz="1200"/>
-            </a:lvl1pPr>
-          </a:lstStyle>
-          <a:p>
-            <a:fld id="{CE5E9CC1-C706-0F49-92D6-E571CC5EEA8F}" type="slidenum">
-              <a:rPr lang="en-US"/>
-              <a:t>‹#›</a:t>
-            </a:fld>
-            <a:endParaRPr lang="en-US"/>
-          </a:p>
-        </p:txBody>
-      </p:sp>
     </p:spTree>
     <p:extLst>
       <p:ext uri="{BB962C8B-B14F-4D97-AF65-F5344CB8AC3E}">
-        <p14:creationId xmlns:p14="http://schemas.microsoft.com/office/powerpoint/2010/main" val="1024086991"/>
+        <p14:creationId xmlns:p14="http://schemas.microsoft.com/office/powerpoint/2010/main" val="1669593300"/>
       </p:ext>
     </p:extLst>
   </p:cSld>
@@ -515,7 +296,6 @@
               <a:rPr lang="en-US" dirty="0"/>
               <a:t>표지. 한 줄로 대비 구조를 만든다 — 화장 vs 노화. 데모 링크를 여기서 미리 보여준다.</a:t>
             </a:r>
-            <a:endParaRPr lang="en-US" dirty="0"/>
           </a:p>
         </p:txBody>
       </p:sp>
@@ -599,10 +379,6 @@
           <a:bodyPr/>
           <a:lstStyle/>
           <a:p>
-            <a:r>
-              <a:rPr lang="en-US" dirty="0"/>
-              <a:t/>
-            </a:r>
             <a:endParaRPr lang="en-US" dirty="0"/>
           </a:p>
         </p:txBody>
@@ -691,7 +467,6 @@
               <a:rPr lang="en-US" dirty="0"/>
               <a:t>1인 팀은 숨기는 게 최악. 만든 것과 뽑을 자리를 같이 보여주면 Ask 슬라이드로 자연스럽게 넘어간다.</a:t>
             </a:r>
-            <a:endParaRPr lang="en-US" dirty="0"/>
           </a:p>
         </p:txBody>
       </p:sp>
@@ -779,7 +554,6 @@
               <a:rPr lang="en-US" dirty="0"/>
               <a:t>3.5억은 추산이다. 대표 급여와 채용 시점이 바뀌면 숫자가 바뀐다 — 산출 근거 줄이 방어선이다.</a:t>
             </a:r>
-            <a:endParaRPr lang="en-US" dirty="0"/>
           </a:p>
         </p:txBody>
       </p:sp>
@@ -867,7 +641,6 @@
               <a:rPr lang="en-US" dirty="0"/>
               <a:t>브랜드몰은 자기 제품만 설명하고, 종합몰은 카테고리별로 더 많이 파는 게 유리하다.</a:t>
             </a:r>
-            <a:endParaRPr lang="en-US" dirty="0"/>
           </a:p>
         </p:txBody>
       </p:sp>
@@ -955,7 +728,6 @@
               <a:rPr lang="en-US" dirty="0"/>
               <a:t>여러 브랜드가 한 바구니에 섞이니 조합이 보인다 — 중개형이라 가능한 것.</a:t>
             </a:r>
-            <a:endParaRPr lang="en-US" dirty="0"/>
           </a:p>
         </p:txBody>
       </p:sp>
@@ -1039,10 +811,6 @@
           <a:bodyPr/>
           <a:lstStyle/>
           <a:p>
-            <a:r>
-              <a:rPr lang="en-US" dirty="0"/>
-              <a:t/>
-            </a:r>
             <a:endParaRPr lang="en-US" dirty="0"/>
           </a:p>
         </p:txBody>
@@ -1131,7 +899,6 @@
               <a:rPr lang="en-US" dirty="0"/>
               <a:t>장기 스케일업은 화장품 시장 전체(25조)다. 기기 1.1조만 TAM으로 잡으면 천장을 스스로 낮추는 것.</a:t>
             </a:r>
-            <a:endParaRPr lang="en-US" dirty="0"/>
           </a:p>
         </p:txBody>
       </p:sp>
@@ -1215,10 +982,6 @@
           <a:bodyPr/>
           <a:lstStyle/>
           <a:p>
-            <a:r>
-              <a:rPr lang="en-US" dirty="0"/>
-              <a:t/>
-            </a:r>
             <a:endParaRPr lang="en-US" dirty="0"/>
           </a:p>
         </p:txBody>
@@ -1307,7 +1070,6 @@
               <a:rPr lang="en-US" dirty="0"/>
               <a:t>공급측(브랜드 입점)을 계산했다는 걸 보여주는 슬라이드. 소비자 편익만 좇지 않았다.</a:t>
             </a:r>
-            <a:endParaRPr lang="en-US" dirty="0"/>
           </a:p>
         </p:txBody>
       </p:sp>
@@ -1391,10 +1153,6 @@
           <a:bodyPr/>
           <a:lstStyle/>
           <a:p>
-            <a:r>
-              <a:rPr lang="en-US" dirty="0"/>
-              <a:t/>
-            </a:r>
             <a:endParaRPr lang="en-US" dirty="0"/>
           </a:p>
         </p:txBody>
@@ -1479,10 +1237,6 @@
           <a:bodyPr/>
           <a:lstStyle/>
           <a:p>
-            <a:r>
-              <a:rPr lang="en-US" dirty="0"/>
-              <a:t/>
-            </a:r>
             <a:endParaRPr lang="en-US" dirty="0"/>
           </a:p>
         </p:txBody>
@@ -1556,6 +1310,11 @@
 <file path=ppt/slideMasters/slideMaster1.xml><?xml version="1.0" encoding="utf-8"?>
 <p:sldMaster xmlns:a="http://schemas.openxmlformats.org/drawingml/2006/main" xmlns:r="http://schemas.openxmlformats.org/officeDocument/2006/relationships" xmlns:p="http://schemas.openxmlformats.org/presentationml/2006/main">
   <p:cSld>
+    <p:bg>
+      <p:bgRef idx="1001">
+        <a:schemeClr val="bg1"/>
+      </p:bgRef>
+    </p:bg>
     <p:spTree>
       <p:nvGrpSpPr>
         <p:cNvPr id="1" name=""/>
@@ -1838,6 +1597,7 @@
         <a:solidFill>
           <a:srgbClr val="4A4863"/>
         </a:solidFill>
+        <a:effectLst/>
       </p:bgPr>
     </p:bg>
     <p:spTree>
@@ -1925,11 +1685,11 @@
           <a:bodyPr wrap="square" lIns="0" tIns="0" rIns="0" bIns="0" rtlCol="0" anchor="ctr"/>
           <a:lstStyle/>
           <a:p>
-            <a:pPr indent="0" marL="0">
-              <a:buNone/>
-            </a:pPr>
-            <a:r>
-              <a:rPr lang="en-US" sz="1500" b="1" spc="600" kern="0" dirty="0">
+            <a:pPr marL="0" indent="0">
+              <a:buNone/>
+            </a:pPr>
+            <a:r>
+              <a:rPr lang="en-US" sz="1500" b="1" kern="0" spc="600" dirty="0">
                 <a:solidFill>
                   <a:srgbClr val="E7DCC9"/>
                 </a:solidFill>
@@ -1964,7 +1724,7 @@
           <a:bodyPr wrap="square" lIns="0" tIns="0" rIns="0" bIns="0" rtlCol="0" anchor="ctr"/>
           <a:lstStyle/>
           <a:p>
-            <a:pPr indent="0" marL="0">
+            <a:pPr marL="0" indent="0">
               <a:lnSpc>
                 <a:spcPts val="5400"/>
               </a:lnSpc>
@@ -1984,7 +1744,7 @@
             <a:endParaRPr lang="en-US" sz="4600" dirty="0"/>
           </a:p>
           <a:p>
-            <a:pPr indent="0" marL="0">
+            <a:pPr marL="0" indent="0">
               <a:lnSpc>
                 <a:spcPts val="5400"/>
               </a:lnSpc>
@@ -2026,7 +1786,7 @@
           <a:bodyPr wrap="square" lIns="0" tIns="0" rIns="0" bIns="0" rtlCol="0" anchor="ctr"/>
           <a:lstStyle/>
           <a:p>
-            <a:pPr indent="0" marL="0">
+            <a:pPr marL="0" indent="0">
               <a:lnSpc>
                 <a:spcPts val="2400"/>
               </a:lnSpc>
@@ -2046,7 +1806,7 @@
             <a:endParaRPr lang="en-US" sz="1500" dirty="0"/>
           </a:p>
           <a:p>
-            <a:pPr indent="0" marL="0">
+            <a:pPr marL="0" indent="0">
               <a:lnSpc>
                 <a:spcPts val="2400"/>
               </a:lnSpc>
@@ -2088,7 +1848,7 @@
           <a:bodyPr wrap="square" lIns="0" tIns="0" rIns="0" bIns="0" rtlCol="0" anchor="ctr"/>
           <a:lstStyle/>
           <a:p>
-            <a:pPr indent="0" marL="0">
+            <a:pPr marL="0" indent="0">
               <a:buNone/>
             </a:pPr>
             <a:r>
@@ -2122,6 +1882,7 @@
         <a:solidFill>
           <a:srgbClr val="FFFFFF"/>
         </a:solidFill>
+        <a:effectLst/>
       </p:bgPr>
     </p:bg>
     <p:spTree>
@@ -2159,11 +1920,11 @@
           <a:bodyPr wrap="square" lIns="0" tIns="0" rIns="0" bIns="0" rtlCol="0" anchor="ctr"/>
           <a:lstStyle/>
           <a:p>
-            <a:pPr indent="0" marL="0">
-              <a:buNone/>
-            </a:pPr>
-            <a:r>
-              <a:rPr lang="en-US" sz="1100" b="1" spc="200" kern="0" dirty="0">
+            <a:pPr marL="0" indent="0">
+              <a:buNone/>
+            </a:pPr>
+            <a:r>
+              <a:rPr lang="en-US" sz="1100" b="1" kern="0" spc="200" dirty="0">
                 <a:solidFill>
                   <a:srgbClr val="4A5A86"/>
                 </a:solidFill>
@@ -2198,7 +1959,7 @@
           <a:bodyPr wrap="square" lIns="0" tIns="0" rIns="0" bIns="0" rtlCol="0" anchor="ctr"/>
           <a:lstStyle/>
           <a:p>
-            <a:pPr indent="0" marL="0">
+            <a:pPr marL="0" indent="0">
               <a:lnSpc>
                 <a:spcPts val="3800"/>
               </a:lnSpc>
@@ -2240,7 +2001,7 @@
           <a:bodyPr wrap="square" lIns="0" tIns="0" rIns="0" bIns="0" rtlCol="0" anchor="ctr"/>
           <a:lstStyle/>
           <a:p>
-            <a:pPr algn="r" indent="0" marL="0">
+            <a:pPr marL="0" indent="0" algn="r">
               <a:buNone/>
             </a:pPr>
             <a:r>
@@ -2331,7 +2092,7 @@
           <a:bodyPr wrap="square" lIns="0" tIns="0" rIns="0" bIns="0" rtlCol="0" anchor="ctr"/>
           <a:lstStyle/>
           <a:p>
-            <a:pPr algn="ctr" indent="0" marL="0">
+            <a:pPr marL="0" indent="0" algn="ctr">
               <a:buNone/>
             </a:pPr>
             <a:r>
@@ -2370,11 +2131,11 @@
           <a:bodyPr wrap="square" lIns="0" tIns="0" rIns="0" bIns="0" rtlCol="0" anchor="ctr"/>
           <a:lstStyle/>
           <a:p>
-            <a:pPr indent="0" marL="0">
-              <a:buNone/>
-            </a:pPr>
-            <a:r>
-              <a:rPr lang="en-US" sz="1100" b="1" spc="150" kern="0" dirty="0">
+            <a:pPr marL="0" indent="0">
+              <a:buNone/>
+            </a:pPr>
+            <a:r>
+              <a:rPr lang="en-US" sz="1100" b="1" kern="0" spc="150" dirty="0">
                 <a:solidFill>
                   <a:srgbClr val="4A5A86"/>
                 </a:solidFill>
@@ -2409,7 +2170,7 @@
           <a:bodyPr wrap="square" lIns="0" tIns="0" rIns="0" bIns="0" rtlCol="0" anchor="ctr"/>
           <a:lstStyle/>
           <a:p>
-            <a:pPr indent="0" marL="0">
+            <a:pPr marL="0" indent="0">
               <a:lnSpc>
                 <a:spcPts val="2300"/>
               </a:lnSpc>
@@ -2451,7 +2212,7 @@
           <a:bodyPr wrap="square" lIns="0" tIns="0" rIns="0" bIns="0" rtlCol="0" anchor="ctr"/>
           <a:lstStyle/>
           <a:p>
-            <a:pPr indent="0" marL="0">
+            <a:pPr marL="0" indent="0">
               <a:lnSpc>
                 <a:spcPts val="1800"/>
               </a:lnSpc>
@@ -2545,7 +2306,7 @@
           <a:bodyPr wrap="square" lIns="0" tIns="0" rIns="0" bIns="0" rtlCol="0" anchor="ctr"/>
           <a:lstStyle/>
           <a:p>
-            <a:pPr algn="ctr" indent="0" marL="0">
+            <a:pPr marL="0" indent="0" algn="ctr">
               <a:buNone/>
             </a:pPr>
             <a:r>
@@ -2584,11 +2345,11 @@
           <a:bodyPr wrap="square" lIns="0" tIns="0" rIns="0" bIns="0" rtlCol="0" anchor="ctr"/>
           <a:lstStyle/>
           <a:p>
-            <a:pPr indent="0" marL="0">
-              <a:buNone/>
-            </a:pPr>
-            <a:r>
-              <a:rPr lang="en-US" sz="1100" b="1" spc="150" kern="0" dirty="0">
+            <a:pPr marL="0" indent="0">
+              <a:buNone/>
+            </a:pPr>
+            <a:r>
+              <a:rPr lang="en-US" sz="1100" b="1" kern="0" spc="150" dirty="0">
                 <a:solidFill>
                   <a:srgbClr val="4A5A86"/>
                 </a:solidFill>
@@ -2623,7 +2384,7 @@
           <a:bodyPr wrap="square" lIns="0" tIns="0" rIns="0" bIns="0" rtlCol="0" anchor="ctr"/>
           <a:lstStyle/>
           <a:p>
-            <a:pPr indent="0" marL="0">
+            <a:pPr marL="0" indent="0">
               <a:lnSpc>
                 <a:spcPts val="2300"/>
               </a:lnSpc>
@@ -2665,7 +2426,7 @@
           <a:bodyPr wrap="square" lIns="0" tIns="0" rIns="0" bIns="0" rtlCol="0" anchor="ctr"/>
           <a:lstStyle/>
           <a:p>
-            <a:pPr indent="0" marL="0">
+            <a:pPr marL="0" indent="0">
               <a:lnSpc>
                 <a:spcPts val="1800"/>
               </a:lnSpc>
@@ -2759,7 +2520,7 @@
           <a:bodyPr wrap="square" lIns="0" tIns="0" rIns="0" bIns="0" rtlCol="0" anchor="ctr"/>
           <a:lstStyle/>
           <a:p>
-            <a:pPr algn="ctr" indent="0" marL="0">
+            <a:pPr marL="0" indent="0" algn="ctr">
               <a:buNone/>
             </a:pPr>
             <a:r>
@@ -2798,11 +2559,11 @@
           <a:bodyPr wrap="square" lIns="0" tIns="0" rIns="0" bIns="0" rtlCol="0" anchor="ctr"/>
           <a:lstStyle/>
           <a:p>
-            <a:pPr indent="0" marL="0">
-              <a:buNone/>
-            </a:pPr>
-            <a:r>
-              <a:rPr lang="en-US" sz="1100" b="1" spc="150" kern="0" dirty="0">
+            <a:pPr marL="0" indent="0">
+              <a:buNone/>
+            </a:pPr>
+            <a:r>
+              <a:rPr lang="en-US" sz="1100" b="1" kern="0" spc="150" dirty="0">
                 <a:solidFill>
                   <a:srgbClr val="4A5A86"/>
                 </a:solidFill>
@@ -2837,7 +2598,7 @@
           <a:bodyPr wrap="square" lIns="0" tIns="0" rIns="0" bIns="0" rtlCol="0" anchor="ctr"/>
           <a:lstStyle/>
           <a:p>
-            <a:pPr indent="0" marL="0">
+            <a:pPr marL="0" indent="0">
               <a:lnSpc>
                 <a:spcPts val="2300"/>
               </a:lnSpc>
@@ -2879,7 +2640,7 @@
           <a:bodyPr wrap="square" lIns="0" tIns="0" rIns="0" bIns="0" rtlCol="0" anchor="ctr"/>
           <a:lstStyle/>
           <a:p>
-            <a:pPr indent="0" marL="0">
+            <a:pPr marL="0" indent="0">
               <a:lnSpc>
                 <a:spcPts val="1800"/>
               </a:lnSpc>
@@ -2948,7 +2709,7 @@
           <a:bodyPr wrap="square" lIns="0" tIns="0" rIns="0" bIns="0" rtlCol="0" anchor="ctr"/>
           <a:lstStyle/>
           <a:p>
-            <a:pPr indent="0" marL="0">
+            <a:pPr marL="0" indent="0">
               <a:buNone/>
             </a:pPr>
             <a:r>
@@ -2987,7 +2748,7 @@
           <a:bodyPr wrap="square" lIns="0" tIns="0" rIns="0" bIns="0" rtlCol="0" anchor="ctr"/>
           <a:lstStyle/>
           <a:p>
-            <a:pPr indent="0" marL="0">
+            <a:pPr marL="0" indent="0">
               <a:buNone/>
             </a:pPr>
             <a:r>
@@ -3021,6 +2782,7 @@
         <a:solidFill>
           <a:srgbClr val="FFFFFF"/>
         </a:solidFill>
+        <a:effectLst/>
       </p:bgPr>
     </p:bg>
     <p:spTree>
@@ -3058,11 +2820,11 @@
           <a:bodyPr wrap="square" lIns="0" tIns="0" rIns="0" bIns="0" rtlCol="0" anchor="ctr"/>
           <a:lstStyle/>
           <a:p>
-            <a:pPr indent="0" marL="0">
-              <a:buNone/>
-            </a:pPr>
-            <a:r>
-              <a:rPr lang="en-US" sz="1100" b="1" spc="200" kern="0" dirty="0">
+            <a:pPr marL="0" indent="0">
+              <a:buNone/>
+            </a:pPr>
+            <a:r>
+              <a:rPr lang="en-US" sz="1100" b="1" kern="0" spc="200" dirty="0">
                 <a:solidFill>
                   <a:srgbClr val="4A5A86"/>
                 </a:solidFill>
@@ -3097,7 +2859,7 @@
           <a:bodyPr wrap="square" lIns="0" tIns="0" rIns="0" bIns="0" rtlCol="0" anchor="ctr"/>
           <a:lstStyle/>
           <a:p>
-            <a:pPr indent="0" marL="0">
+            <a:pPr marL="0" indent="0">
               <a:lnSpc>
                 <a:spcPts val="3800"/>
               </a:lnSpc>
@@ -3139,7 +2901,7 @@
           <a:bodyPr wrap="square" lIns="0" tIns="0" rIns="0" bIns="0" rtlCol="0" anchor="ctr"/>
           <a:lstStyle/>
           <a:p>
-            <a:pPr algn="r" indent="0" marL="0">
+            <a:pPr marL="0" indent="0" algn="r">
               <a:buNone/>
             </a:pPr>
             <a:r>
@@ -3178,7 +2940,7 @@
           <a:bodyPr wrap="square" lIns="0" tIns="0" rIns="0" bIns="0" rtlCol="0" anchor="ctr"/>
           <a:lstStyle/>
           <a:p>
-            <a:pPr indent="0" marL="0">
+            <a:pPr marL="0" indent="0">
               <a:buNone/>
             </a:pPr>
             <a:r>
@@ -3269,11 +3031,11 @@
           <a:bodyPr wrap="square" lIns="0" tIns="0" rIns="0" bIns="0" rtlCol="0" anchor="ctr"/>
           <a:lstStyle/>
           <a:p>
-            <a:pPr indent="0" marL="0">
-              <a:buNone/>
-            </a:pPr>
-            <a:r>
-              <a:rPr lang="en-US" sz="1100" b="1" spc="150" kern="0" dirty="0">
+            <a:pPr marL="0" indent="0">
+              <a:buNone/>
+            </a:pPr>
+            <a:r>
+              <a:rPr lang="en-US" sz="1100" b="1" kern="0" spc="150" dirty="0">
                 <a:solidFill>
                   <a:srgbClr val="4A5A86"/>
                 </a:solidFill>
@@ -3308,11 +3070,11 @@
           <a:bodyPr wrap="square" lIns="0" tIns="0" rIns="0" bIns="0" rtlCol="0" anchor="ctr"/>
           <a:lstStyle/>
           <a:p>
-            <a:pPr indent="0" marL="0">
-              <a:buNone/>
-            </a:pPr>
-            <a:r>
-              <a:rPr lang="en-US" sz="2200" b="1" dirty="0">
+            <a:pPr marL="0" indent="0">
+              <a:buNone/>
+            </a:pPr>
+            <a:r>
+              <a:rPr lang="ko-KR" altLang="en-US" sz="2200" b="1" dirty="0" err="1">
                 <a:solidFill>
                   <a:srgbClr val="B8873A"/>
                 </a:solidFill>
@@ -3320,7 +3082,7 @@
                 <a:ea typeface="Apple SD Gothic Neo" pitchFamily="34" charset="-122"/>
                 <a:cs typeface="Apple SD Gothic Neo" pitchFamily="34" charset="-120"/>
               </a:rPr>
-              <a:t>이름 (채워주세요)</a:t>
+              <a:t>진시후</a:t>
             </a:r>
             <a:endParaRPr lang="en-US" sz="2200" dirty="0"/>
           </a:p>
@@ -3347,7 +3109,7 @@
           <a:bodyPr wrap="square" lIns="0" tIns="0" rIns="0" bIns="0" rtlCol="0" anchor="ctr"/>
           <a:lstStyle/>
           <a:p>
-            <a:pPr indent="0" marL="0">
+            <a:pPr marL="0" indent="0">
               <a:lnSpc>
                 <a:spcPts val="2100"/>
               </a:lnSpc>
@@ -3367,7 +3129,7 @@
             <a:endParaRPr lang="en-US" sz="1350" dirty="0"/>
           </a:p>
           <a:p>
-            <a:pPr indent="0" marL="0">
+            <a:pPr marL="0" indent="0">
               <a:lnSpc>
                 <a:spcPts val="2100"/>
               </a:lnSpc>
@@ -3409,7 +3171,7 @@
           <a:bodyPr wrap="square" lIns="0" tIns="0" rIns="0" bIns="0" rtlCol="0" anchor="ctr"/>
           <a:lstStyle/>
           <a:p>
-            <a:pPr indent="0" marL="0">
+            <a:pPr marL="0" indent="0">
               <a:lnSpc>
                 <a:spcPts val="1700"/>
               </a:lnSpc>
@@ -3478,7 +3240,7 @@
           <a:bodyPr wrap="square" lIns="0" tIns="0" rIns="0" bIns="0" rtlCol="0" anchor="ctr"/>
           <a:lstStyle/>
           <a:p>
-            <a:pPr indent="0" marL="0">
+            <a:pPr marL="0" indent="0">
               <a:buNone/>
             </a:pPr>
             <a:r>
@@ -3517,7 +3279,7 @@
           <a:bodyPr wrap="square" lIns="0" tIns="0" rIns="0" bIns="0" rtlCol="0" anchor="ctr"/>
           <a:lstStyle/>
           <a:p>
-            <a:pPr indent="0" marL="0">
+            <a:pPr marL="0" indent="0">
               <a:lnSpc>
                 <a:spcPts val="1900"/>
               </a:lnSpc>
@@ -3586,7 +3348,7 @@
           <a:bodyPr wrap="square" lIns="0" tIns="0" rIns="0" bIns="0" rtlCol="0" anchor="ctr"/>
           <a:lstStyle/>
           <a:p>
-            <a:pPr indent="0" marL="0">
+            <a:pPr marL="0" indent="0">
               <a:buNone/>
             </a:pPr>
             <a:r>
@@ -3625,7 +3387,7 @@
           <a:bodyPr wrap="square" lIns="0" tIns="0" rIns="0" bIns="0" rtlCol="0" anchor="ctr"/>
           <a:lstStyle/>
           <a:p>
-            <a:pPr indent="0" marL="0">
+            <a:pPr marL="0" indent="0">
               <a:buNone/>
             </a:pPr>
             <a:r>
@@ -3664,7 +3426,7 @@
           <a:bodyPr wrap="square" lIns="0" tIns="0" rIns="0" bIns="0" rtlCol="0" anchor="ctr"/>
           <a:lstStyle/>
           <a:p>
-            <a:pPr indent="0" marL="0">
+            <a:pPr marL="0" indent="0">
               <a:lnSpc>
                 <a:spcPts val="1700"/>
               </a:lnSpc>
@@ -3706,7 +3468,7 @@
           <a:bodyPr wrap="square" lIns="0" tIns="0" rIns="0" bIns="0" rtlCol="0" anchor="ctr"/>
           <a:lstStyle/>
           <a:p>
-            <a:pPr indent="0" marL="0">
+            <a:pPr marL="0" indent="0">
               <a:buNone/>
             </a:pPr>
             <a:r>
@@ -3745,7 +3507,7 @@
           <a:bodyPr wrap="square" lIns="0" tIns="0" rIns="0" bIns="0" rtlCol="0" anchor="ctr"/>
           <a:lstStyle/>
           <a:p>
-            <a:pPr indent="0" marL="0">
+            <a:pPr marL="0" indent="0">
               <a:lnSpc>
                 <a:spcPts val="1700"/>
               </a:lnSpc>
@@ -3782,6 +3544,7 @@
         <a:solidFill>
           <a:srgbClr val="4A4863"/>
         </a:solidFill>
+        <a:effectLst/>
       </p:bgPr>
     </p:bg>
     <p:spTree>
@@ -3844,11 +3607,11 @@
           <a:bodyPr wrap="square" lIns="0" tIns="0" rIns="0" bIns="0" rtlCol="0" anchor="ctr"/>
           <a:lstStyle/>
           <a:p>
-            <a:pPr indent="0" marL="0">
-              <a:buNone/>
-            </a:pPr>
-            <a:r>
-              <a:rPr lang="en-US" sz="1100" b="1" spc="200" kern="0" dirty="0">
+            <a:pPr marL="0" indent="0">
+              <a:buNone/>
+            </a:pPr>
+            <a:r>
+              <a:rPr lang="en-US" sz="1100" b="1" kern="0" spc="200" dirty="0">
                 <a:solidFill>
                   <a:srgbClr val="E7DCC9"/>
                 </a:solidFill>
@@ -3883,7 +3646,7 @@
           <a:bodyPr wrap="square" lIns="0" tIns="0" rIns="0" bIns="0" rtlCol="0" anchor="ctr"/>
           <a:lstStyle/>
           <a:p>
-            <a:pPr indent="0" marL="0">
+            <a:pPr marL="0" indent="0">
               <a:buNone/>
             </a:pPr>
             <a:r>
@@ -3922,7 +3685,7 @@
           <a:bodyPr wrap="square" lIns="0" tIns="0" rIns="0" bIns="0" rtlCol="0" anchor="ctr"/>
           <a:lstStyle/>
           <a:p>
-            <a:pPr indent="0" marL="0">
+            <a:pPr marL="0" indent="0">
               <a:lnSpc>
                 <a:spcPts val="1800"/>
               </a:lnSpc>
@@ -3991,11 +3754,11 @@
           <a:bodyPr wrap="square" lIns="0" tIns="0" rIns="0" bIns="0" rtlCol="0" anchor="ctr"/>
           <a:lstStyle/>
           <a:p>
-            <a:pPr indent="0" marL="0">
-              <a:buNone/>
-            </a:pPr>
-            <a:r>
-              <a:rPr lang="en-US" sz="1100" b="1" spc="150" kern="0" dirty="0">
+            <a:pPr marL="0" indent="0">
+              <a:buNone/>
+            </a:pPr>
+            <a:r>
+              <a:rPr lang="en-US" sz="1100" b="1" kern="0" spc="150" dirty="0">
                 <a:solidFill>
                   <a:srgbClr val="4A5A86"/>
                 </a:solidFill>
@@ -4030,7 +3793,7 @@
           <a:bodyPr wrap="square" lIns="0" tIns="0" rIns="0" bIns="0" rtlCol="0" anchor="ctr"/>
           <a:lstStyle/>
           <a:p>
-            <a:pPr indent="0" marL="0">
+            <a:pPr marL="0" indent="0">
               <a:buNone/>
             </a:pPr>
             <a:r>
@@ -4069,7 +3832,7 @@
           <a:bodyPr wrap="square" lIns="0" tIns="0" rIns="0" bIns="0" rtlCol="0" anchor="ctr"/>
           <a:lstStyle/>
           <a:p>
-            <a:pPr algn="r" indent="0" marL="0">
+            <a:pPr marL="0" indent="0" algn="r">
               <a:buNone/>
             </a:pPr>
             <a:r>
@@ -4108,7 +3871,7 @@
           <a:bodyPr wrap="square" lIns="0" tIns="0" rIns="0" bIns="0" rtlCol="0" anchor="ctr"/>
           <a:lstStyle/>
           <a:p>
-            <a:pPr algn="r" indent="0" marL="0">
+            <a:pPr marL="0" indent="0" algn="r">
               <a:buNone/>
             </a:pPr>
             <a:r>
@@ -4147,7 +3910,7 @@
           <a:bodyPr wrap="square" lIns="0" tIns="0" rIns="0" bIns="0" rtlCol="0" anchor="ctr"/>
           <a:lstStyle/>
           <a:p>
-            <a:pPr indent="0" marL="0">
+            <a:pPr marL="0" indent="0">
               <a:buNone/>
             </a:pPr>
             <a:r>
@@ -4186,7 +3949,7 @@
           <a:bodyPr wrap="square" lIns="0" tIns="0" rIns="0" bIns="0" rtlCol="0" anchor="ctr"/>
           <a:lstStyle/>
           <a:p>
-            <a:pPr algn="r" indent="0" marL="0">
+            <a:pPr marL="0" indent="0" algn="r">
               <a:buNone/>
             </a:pPr>
             <a:r>
@@ -4225,7 +3988,7 @@
           <a:bodyPr wrap="square" lIns="0" tIns="0" rIns="0" bIns="0" rtlCol="0" anchor="ctr"/>
           <a:lstStyle/>
           <a:p>
-            <a:pPr algn="r" indent="0" marL="0">
+            <a:pPr marL="0" indent="0" algn="r">
               <a:buNone/>
             </a:pPr>
             <a:r>
@@ -4264,7 +4027,7 @@
           <a:bodyPr wrap="square" lIns="0" tIns="0" rIns="0" bIns="0" rtlCol="0" anchor="ctr"/>
           <a:lstStyle/>
           <a:p>
-            <a:pPr indent="0" marL="0">
+            <a:pPr marL="0" indent="0">
               <a:buNone/>
             </a:pPr>
             <a:r>
@@ -4303,7 +4066,7 @@
           <a:bodyPr wrap="square" lIns="0" tIns="0" rIns="0" bIns="0" rtlCol="0" anchor="ctr"/>
           <a:lstStyle/>
           <a:p>
-            <a:pPr algn="r" indent="0" marL="0">
+            <a:pPr marL="0" indent="0" algn="r">
               <a:buNone/>
             </a:pPr>
             <a:r>
@@ -4342,7 +4105,7 @@
           <a:bodyPr wrap="square" lIns="0" tIns="0" rIns="0" bIns="0" rtlCol="0" anchor="ctr"/>
           <a:lstStyle/>
           <a:p>
-            <a:pPr algn="r" indent="0" marL="0">
+            <a:pPr marL="0" indent="0" algn="r">
               <a:buNone/>
             </a:pPr>
             <a:r>
@@ -4381,7 +4144,7 @@
           <a:bodyPr wrap="square" lIns="0" tIns="0" rIns="0" bIns="0" rtlCol="0" anchor="ctr"/>
           <a:lstStyle/>
           <a:p>
-            <a:pPr indent="0" marL="0">
+            <a:pPr marL="0" indent="0">
               <a:buNone/>
             </a:pPr>
             <a:r>
@@ -4420,7 +4183,7 @@
           <a:bodyPr wrap="square" lIns="0" tIns="0" rIns="0" bIns="0" rtlCol="0" anchor="ctr"/>
           <a:lstStyle/>
           <a:p>
-            <a:pPr algn="r" indent="0" marL="0">
+            <a:pPr marL="0" indent="0" algn="r">
               <a:buNone/>
             </a:pPr>
             <a:r>
@@ -4459,7 +4222,7 @@
           <a:bodyPr wrap="square" lIns="0" tIns="0" rIns="0" bIns="0" rtlCol="0" anchor="ctr"/>
           <a:lstStyle/>
           <a:p>
-            <a:pPr algn="r" indent="0" marL="0">
+            <a:pPr marL="0" indent="0" algn="r">
               <a:buNone/>
             </a:pPr>
             <a:r>
@@ -4498,7 +4261,7 @@
           <a:bodyPr wrap="square" lIns="0" tIns="0" rIns="0" bIns="0" rtlCol="0" anchor="ctr"/>
           <a:lstStyle/>
           <a:p>
-            <a:pPr indent="0" marL="0">
+            <a:pPr marL="0" indent="0">
               <a:buNone/>
             </a:pPr>
             <a:r>
@@ -4537,7 +4300,7 @@
           <a:bodyPr wrap="square" lIns="0" tIns="0" rIns="0" bIns="0" rtlCol="0" anchor="ctr"/>
           <a:lstStyle/>
           <a:p>
-            <a:pPr algn="r" indent="0" marL="0">
+            <a:pPr marL="0" indent="0" algn="r">
               <a:buNone/>
             </a:pPr>
             <a:r>
@@ -4576,7 +4339,7 @@
           <a:bodyPr wrap="square" lIns="0" tIns="0" rIns="0" bIns="0" rtlCol="0" anchor="ctr"/>
           <a:lstStyle/>
           <a:p>
-            <a:pPr algn="r" indent="0" marL="0">
+            <a:pPr marL="0" indent="0" algn="r">
               <a:buNone/>
             </a:pPr>
             <a:r>
@@ -4615,7 +4378,7 @@
           <a:bodyPr wrap="square" lIns="0" tIns="0" rIns="0" bIns="0" rtlCol="0" anchor="ctr"/>
           <a:lstStyle/>
           <a:p>
-            <a:pPr indent="0" marL="0">
+            <a:pPr marL="0" indent="0">
               <a:buNone/>
             </a:pPr>
             <a:r>
@@ -4654,7 +4417,7 @@
           <a:bodyPr wrap="square" lIns="0" tIns="0" rIns="0" bIns="0" rtlCol="0" anchor="ctr"/>
           <a:lstStyle/>
           <a:p>
-            <a:pPr algn="r" indent="0" marL="0">
+            <a:pPr marL="0" indent="0" algn="r">
               <a:buNone/>
             </a:pPr>
             <a:r>
@@ -4720,11 +4483,11 @@
           <a:bodyPr wrap="square" lIns="0" tIns="0" rIns="0" bIns="0" rtlCol="0" anchor="ctr"/>
           <a:lstStyle/>
           <a:p>
-            <a:pPr indent="0" marL="0">
-              <a:buNone/>
-            </a:pPr>
-            <a:r>
-              <a:rPr lang="en-US" sz="1100" b="1" spc="150" kern="0" dirty="0">
+            <a:pPr marL="0" indent="0">
+              <a:buNone/>
+            </a:pPr>
+            <a:r>
+              <a:rPr lang="en-US" sz="1100" b="1" kern="0" spc="150" dirty="0">
                 <a:solidFill>
                   <a:srgbClr val="4A5A86"/>
                 </a:solidFill>
@@ -4759,7 +4522,7 @@
           <a:bodyPr wrap="square" lIns="0" tIns="0" rIns="0" bIns="0" rtlCol="0" anchor="ctr"/>
           <a:lstStyle/>
           <a:p>
-            <a:pPr indent="0" marL="0">
+            <a:pPr marL="0" indent="0">
               <a:buNone/>
             </a:pPr>
             <a:r>
@@ -4798,7 +4561,7 @@
           <a:bodyPr wrap="square" lIns="0" tIns="0" rIns="0" bIns="0" rtlCol="0" anchor="ctr"/>
           <a:lstStyle/>
           <a:p>
-            <a:pPr indent="0" marL="0">
+            <a:pPr marL="0" indent="0">
               <a:buNone/>
             </a:pPr>
             <a:r>
@@ -4837,7 +4600,7 @@
           <a:bodyPr wrap="square" lIns="0" tIns="0" rIns="0" bIns="0" rtlCol="0" anchor="ctr"/>
           <a:lstStyle/>
           <a:p>
-            <a:pPr indent="0" marL="0">
+            <a:pPr marL="0" indent="0">
               <a:lnSpc>
                 <a:spcPts val="1700"/>
               </a:lnSpc>
@@ -4879,7 +4642,7 @@
           <a:bodyPr wrap="square" lIns="0" tIns="0" rIns="0" bIns="0" rtlCol="0" anchor="ctr"/>
           <a:lstStyle/>
           <a:p>
-            <a:pPr indent="0" marL="0">
+            <a:pPr marL="0" indent="0">
               <a:buNone/>
             </a:pPr>
             <a:r>
@@ -4918,7 +4681,7 @@
           <a:bodyPr wrap="square" lIns="0" tIns="0" rIns="0" bIns="0" rtlCol="0" anchor="ctr"/>
           <a:lstStyle/>
           <a:p>
-            <a:pPr indent="0" marL="0">
+            <a:pPr marL="0" indent="0">
               <a:buNone/>
             </a:pPr>
             <a:r>
@@ -4957,7 +4720,7 @@
           <a:bodyPr wrap="square" lIns="0" tIns="0" rIns="0" bIns="0" rtlCol="0" anchor="ctr"/>
           <a:lstStyle/>
           <a:p>
-            <a:pPr indent="0" marL="0">
+            <a:pPr marL="0" indent="0">
               <a:lnSpc>
                 <a:spcPts val="1700"/>
               </a:lnSpc>
@@ -4999,7 +4762,7 @@
           <a:bodyPr wrap="square" lIns="0" tIns="0" rIns="0" bIns="0" rtlCol="0" anchor="ctr"/>
           <a:lstStyle/>
           <a:p>
-            <a:pPr indent="0" marL="0">
+            <a:pPr marL="0" indent="0">
               <a:buNone/>
             </a:pPr>
             <a:r>
@@ -5038,7 +4801,7 @@
           <a:bodyPr wrap="square" lIns="0" tIns="0" rIns="0" bIns="0" rtlCol="0" anchor="ctr"/>
           <a:lstStyle/>
           <a:p>
-            <a:pPr indent="0" marL="0">
+            <a:pPr marL="0" indent="0">
               <a:buNone/>
             </a:pPr>
             <a:r>
@@ -5077,7 +4840,7 @@
           <a:bodyPr wrap="square" lIns="0" tIns="0" rIns="0" bIns="0" rtlCol="0" anchor="ctr"/>
           <a:lstStyle/>
           <a:p>
-            <a:pPr indent="0" marL="0">
+            <a:pPr marL="0" indent="0">
               <a:lnSpc>
                 <a:spcPts val="1700"/>
               </a:lnSpc>
@@ -5119,7 +4882,7 @@
           <a:bodyPr wrap="square" lIns="0" tIns="0" rIns="0" bIns="0" rtlCol="0" anchor="ctr"/>
           <a:lstStyle/>
           <a:p>
-            <a:pPr indent="0" marL="0">
+            <a:pPr marL="0" indent="0">
               <a:lnSpc>
                 <a:spcPts val="1600"/>
               </a:lnSpc>
@@ -5161,7 +4924,7 @@
           <a:bodyPr wrap="square" lIns="0" tIns="0" rIns="0" bIns="0" rtlCol="0" anchor="ctr"/>
           <a:lstStyle/>
           <a:p>
-            <a:pPr indent="0" marL="0">
+            <a:pPr marL="0" indent="0">
               <a:buNone/>
             </a:pPr>
             <a:r>
@@ -5195,6 +4958,7 @@
         <a:solidFill>
           <a:srgbClr val="FFFFFF"/>
         </a:solidFill>
+        <a:effectLst/>
       </p:bgPr>
     </p:bg>
     <p:spTree>
@@ -5232,11 +4996,11 @@
           <a:bodyPr wrap="square" lIns="0" tIns="0" rIns="0" bIns="0" rtlCol="0" anchor="ctr"/>
           <a:lstStyle/>
           <a:p>
-            <a:pPr indent="0" marL="0">
-              <a:buNone/>
-            </a:pPr>
-            <a:r>
-              <a:rPr lang="en-US" sz="1100" b="1" spc="200" kern="0" dirty="0">
+            <a:pPr marL="0" indent="0">
+              <a:buNone/>
+            </a:pPr>
+            <a:r>
+              <a:rPr lang="en-US" sz="1100" b="1" kern="0" spc="200" dirty="0">
                 <a:solidFill>
                   <a:srgbClr val="4A5A86"/>
                 </a:solidFill>
@@ -5271,7 +5035,7 @@
           <a:bodyPr wrap="square" lIns="0" tIns="0" rIns="0" bIns="0" rtlCol="0" anchor="ctr"/>
           <a:lstStyle/>
           <a:p>
-            <a:pPr indent="0" marL="0">
+            <a:pPr marL="0" indent="0">
               <a:lnSpc>
                 <a:spcPts val="3800"/>
               </a:lnSpc>
@@ -5313,7 +5077,7 @@
           <a:bodyPr wrap="square" lIns="0" tIns="0" rIns="0" bIns="0" rtlCol="0" anchor="ctr"/>
           <a:lstStyle/>
           <a:p>
-            <a:pPr algn="r" indent="0" marL="0">
+            <a:pPr marL="0" indent="0" algn="r">
               <a:buNone/>
             </a:pPr>
             <a:r>
@@ -5352,7 +5116,7 @@
           <a:bodyPr wrap="square" lIns="0" tIns="0" rIns="0" bIns="0" rtlCol="0" anchor="ctr"/>
           <a:lstStyle/>
           <a:p>
-            <a:pPr indent="0" marL="0">
+            <a:pPr marL="0" indent="0">
               <a:buNone/>
             </a:pPr>
             <a:r>
@@ -5443,7 +5207,7 @@
           <a:bodyPr wrap="square" lIns="0" tIns="0" rIns="0" bIns="0" rtlCol="0" anchor="ctr"/>
           <a:lstStyle/>
           <a:p>
-            <a:pPr algn="ctr" indent="0" marL="0">
+            <a:pPr marL="0" indent="0" algn="ctr">
               <a:buNone/>
             </a:pPr>
             <a:r>
@@ -5482,11 +5246,11 @@
           <a:bodyPr wrap="square" lIns="0" tIns="0" rIns="0" bIns="0" rtlCol="0" anchor="ctr"/>
           <a:lstStyle/>
           <a:p>
-            <a:pPr indent="0" marL="0">
-              <a:buNone/>
-            </a:pPr>
-            <a:r>
-              <a:rPr lang="en-US" sz="1100" b="1" spc="150" kern="0" dirty="0">
+            <a:pPr marL="0" indent="0">
+              <a:buNone/>
+            </a:pPr>
+            <a:r>
+              <a:rPr lang="en-US" sz="1100" b="1" kern="0" spc="150" dirty="0">
                 <a:solidFill>
                   <a:srgbClr val="4A5A86"/>
                 </a:solidFill>
@@ -5521,7 +5285,7 @@
           <a:bodyPr wrap="square" lIns="0" tIns="0" rIns="0" bIns="0" rtlCol="0" anchor="ctr"/>
           <a:lstStyle/>
           <a:p>
-            <a:pPr indent="0" marL="0">
+            <a:pPr marL="0" indent="0">
               <a:lnSpc>
                 <a:spcPts val="2300"/>
               </a:lnSpc>
@@ -5563,7 +5327,7 @@
           <a:bodyPr wrap="square" lIns="0" tIns="0" rIns="0" bIns="0" rtlCol="0" anchor="ctr"/>
           <a:lstStyle/>
           <a:p>
-            <a:pPr indent="0" marL="0">
+            <a:pPr marL="0" indent="0">
               <a:lnSpc>
                 <a:spcPts val="1900"/>
               </a:lnSpc>
@@ -5657,7 +5421,7 @@
           <a:bodyPr wrap="square" lIns="0" tIns="0" rIns="0" bIns="0" rtlCol="0" anchor="ctr"/>
           <a:lstStyle/>
           <a:p>
-            <a:pPr algn="ctr" indent="0" marL="0">
+            <a:pPr marL="0" indent="0" algn="ctr">
               <a:buNone/>
             </a:pPr>
             <a:r>
@@ -5696,11 +5460,11 @@
           <a:bodyPr wrap="square" lIns="0" tIns="0" rIns="0" bIns="0" rtlCol="0" anchor="ctr"/>
           <a:lstStyle/>
           <a:p>
-            <a:pPr indent="0" marL="0">
-              <a:buNone/>
-            </a:pPr>
-            <a:r>
-              <a:rPr lang="en-US" sz="1100" b="1" spc="150" kern="0" dirty="0">
+            <a:pPr marL="0" indent="0">
+              <a:buNone/>
+            </a:pPr>
+            <a:r>
+              <a:rPr lang="en-US" sz="1100" b="1" kern="0" spc="150" dirty="0">
                 <a:solidFill>
                   <a:srgbClr val="4A5A86"/>
                 </a:solidFill>
@@ -5735,7 +5499,7 @@
           <a:bodyPr wrap="square" lIns="0" tIns="0" rIns="0" bIns="0" rtlCol="0" anchor="ctr"/>
           <a:lstStyle/>
           <a:p>
-            <a:pPr indent="0" marL="0">
+            <a:pPr marL="0" indent="0">
               <a:lnSpc>
                 <a:spcPts val="2300"/>
               </a:lnSpc>
@@ -5777,7 +5541,7 @@
           <a:bodyPr wrap="square" lIns="0" tIns="0" rIns="0" bIns="0" rtlCol="0" anchor="ctr"/>
           <a:lstStyle/>
           <a:p>
-            <a:pPr indent="0" marL="0">
+            <a:pPr marL="0" indent="0">
               <a:lnSpc>
                 <a:spcPts val="1900"/>
               </a:lnSpc>
@@ -5871,7 +5635,7 @@
           <a:bodyPr wrap="square" lIns="0" tIns="0" rIns="0" bIns="0" rtlCol="0" anchor="ctr"/>
           <a:lstStyle/>
           <a:p>
-            <a:pPr algn="ctr" indent="0" marL="0">
+            <a:pPr marL="0" indent="0" algn="ctr">
               <a:buNone/>
             </a:pPr>
             <a:r>
@@ -5910,11 +5674,11 @@
           <a:bodyPr wrap="square" lIns="0" tIns="0" rIns="0" bIns="0" rtlCol="0" anchor="ctr"/>
           <a:lstStyle/>
           <a:p>
-            <a:pPr indent="0" marL="0">
-              <a:buNone/>
-            </a:pPr>
-            <a:r>
-              <a:rPr lang="en-US" sz="1100" b="1" spc="150" kern="0" dirty="0">
+            <a:pPr marL="0" indent="0">
+              <a:buNone/>
+            </a:pPr>
+            <a:r>
+              <a:rPr lang="en-US" sz="1100" b="1" kern="0" spc="150" dirty="0">
                 <a:solidFill>
                   <a:srgbClr val="4A5A86"/>
                 </a:solidFill>
@@ -5949,7 +5713,7 @@
           <a:bodyPr wrap="square" lIns="0" tIns="0" rIns="0" bIns="0" rtlCol="0" anchor="ctr"/>
           <a:lstStyle/>
           <a:p>
-            <a:pPr indent="0" marL="0">
+            <a:pPr marL="0" indent="0">
               <a:lnSpc>
                 <a:spcPts val="2300"/>
               </a:lnSpc>
@@ -5991,7 +5755,7 @@
           <a:bodyPr wrap="square" lIns="0" tIns="0" rIns="0" bIns="0" rtlCol="0" anchor="ctr"/>
           <a:lstStyle/>
           <a:p>
-            <a:pPr indent="0" marL="0">
+            <a:pPr marL="0" indent="0">
               <a:lnSpc>
                 <a:spcPts val="1900"/>
               </a:lnSpc>
@@ -6033,7 +5797,7 @@
           <a:bodyPr wrap="square" lIns="0" tIns="0" rIns="0" bIns="0" rtlCol="0" anchor="ctr"/>
           <a:lstStyle/>
           <a:p>
-            <a:pPr indent="0" marL="0">
+            <a:pPr marL="0" indent="0">
               <a:buNone/>
             </a:pPr>
             <a:r>
@@ -6067,6 +5831,7 @@
         <a:solidFill>
           <a:srgbClr val="FFFFFF"/>
         </a:solidFill>
+        <a:effectLst/>
       </p:bgPr>
     </p:bg>
     <p:spTree>
@@ -6104,11 +5869,11 @@
           <a:bodyPr wrap="square" lIns="0" tIns="0" rIns="0" bIns="0" rtlCol="0" anchor="ctr"/>
           <a:lstStyle/>
           <a:p>
-            <a:pPr indent="0" marL="0">
-              <a:buNone/>
-            </a:pPr>
-            <a:r>
-              <a:rPr lang="en-US" sz="1100" b="1" spc="200" kern="0" dirty="0">
+            <a:pPr marL="0" indent="0">
+              <a:buNone/>
+            </a:pPr>
+            <a:r>
+              <a:rPr lang="en-US" sz="1100" b="1" kern="0" spc="200" dirty="0">
                 <a:solidFill>
                   <a:srgbClr val="4A5A86"/>
                 </a:solidFill>
@@ -6143,7 +5908,7 @@
           <a:bodyPr wrap="square" lIns="0" tIns="0" rIns="0" bIns="0" rtlCol="0" anchor="ctr"/>
           <a:lstStyle/>
           <a:p>
-            <a:pPr indent="0" marL="0">
+            <a:pPr marL="0" indent="0">
               <a:lnSpc>
                 <a:spcPts val="3800"/>
               </a:lnSpc>
@@ -6185,7 +5950,7 @@
           <a:bodyPr wrap="square" lIns="0" tIns="0" rIns="0" bIns="0" rtlCol="0" anchor="ctr"/>
           <a:lstStyle/>
           <a:p>
-            <a:pPr algn="r" indent="0" marL="0">
+            <a:pPr marL="0" indent="0" algn="r">
               <a:buNone/>
             </a:pPr>
             <a:r>
@@ -6276,7 +6041,7 @@
           <a:bodyPr wrap="square" lIns="0" tIns="0" rIns="0" bIns="0" rtlCol="0" anchor="ctr"/>
           <a:lstStyle/>
           <a:p>
-            <a:pPr algn="ctr" indent="0" marL="0">
+            <a:pPr marL="0" indent="0" algn="ctr">
               <a:buNone/>
             </a:pPr>
             <a:r>
@@ -6315,7 +6080,7 @@
           <a:bodyPr wrap="square" lIns="0" tIns="0" rIns="0" bIns="0" rtlCol="0" anchor="ctr"/>
           <a:lstStyle/>
           <a:p>
-            <a:pPr indent="0" marL="0">
+            <a:pPr marL="0" indent="0">
               <a:lnSpc>
                 <a:spcPts val="2400"/>
               </a:lnSpc>
@@ -6357,7 +6122,7 @@
           <a:bodyPr wrap="square" lIns="0" tIns="0" rIns="0" bIns="0" rtlCol="0" anchor="ctr"/>
           <a:lstStyle/>
           <a:p>
-            <a:pPr indent="0" marL="0">
+            <a:pPr marL="0" indent="0">
               <a:lnSpc>
                 <a:spcPts val="1900"/>
               </a:lnSpc>
@@ -6377,7 +6142,7 @@
             <a:endParaRPr lang="en-US" sz="1300" dirty="0"/>
           </a:p>
           <a:p>
-            <a:pPr indent="0" marL="0">
+            <a:pPr marL="0" indent="0">
               <a:lnSpc>
                 <a:spcPts val="1900"/>
               </a:lnSpc>
@@ -6471,7 +6236,7 @@
           <a:bodyPr wrap="square" lIns="0" tIns="0" rIns="0" bIns="0" rtlCol="0" anchor="ctr"/>
           <a:lstStyle/>
           <a:p>
-            <a:pPr algn="ctr" indent="0" marL="0">
+            <a:pPr marL="0" indent="0" algn="ctr">
               <a:buNone/>
             </a:pPr>
             <a:r>
@@ -6510,7 +6275,7 @@
           <a:bodyPr wrap="square" lIns="0" tIns="0" rIns="0" bIns="0" rtlCol="0" anchor="ctr"/>
           <a:lstStyle/>
           <a:p>
-            <a:pPr indent="0" marL="0">
+            <a:pPr marL="0" indent="0">
               <a:lnSpc>
                 <a:spcPts val="2400"/>
               </a:lnSpc>
@@ -6552,7 +6317,7 @@
           <a:bodyPr wrap="square" lIns="0" tIns="0" rIns="0" bIns="0" rtlCol="0" anchor="ctr"/>
           <a:lstStyle/>
           <a:p>
-            <a:pPr indent="0" marL="0">
+            <a:pPr marL="0" indent="0">
               <a:lnSpc>
                 <a:spcPts val="1900"/>
               </a:lnSpc>
@@ -6572,7 +6337,7 @@
             <a:endParaRPr lang="en-US" sz="1300" dirty="0"/>
           </a:p>
           <a:p>
-            <a:pPr indent="0" marL="0">
+            <a:pPr marL="0" indent="0">
               <a:lnSpc>
                 <a:spcPts val="1900"/>
               </a:lnSpc>
@@ -6666,7 +6431,7 @@
           <a:bodyPr wrap="square" lIns="0" tIns="0" rIns="0" bIns="0" rtlCol="0" anchor="ctr"/>
           <a:lstStyle/>
           <a:p>
-            <a:pPr algn="ctr" indent="0" marL="0">
+            <a:pPr marL="0" indent="0" algn="ctr">
               <a:buNone/>
             </a:pPr>
             <a:r>
@@ -6705,7 +6470,7 @@
           <a:bodyPr wrap="square" lIns="0" tIns="0" rIns="0" bIns="0" rtlCol="0" anchor="ctr"/>
           <a:lstStyle/>
           <a:p>
-            <a:pPr indent="0" marL="0">
+            <a:pPr marL="0" indent="0">
               <a:lnSpc>
                 <a:spcPts val="2400"/>
               </a:lnSpc>
@@ -6747,7 +6512,7 @@
           <a:bodyPr wrap="square" lIns="0" tIns="0" rIns="0" bIns="0" rtlCol="0" anchor="ctr"/>
           <a:lstStyle/>
           <a:p>
-            <a:pPr indent="0" marL="0">
+            <a:pPr marL="0" indent="0">
               <a:lnSpc>
                 <a:spcPts val="1900"/>
               </a:lnSpc>
@@ -6767,7 +6532,7 @@
             <a:endParaRPr lang="en-US" sz="1300" dirty="0"/>
           </a:p>
           <a:p>
-            <a:pPr indent="0" marL="0">
+            <a:pPr marL="0" indent="0">
               <a:lnSpc>
                 <a:spcPts val="1900"/>
               </a:lnSpc>
@@ -6836,11 +6601,11 @@
           <a:bodyPr wrap="square" lIns="0" tIns="0" rIns="0" bIns="0" rtlCol="0" anchor="ctr"/>
           <a:lstStyle/>
           <a:p>
-            <a:pPr indent="0" marL="0">
-              <a:buNone/>
-            </a:pPr>
-            <a:r>
-              <a:rPr lang="en-US" sz="1100" b="1" spc="150" kern="0" dirty="0">
+            <a:pPr marL="0" indent="0">
+              <a:buNone/>
+            </a:pPr>
+            <a:r>
+              <a:rPr lang="en-US" sz="1100" b="1" kern="0" spc="150" dirty="0">
                 <a:solidFill>
                   <a:srgbClr val="4A5A86"/>
                 </a:solidFill>
@@ -6875,7 +6640,7 @@
           <a:bodyPr wrap="square" lIns="0" tIns="0" rIns="0" bIns="0" rtlCol="0" anchor="ctr"/>
           <a:lstStyle/>
           <a:p>
-            <a:pPr indent="0" marL="0">
+            <a:pPr marL="0" indent="0">
               <a:buNone/>
             </a:pPr>
             <a:r>
@@ -6909,6 +6674,7 @@
         <a:solidFill>
           <a:srgbClr val="FFFFFF"/>
         </a:solidFill>
+        <a:effectLst/>
       </p:bgPr>
     </p:bg>
     <p:spTree>
@@ -6946,11 +6712,11 @@
           <a:bodyPr wrap="square" lIns="0" tIns="0" rIns="0" bIns="0" rtlCol="0" anchor="ctr"/>
           <a:lstStyle/>
           <a:p>
-            <a:pPr indent="0" marL="0">
-              <a:buNone/>
-            </a:pPr>
-            <a:r>
-              <a:rPr lang="en-US" sz="1100" b="1" spc="200" kern="0" dirty="0">
+            <a:pPr marL="0" indent="0">
+              <a:buNone/>
+            </a:pPr>
+            <a:r>
+              <a:rPr lang="en-US" sz="1100" b="1" kern="0" spc="200" dirty="0">
                 <a:solidFill>
                   <a:srgbClr val="4A5A86"/>
                 </a:solidFill>
@@ -6985,7 +6751,7 @@
           <a:bodyPr wrap="square" lIns="0" tIns="0" rIns="0" bIns="0" rtlCol="0" anchor="ctr"/>
           <a:lstStyle/>
           <a:p>
-            <a:pPr indent="0" marL="0">
+            <a:pPr marL="0" indent="0">
               <a:lnSpc>
                 <a:spcPts val="3800"/>
               </a:lnSpc>
@@ -7027,7 +6793,7 @@
           <a:bodyPr wrap="square" lIns="0" tIns="0" rIns="0" bIns="0" rtlCol="0" anchor="ctr"/>
           <a:lstStyle/>
           <a:p>
-            <a:pPr algn="r" indent="0" marL="0">
+            <a:pPr marL="0" indent="0" algn="r">
               <a:buNone/>
             </a:pPr>
             <a:r>
@@ -7093,7 +6859,7 @@
           <a:bodyPr wrap="square" lIns="0" tIns="0" rIns="0" bIns="0" rtlCol="0" anchor="ctr"/>
           <a:lstStyle/>
           <a:p>
-            <a:pPr indent="0" marL="0">
+            <a:pPr marL="0" indent="0">
               <a:buNone/>
             </a:pPr>
             <a:r>
@@ -7132,7 +6898,7 @@
           <a:bodyPr wrap="square" lIns="0" tIns="0" rIns="0" bIns="0" rtlCol="0" anchor="ctr"/>
           <a:lstStyle/>
           <a:p>
-            <a:pPr indent="0" marL="0">
+            <a:pPr marL="0" indent="0">
               <a:buNone/>
             </a:pPr>
             <a:r>
@@ -7171,7 +6937,7 @@
           <a:bodyPr wrap="square" lIns="0" tIns="0" rIns="0" bIns="0" rtlCol="0" anchor="ctr"/>
           <a:lstStyle/>
           <a:p>
-            <a:pPr indent="0" marL="0">
+            <a:pPr marL="0" indent="0">
               <a:lnSpc>
                 <a:spcPts val="1800"/>
               </a:lnSpc>
@@ -7240,7 +7006,7 @@
           <a:bodyPr wrap="square" lIns="0" tIns="0" rIns="0" bIns="0" rtlCol="0" anchor="ctr"/>
           <a:lstStyle/>
           <a:p>
-            <a:pPr indent="0" marL="0">
+            <a:pPr marL="0" indent="0">
               <a:buNone/>
             </a:pPr>
             <a:r>
@@ -7279,7 +7045,7 @@
           <a:bodyPr wrap="square" lIns="0" tIns="0" rIns="0" bIns="0" rtlCol="0" anchor="ctr"/>
           <a:lstStyle/>
           <a:p>
-            <a:pPr indent="0" marL="0">
+            <a:pPr marL="0" indent="0">
               <a:buNone/>
             </a:pPr>
             <a:r>
@@ -7318,7 +7084,7 @@
           <a:bodyPr wrap="square" lIns="0" tIns="0" rIns="0" bIns="0" rtlCol="0" anchor="ctr"/>
           <a:lstStyle/>
           <a:p>
-            <a:pPr indent="0" marL="0">
+            <a:pPr marL="0" indent="0">
               <a:lnSpc>
                 <a:spcPts val="1800"/>
               </a:lnSpc>
@@ -7387,7 +7153,7 @@
           <a:bodyPr wrap="square" lIns="0" tIns="0" rIns="0" bIns="0" rtlCol="0" anchor="ctr"/>
           <a:lstStyle/>
           <a:p>
-            <a:pPr indent="0" marL="0">
+            <a:pPr marL="0" indent="0">
               <a:buNone/>
             </a:pPr>
             <a:r>
@@ -7426,7 +7192,7 @@
           <a:bodyPr wrap="square" lIns="0" tIns="0" rIns="0" bIns="0" rtlCol="0" anchor="ctr"/>
           <a:lstStyle/>
           <a:p>
-            <a:pPr indent="0" marL="0">
+            <a:pPr marL="0" indent="0">
               <a:buNone/>
             </a:pPr>
             <a:r>
@@ -7465,7 +7231,7 @@
           <a:bodyPr wrap="square" lIns="0" tIns="0" rIns="0" bIns="0" rtlCol="0" anchor="ctr"/>
           <a:lstStyle/>
           <a:p>
-            <a:pPr indent="0" marL="0">
+            <a:pPr marL="0" indent="0">
               <a:lnSpc>
                 <a:spcPts val="1800"/>
               </a:lnSpc>
@@ -7534,11 +7300,11 @@
           <a:bodyPr wrap="square" lIns="0" tIns="0" rIns="0" bIns="0" rtlCol="0" anchor="ctr"/>
           <a:lstStyle/>
           <a:p>
-            <a:pPr indent="0" marL="0">
-              <a:buNone/>
-            </a:pPr>
-            <a:r>
-              <a:rPr lang="en-US" sz="1100" b="1" spc="150" kern="0" dirty="0">
+            <a:pPr marL="0" indent="0">
+              <a:buNone/>
+            </a:pPr>
+            <a:r>
+              <a:rPr lang="en-US" sz="1100" b="1" kern="0" spc="150" dirty="0">
                 <a:solidFill>
                   <a:srgbClr val="B8873A"/>
                 </a:solidFill>
@@ -7573,7 +7339,7 @@
           <a:bodyPr wrap="square" lIns="0" tIns="0" rIns="0" bIns="0" rtlCol="0" anchor="ctr"/>
           <a:lstStyle/>
           <a:p>
-            <a:pPr indent="0" marL="0">
+            <a:pPr marL="0" indent="0">
               <a:lnSpc>
                 <a:spcPts val="1900"/>
               </a:lnSpc>
@@ -7615,7 +7381,7 @@
           <a:bodyPr wrap="square" lIns="0" tIns="0" rIns="0" bIns="0" rtlCol="0" anchor="ctr"/>
           <a:lstStyle/>
           <a:p>
-            <a:pPr indent="0" marL="0">
+            <a:pPr marL="0" indent="0">
               <a:buNone/>
             </a:pPr>
             <a:r>
@@ -7649,6 +7415,7 @@
         <a:solidFill>
           <a:srgbClr val="FFFFFF"/>
         </a:solidFill>
+        <a:effectLst/>
       </p:bgPr>
     </p:bg>
     <p:spTree>
@@ -7686,11 +7453,11 @@
           <a:bodyPr wrap="square" lIns="0" tIns="0" rIns="0" bIns="0" rtlCol="0" anchor="ctr"/>
           <a:lstStyle/>
           <a:p>
-            <a:pPr indent="0" marL="0">
-              <a:buNone/>
-            </a:pPr>
-            <a:r>
-              <a:rPr lang="en-US" sz="1100" b="1" spc="200" kern="0" dirty="0">
+            <a:pPr marL="0" indent="0">
+              <a:buNone/>
+            </a:pPr>
+            <a:r>
+              <a:rPr lang="en-US" sz="1100" b="1" kern="0" spc="200" dirty="0">
                 <a:solidFill>
                   <a:srgbClr val="4A5A86"/>
                 </a:solidFill>
@@ -7725,7 +7492,7 @@
           <a:bodyPr wrap="square" lIns="0" tIns="0" rIns="0" bIns="0" rtlCol="0" anchor="ctr"/>
           <a:lstStyle/>
           <a:p>
-            <a:pPr indent="0" marL="0">
+            <a:pPr marL="0" indent="0">
               <a:lnSpc>
                 <a:spcPts val="3800"/>
               </a:lnSpc>
@@ -7767,7 +7534,7 @@
           <a:bodyPr wrap="square" lIns="0" tIns="0" rIns="0" bIns="0" rtlCol="0" anchor="ctr"/>
           <a:lstStyle/>
           <a:p>
-            <a:pPr algn="r" indent="0" marL="0">
+            <a:pPr marL="0" indent="0" algn="r">
               <a:buNone/>
             </a:pPr>
             <a:r>
@@ -7881,7 +7648,7 @@
           <a:bodyPr wrap="square" lIns="0" tIns="0" rIns="0" bIns="0" rtlCol="0" anchor="ctr"/>
           <a:lstStyle/>
           <a:p>
-            <a:pPr algn="ctr" indent="0" marL="0">
+            <a:pPr marL="0" indent="0" algn="ctr">
               <a:buNone/>
             </a:pPr>
             <a:r>
@@ -7920,7 +7687,7 @@
           <a:bodyPr wrap="square" lIns="0" tIns="0" rIns="0" bIns="0" rtlCol="0" anchor="ctr"/>
           <a:lstStyle/>
           <a:p>
-            <a:pPr algn="ctr" indent="0" marL="0">
+            <a:pPr marL="0" indent="0" algn="ctr">
               <a:buNone/>
             </a:pPr>
             <a:r>
@@ -7959,7 +7726,7 @@
           <a:bodyPr wrap="square" lIns="0" tIns="0" rIns="0" bIns="0" rtlCol="0" anchor="ctr"/>
           <a:lstStyle/>
           <a:p>
-            <a:pPr algn="ctr" indent="0" marL="0">
+            <a:pPr marL="0" indent="0" algn="ctr">
               <a:buNone/>
             </a:pPr>
             <a:r>
@@ -7998,7 +7765,7 @@
           <a:bodyPr wrap="square" lIns="0" tIns="0" rIns="0" bIns="0" rtlCol="0" anchor="ctr"/>
           <a:lstStyle/>
           <a:p>
-            <a:pPr algn="ctr" indent="0" marL="0">
+            <a:pPr marL="0" indent="0" algn="ctr">
               <a:buNone/>
             </a:pPr>
             <a:r>
@@ -8064,11 +7831,11 @@
           <a:bodyPr wrap="square" lIns="0" tIns="0" rIns="0" bIns="0" rtlCol="0" anchor="ctr"/>
           <a:lstStyle/>
           <a:p>
-            <a:pPr indent="0" marL="0">
-              <a:buNone/>
-            </a:pPr>
-            <a:r>
-              <a:rPr lang="en-US" sz="1100" b="1" spc="150" kern="0" dirty="0">
+            <a:pPr marL="0" indent="0">
+              <a:buNone/>
+            </a:pPr>
+            <a:r>
+              <a:rPr lang="en-US" sz="1100" b="1" kern="0" spc="150" dirty="0">
                 <a:solidFill>
                   <a:srgbClr val="4A5A86"/>
                 </a:solidFill>
@@ -8103,7 +7870,7 @@
           <a:bodyPr wrap="square" lIns="0" tIns="0" rIns="0" bIns="0" rtlCol="0" anchor="ctr"/>
           <a:lstStyle/>
           <a:p>
-            <a:pPr indent="0" marL="0">
+            <a:pPr marL="0" indent="0">
               <a:buNone/>
             </a:pPr>
             <a:r>
@@ -8142,7 +7909,7 @@
           <a:bodyPr wrap="square" lIns="0" tIns="0" rIns="0" bIns="0" rtlCol="0" anchor="ctr"/>
           <a:lstStyle/>
           <a:p>
-            <a:pPr indent="0" marL="0">
+            <a:pPr marL="0" indent="0">
               <a:lnSpc>
                 <a:spcPts val="1700"/>
               </a:lnSpc>
@@ -8211,11 +7978,11 @@
           <a:bodyPr wrap="square" lIns="0" tIns="0" rIns="0" bIns="0" rtlCol="0" anchor="ctr"/>
           <a:lstStyle/>
           <a:p>
-            <a:pPr indent="0" marL="0">
-              <a:buNone/>
-            </a:pPr>
-            <a:r>
-              <a:rPr lang="en-US" sz="1100" b="1" spc="150" kern="0" dirty="0">
+            <a:pPr marL="0" indent="0">
+              <a:buNone/>
+            </a:pPr>
+            <a:r>
+              <a:rPr lang="en-US" sz="1100" b="1" kern="0" spc="150" dirty="0">
                 <a:solidFill>
                   <a:srgbClr val="4A5A86"/>
                 </a:solidFill>
@@ -8250,7 +8017,7 @@
           <a:bodyPr wrap="square" lIns="0" tIns="0" rIns="0" bIns="0" rtlCol="0" anchor="ctr"/>
           <a:lstStyle/>
           <a:p>
-            <a:pPr indent="0" marL="0">
+            <a:pPr marL="0" indent="0">
               <a:buNone/>
             </a:pPr>
             <a:r>
@@ -8289,7 +8056,7 @@
           <a:bodyPr wrap="square" lIns="0" tIns="0" rIns="0" bIns="0" rtlCol="0" anchor="ctr"/>
           <a:lstStyle/>
           <a:p>
-            <a:pPr indent="0" marL="0">
+            <a:pPr marL="0" indent="0">
               <a:lnSpc>
                 <a:spcPts val="1700"/>
               </a:lnSpc>
@@ -8358,11 +8125,11 @@
           <a:bodyPr wrap="square" lIns="0" tIns="0" rIns="0" bIns="0" rtlCol="0" anchor="ctr"/>
           <a:lstStyle/>
           <a:p>
-            <a:pPr indent="0" marL="0">
-              <a:buNone/>
-            </a:pPr>
-            <a:r>
-              <a:rPr lang="en-US" sz="1100" b="1" spc="150" kern="0" dirty="0">
+            <a:pPr marL="0" indent="0">
+              <a:buNone/>
+            </a:pPr>
+            <a:r>
+              <a:rPr lang="en-US" sz="1100" b="1" kern="0" spc="150" dirty="0">
                 <a:solidFill>
                   <a:srgbClr val="B8873A"/>
                 </a:solidFill>
@@ -8397,7 +8164,7 @@
           <a:bodyPr wrap="square" lIns="0" tIns="0" rIns="0" bIns="0" rtlCol="0" anchor="ctr"/>
           <a:lstStyle/>
           <a:p>
-            <a:pPr indent="0" marL="0">
+            <a:pPr marL="0" indent="0">
               <a:buNone/>
             </a:pPr>
             <a:r>
@@ -8436,7 +8203,7 @@
           <a:bodyPr wrap="square" lIns="0" tIns="0" rIns="0" bIns="0" rtlCol="0" anchor="ctr"/>
           <a:lstStyle/>
           <a:p>
-            <a:pPr indent="0" marL="0">
+            <a:pPr marL="0" indent="0">
               <a:lnSpc>
                 <a:spcPts val="1700"/>
               </a:lnSpc>
@@ -8478,7 +8245,7 @@
           <a:bodyPr wrap="square" lIns="0" tIns="0" rIns="0" bIns="0" rtlCol="0" anchor="ctr"/>
           <a:lstStyle/>
           <a:p>
-            <a:pPr indent="0" marL="0">
+            <a:pPr marL="0" indent="0">
               <a:buNone/>
             </a:pPr>
             <a:r>
@@ -8512,6 +8279,7 @@
         <a:solidFill>
           <a:srgbClr val="FFFFFF"/>
         </a:solidFill>
+        <a:effectLst/>
       </p:bgPr>
     </p:bg>
     <p:spTree>
@@ -8549,11 +8317,11 @@
           <a:bodyPr wrap="square" lIns="0" tIns="0" rIns="0" bIns="0" rtlCol="0" anchor="ctr"/>
           <a:lstStyle/>
           <a:p>
-            <a:pPr indent="0" marL="0">
-              <a:buNone/>
-            </a:pPr>
-            <a:r>
-              <a:rPr lang="en-US" sz="1100" b="1" spc="200" kern="0" dirty="0">
+            <a:pPr marL="0" indent="0">
+              <a:buNone/>
+            </a:pPr>
+            <a:r>
+              <a:rPr lang="en-US" sz="1100" b="1" kern="0" spc="200" dirty="0">
                 <a:solidFill>
                   <a:srgbClr val="4A5A86"/>
                 </a:solidFill>
@@ -8588,7 +8356,7 @@
           <a:bodyPr wrap="square" lIns="0" tIns="0" rIns="0" bIns="0" rtlCol="0" anchor="ctr"/>
           <a:lstStyle/>
           <a:p>
-            <a:pPr indent="0" marL="0">
+            <a:pPr marL="0" indent="0">
               <a:lnSpc>
                 <a:spcPts val="3800"/>
               </a:lnSpc>
@@ -8630,7 +8398,7 @@
           <a:bodyPr wrap="square" lIns="0" tIns="0" rIns="0" bIns="0" rtlCol="0" anchor="ctr"/>
           <a:lstStyle/>
           <a:p>
-            <a:pPr algn="r" indent="0" marL="0">
+            <a:pPr marL="0" indent="0" algn="r">
               <a:buNone/>
             </a:pPr>
             <a:r>
@@ -8669,7 +8437,7 @@
           <a:bodyPr wrap="square" lIns="0" tIns="0" rIns="0" bIns="0" rtlCol="0" anchor="ctr"/>
           <a:lstStyle/>
           <a:p>
-            <a:pPr indent="0" marL="0">
+            <a:pPr marL="0" indent="0">
               <a:buNone/>
             </a:pPr>
             <a:r>
@@ -8735,7 +8503,7 @@
           <a:bodyPr wrap="square" lIns="0" tIns="0" rIns="0" bIns="0" rtlCol="0" anchor="ctr"/>
           <a:lstStyle/>
           <a:p>
-            <a:pPr indent="0" marL="0">
+            <a:pPr marL="0" indent="0">
               <a:buNone/>
             </a:pPr>
             <a:r>
@@ -8774,7 +8542,7 @@
           <a:bodyPr wrap="square" lIns="0" tIns="0" rIns="0" bIns="0" rtlCol="0" anchor="ctr"/>
           <a:lstStyle/>
           <a:p>
-            <a:pPr indent="0" marL="0">
+            <a:pPr marL="0" indent="0">
               <a:buNone/>
             </a:pPr>
             <a:r>
@@ -8813,7 +8581,7 @@
           <a:bodyPr wrap="square" lIns="0" tIns="0" rIns="0" bIns="0" rtlCol="0" anchor="ctr"/>
           <a:lstStyle/>
           <a:p>
-            <a:pPr indent="0" marL="0">
+            <a:pPr marL="0" indent="0">
               <a:buNone/>
             </a:pPr>
             <a:r>
@@ -8879,7 +8647,7 @@
           <a:bodyPr wrap="square" lIns="0" tIns="0" rIns="0" bIns="0" rtlCol="0" anchor="ctr"/>
           <a:lstStyle/>
           <a:p>
-            <a:pPr indent="0" marL="0">
+            <a:pPr marL="0" indent="0">
               <a:buNone/>
             </a:pPr>
             <a:r>
@@ -8918,7 +8686,7 @@
           <a:bodyPr wrap="square" lIns="0" tIns="0" rIns="0" bIns="0" rtlCol="0" anchor="ctr"/>
           <a:lstStyle/>
           <a:p>
-            <a:pPr indent="0" marL="0">
+            <a:pPr marL="0" indent="0">
               <a:buNone/>
             </a:pPr>
             <a:r>
@@ -8957,7 +8725,7 @@
           <a:bodyPr wrap="square" lIns="0" tIns="0" rIns="0" bIns="0" rtlCol="0" anchor="ctr"/>
           <a:lstStyle/>
           <a:p>
-            <a:pPr indent="0" marL="0">
+            <a:pPr marL="0" indent="0">
               <a:buNone/>
             </a:pPr>
             <a:r>
@@ -9023,7 +8791,7 @@
           <a:bodyPr wrap="square" lIns="0" tIns="0" rIns="0" bIns="0" rtlCol="0" anchor="ctr"/>
           <a:lstStyle/>
           <a:p>
-            <a:pPr indent="0" marL="0">
+            <a:pPr marL="0" indent="0">
               <a:buNone/>
             </a:pPr>
             <a:r>
@@ -9062,7 +8830,7 @@
           <a:bodyPr wrap="square" lIns="0" tIns="0" rIns="0" bIns="0" rtlCol="0" anchor="ctr"/>
           <a:lstStyle/>
           <a:p>
-            <a:pPr indent="0" marL="0">
+            <a:pPr marL="0" indent="0">
               <a:buNone/>
             </a:pPr>
             <a:r>
@@ -9101,7 +8869,7 @@
           <a:bodyPr wrap="square" lIns="0" tIns="0" rIns="0" bIns="0" rtlCol="0" anchor="ctr"/>
           <a:lstStyle/>
           <a:p>
-            <a:pPr indent="0" marL="0">
+            <a:pPr marL="0" indent="0">
               <a:buNone/>
             </a:pPr>
             <a:r>
@@ -9167,7 +8935,7 @@
           <a:bodyPr wrap="square" lIns="0" tIns="0" rIns="0" bIns="0" rtlCol="0" anchor="ctr"/>
           <a:lstStyle/>
           <a:p>
-            <a:pPr indent="0" marL="0">
+            <a:pPr marL="0" indent="0">
               <a:buNone/>
             </a:pPr>
             <a:r>
@@ -9206,7 +8974,7 @@
           <a:bodyPr wrap="square" lIns="0" tIns="0" rIns="0" bIns="0" rtlCol="0" anchor="ctr"/>
           <a:lstStyle/>
           <a:p>
-            <a:pPr indent="0" marL="0">
+            <a:pPr marL="0" indent="0">
               <a:buNone/>
             </a:pPr>
             <a:r>
@@ -9245,7 +9013,7 @@
           <a:bodyPr wrap="square" lIns="0" tIns="0" rIns="0" bIns="0" rtlCol="0" anchor="ctr"/>
           <a:lstStyle/>
           <a:p>
-            <a:pPr indent="0" marL="0">
+            <a:pPr marL="0" indent="0">
               <a:buNone/>
             </a:pPr>
             <a:r>
@@ -9311,7 +9079,7 @@
           <a:bodyPr wrap="square" lIns="0" tIns="0" rIns="0" bIns="0" rtlCol="0" anchor="ctr"/>
           <a:lstStyle/>
           <a:p>
-            <a:pPr indent="0" marL="0">
+            <a:pPr marL="0" indent="0">
               <a:buNone/>
             </a:pPr>
             <a:r>
@@ -9350,7 +9118,7 @@
           <a:bodyPr wrap="square" lIns="0" tIns="0" rIns="0" bIns="0" rtlCol="0" anchor="ctr"/>
           <a:lstStyle/>
           <a:p>
-            <a:pPr indent="0" marL="0">
+            <a:pPr marL="0" indent="0">
               <a:lnSpc>
                 <a:spcPts val="1800"/>
               </a:lnSpc>
@@ -9419,7 +9187,7 @@
           <a:bodyPr wrap="square" lIns="0" tIns="0" rIns="0" bIns="0" rtlCol="0" anchor="ctr"/>
           <a:lstStyle/>
           <a:p>
-            <a:pPr indent="0" marL="0">
+            <a:pPr marL="0" indent="0">
               <a:buNone/>
             </a:pPr>
             <a:r>
@@ -9458,7 +9226,7 @@
           <a:bodyPr wrap="square" lIns="0" tIns="0" rIns="0" bIns="0" rtlCol="0" anchor="ctr"/>
           <a:lstStyle/>
           <a:p>
-            <a:pPr indent="0" marL="0">
+            <a:pPr marL="0" indent="0">
               <a:lnSpc>
                 <a:spcPts val="1800"/>
               </a:lnSpc>
@@ -9500,7 +9268,7 @@
           <a:bodyPr wrap="square" lIns="0" tIns="0" rIns="0" bIns="0" rtlCol="0" anchor="ctr"/>
           <a:lstStyle/>
           <a:p>
-            <a:pPr indent="0" marL="0">
+            <a:pPr marL="0" indent="0">
               <a:buNone/>
             </a:pPr>
             <a:r>
@@ -9534,6 +9302,7 @@
         <a:solidFill>
           <a:srgbClr val="FFFFFF"/>
         </a:solidFill>
+        <a:effectLst/>
       </p:bgPr>
     </p:bg>
     <p:spTree>
@@ -9571,11 +9340,11 @@
           <a:bodyPr wrap="square" lIns="0" tIns="0" rIns="0" bIns="0" rtlCol="0" anchor="ctr"/>
           <a:lstStyle/>
           <a:p>
-            <a:pPr indent="0" marL="0">
-              <a:buNone/>
-            </a:pPr>
-            <a:r>
-              <a:rPr lang="en-US" sz="1100" b="1" spc="200" kern="0" dirty="0">
+            <a:pPr marL="0" indent="0">
+              <a:buNone/>
+            </a:pPr>
+            <a:r>
+              <a:rPr lang="en-US" sz="1100" b="1" kern="0" spc="200" dirty="0">
                 <a:solidFill>
                   <a:srgbClr val="4A5A86"/>
                 </a:solidFill>
@@ -9610,7 +9379,7 @@
           <a:bodyPr wrap="square" lIns="0" tIns="0" rIns="0" bIns="0" rtlCol="0" anchor="ctr"/>
           <a:lstStyle/>
           <a:p>
-            <a:pPr indent="0" marL="0">
+            <a:pPr marL="0" indent="0">
               <a:lnSpc>
                 <a:spcPts val="3800"/>
               </a:lnSpc>
@@ -9652,7 +9421,7 @@
           <a:bodyPr wrap="square" lIns="0" tIns="0" rIns="0" bIns="0" rtlCol="0" anchor="ctr"/>
           <a:lstStyle/>
           <a:p>
-            <a:pPr algn="r" indent="0" marL="0">
+            <a:pPr marL="0" indent="0" algn="r">
               <a:buNone/>
             </a:pPr>
             <a:r>
@@ -9718,7 +9487,7 @@
           <a:bodyPr wrap="square" lIns="0" tIns="0" rIns="0" bIns="0" rtlCol="0" anchor="ctr"/>
           <a:lstStyle/>
           <a:p>
-            <a:pPr indent="0" marL="0">
+            <a:pPr marL="0" indent="0">
               <a:buNone/>
             </a:pPr>
             <a:r>
@@ -9757,7 +9526,7 @@
           <a:bodyPr wrap="square" lIns="0" tIns="0" rIns="0" bIns="0" rtlCol="0" anchor="ctr"/>
           <a:lstStyle/>
           <a:p>
-            <a:pPr indent="0" marL="0">
+            <a:pPr marL="0" indent="0">
               <a:buNone/>
             </a:pPr>
             <a:r>
@@ -9796,7 +9565,7 @@
           <a:bodyPr wrap="square" lIns="0" tIns="0" rIns="0" bIns="0" rtlCol="0" anchor="ctr"/>
           <a:lstStyle/>
           <a:p>
-            <a:pPr indent="0" marL="0">
+            <a:pPr marL="0" indent="0">
               <a:lnSpc>
                 <a:spcPts val="1800"/>
               </a:lnSpc>
@@ -9838,7 +9607,7 @@
           <a:bodyPr wrap="square" lIns="0" tIns="0" rIns="0" bIns="0" rtlCol="0" anchor="ctr"/>
           <a:lstStyle/>
           <a:p>
-            <a:pPr indent="0" marL="0">
+            <a:pPr marL="0" indent="0">
               <a:buNone/>
             </a:pPr>
             <a:r>
@@ -9877,7 +9646,7 @@
           <a:bodyPr wrap="square" lIns="0" tIns="0" rIns="0" bIns="0" rtlCol="0" anchor="ctr"/>
           <a:lstStyle/>
           <a:p>
-            <a:pPr indent="0" marL="0">
+            <a:pPr marL="0" indent="0">
               <a:lnSpc>
                 <a:spcPts val="1800"/>
               </a:lnSpc>
@@ -9919,7 +9688,7 @@
           <a:bodyPr wrap="square" lIns="0" tIns="0" rIns="0" bIns="0" rtlCol="0" anchor="ctr"/>
           <a:lstStyle/>
           <a:p>
-            <a:pPr indent="0" marL="0">
+            <a:pPr marL="0" indent="0">
               <a:buNone/>
             </a:pPr>
             <a:r>
@@ -9958,7 +9727,7 @@
           <a:bodyPr wrap="square" lIns="0" tIns="0" rIns="0" bIns="0" rtlCol="0" anchor="ctr"/>
           <a:lstStyle/>
           <a:p>
-            <a:pPr indent="0" marL="0">
+            <a:pPr marL="0" indent="0">
               <a:lnSpc>
                 <a:spcPts val="1800"/>
               </a:lnSpc>
@@ -10000,7 +9769,7 @@
           <a:bodyPr wrap="square" lIns="0" tIns="0" rIns="0" bIns="0" rtlCol="0" anchor="ctr"/>
           <a:lstStyle/>
           <a:p>
-            <a:pPr indent="0" marL="0">
+            <a:pPr marL="0" indent="0">
               <a:lnSpc>
                 <a:spcPts val="1600"/>
               </a:lnSpc>
@@ -10042,7 +9811,7 @@
           <a:bodyPr wrap="square" lIns="0" tIns="0" rIns="0" bIns="0" rtlCol="0" anchor="ctr"/>
           <a:lstStyle/>
           <a:p>
-            <a:pPr indent="0" marL="0">
+            <a:pPr marL="0" indent="0">
               <a:buNone/>
             </a:pPr>
             <a:r>
@@ -10108,7 +9877,7 @@
           <a:bodyPr wrap="square" lIns="0" tIns="0" rIns="0" bIns="0" rtlCol="0" anchor="ctr"/>
           <a:lstStyle/>
           <a:p>
-            <a:pPr indent="0" marL="0">
+            <a:pPr marL="0" indent="0">
               <a:buNone/>
             </a:pPr>
             <a:r>
@@ -10147,7 +9916,7 @@
           <a:bodyPr wrap="square" lIns="0" tIns="0" rIns="0" bIns="0" rtlCol="0" anchor="ctr"/>
           <a:lstStyle/>
           <a:p>
-            <a:pPr indent="0" marL="0">
+            <a:pPr marL="0" indent="0">
               <a:lnSpc>
                 <a:spcPts val="2000"/>
               </a:lnSpc>
@@ -10167,7 +9936,7 @@
             <a:endParaRPr lang="en-US" sz="1300" dirty="0"/>
           </a:p>
           <a:p>
-            <a:pPr indent="0" marL="0">
+            <a:pPr marL="0" indent="0">
               <a:lnSpc>
                 <a:spcPts val="2000"/>
               </a:lnSpc>
@@ -10176,7 +9945,7 @@
             <a:endParaRPr lang="en-US" sz="1300" dirty="0"/>
           </a:p>
           <a:p>
-            <a:pPr indent="0" marL="0">
+            <a:pPr marL="0" indent="0">
               <a:lnSpc>
                 <a:spcPts val="2000"/>
               </a:lnSpc>
@@ -10196,7 +9965,7 @@
             <a:endParaRPr lang="en-US" sz="1300" dirty="0"/>
           </a:p>
           <a:p>
-            <a:pPr indent="0" marL="0">
+            <a:pPr marL="0" indent="0">
               <a:lnSpc>
                 <a:spcPts val="2000"/>
               </a:lnSpc>
@@ -10205,7 +9974,7 @@
             <a:endParaRPr lang="en-US" sz="1300" dirty="0"/>
           </a:p>
           <a:p>
-            <a:pPr indent="0" marL="0">
+            <a:pPr marL="0" indent="0">
               <a:lnSpc>
                 <a:spcPts val="2000"/>
               </a:lnSpc>
@@ -10242,6 +10011,7 @@
         <a:solidFill>
           <a:srgbClr val="FFFFFF"/>
         </a:solidFill>
+        <a:effectLst/>
       </p:bgPr>
     </p:bg>
     <p:spTree>
@@ -10279,11 +10049,11 @@
           <a:bodyPr wrap="square" lIns="0" tIns="0" rIns="0" bIns="0" rtlCol="0" anchor="ctr"/>
           <a:lstStyle/>
           <a:p>
-            <a:pPr indent="0" marL="0">
-              <a:buNone/>
-            </a:pPr>
-            <a:r>
-              <a:rPr lang="en-US" sz="1100" b="1" spc="200" kern="0" dirty="0">
+            <a:pPr marL="0" indent="0">
+              <a:buNone/>
+            </a:pPr>
+            <a:r>
+              <a:rPr lang="en-US" sz="1100" b="1" kern="0" spc="200" dirty="0">
                 <a:solidFill>
                   <a:srgbClr val="4A5A86"/>
                 </a:solidFill>
@@ -10318,7 +10088,7 @@
           <a:bodyPr wrap="square" lIns="0" tIns="0" rIns="0" bIns="0" rtlCol="0" anchor="ctr"/>
           <a:lstStyle/>
           <a:p>
-            <a:pPr indent="0" marL="0">
+            <a:pPr marL="0" indent="0">
               <a:lnSpc>
                 <a:spcPts val="3800"/>
               </a:lnSpc>
@@ -10360,7 +10130,7 @@
           <a:bodyPr wrap="square" lIns="0" tIns="0" rIns="0" bIns="0" rtlCol="0" anchor="ctr"/>
           <a:lstStyle/>
           <a:p>
-            <a:pPr algn="r" indent="0" marL="0">
+            <a:pPr marL="0" indent="0" algn="r">
               <a:buNone/>
             </a:pPr>
             <a:r>
@@ -10424,7 +10194,7 @@
           <a:bodyPr wrap="square" lIns="0" tIns="0" rIns="0" bIns="0" rtlCol="0" anchor="ctr"/>
           <a:lstStyle/>
           <a:p>
-            <a:pPr algn="ctr" indent="0" marL="0">
+            <a:pPr marL="0" indent="0" algn="ctr">
               <a:buNone/>
             </a:pPr>
             <a:r>
@@ -10463,7 +10233,7 @@
           <a:bodyPr wrap="square" lIns="0" tIns="0" rIns="0" bIns="0" rtlCol="0" anchor="ctr"/>
           <a:lstStyle/>
           <a:p>
-            <a:pPr indent="0" marL="0">
+            <a:pPr marL="0" indent="0">
               <a:buNone/>
             </a:pPr>
             <a:r>
@@ -10502,7 +10272,7 @@
           <a:bodyPr wrap="square" lIns="0" tIns="0" rIns="0" bIns="0" rtlCol="0" anchor="ctr"/>
           <a:lstStyle/>
           <a:p>
-            <a:pPr indent="0" marL="0">
+            <a:pPr marL="0" indent="0">
               <a:buNone/>
             </a:pPr>
             <a:r>
@@ -10566,7 +10336,7 @@
           <a:bodyPr wrap="square" lIns="0" tIns="0" rIns="0" bIns="0" rtlCol="0" anchor="ctr"/>
           <a:lstStyle/>
           <a:p>
-            <a:pPr algn="ctr" indent="0" marL="0">
+            <a:pPr marL="0" indent="0" algn="ctr">
               <a:buNone/>
             </a:pPr>
             <a:r>
@@ -10605,7 +10375,7 @@
           <a:bodyPr wrap="square" lIns="0" tIns="0" rIns="0" bIns="0" rtlCol="0" anchor="ctr"/>
           <a:lstStyle/>
           <a:p>
-            <a:pPr indent="0" marL="0">
+            <a:pPr marL="0" indent="0">
               <a:buNone/>
             </a:pPr>
             <a:r>
@@ -10644,7 +10414,7 @@
           <a:bodyPr wrap="square" lIns="0" tIns="0" rIns="0" bIns="0" rtlCol="0" anchor="ctr"/>
           <a:lstStyle/>
           <a:p>
-            <a:pPr indent="0" marL="0">
+            <a:pPr marL="0" indent="0">
               <a:buNone/>
             </a:pPr>
             <a:r>
@@ -10708,7 +10478,7 @@
           <a:bodyPr wrap="square" lIns="0" tIns="0" rIns="0" bIns="0" rtlCol="0" anchor="ctr"/>
           <a:lstStyle/>
           <a:p>
-            <a:pPr algn="ctr" indent="0" marL="0">
+            <a:pPr marL="0" indent="0" algn="ctr">
               <a:buNone/>
             </a:pPr>
             <a:r>
@@ -10747,7 +10517,7 @@
           <a:bodyPr wrap="square" lIns="0" tIns="0" rIns="0" bIns="0" rtlCol="0" anchor="ctr"/>
           <a:lstStyle/>
           <a:p>
-            <a:pPr indent="0" marL="0">
+            <a:pPr marL="0" indent="0">
               <a:buNone/>
             </a:pPr>
             <a:r>
@@ -10786,7 +10556,7 @@
           <a:bodyPr wrap="square" lIns="0" tIns="0" rIns="0" bIns="0" rtlCol="0" anchor="ctr"/>
           <a:lstStyle/>
           <a:p>
-            <a:pPr indent="0" marL="0">
+            <a:pPr marL="0" indent="0">
               <a:buNone/>
             </a:pPr>
             <a:r>
@@ -10850,7 +10620,7 @@
           <a:bodyPr wrap="square" lIns="0" tIns="0" rIns="0" bIns="0" rtlCol="0" anchor="ctr"/>
           <a:lstStyle/>
           <a:p>
-            <a:pPr algn="ctr" indent="0" marL="0">
+            <a:pPr marL="0" indent="0" algn="ctr">
               <a:buNone/>
             </a:pPr>
             <a:r>
@@ -10889,7 +10659,7 @@
           <a:bodyPr wrap="square" lIns="0" tIns="0" rIns="0" bIns="0" rtlCol="0" anchor="ctr"/>
           <a:lstStyle/>
           <a:p>
-            <a:pPr indent="0" marL="0">
+            <a:pPr marL="0" indent="0">
               <a:buNone/>
             </a:pPr>
             <a:r>
@@ -10928,7 +10698,7 @@
           <a:bodyPr wrap="square" lIns="0" tIns="0" rIns="0" bIns="0" rtlCol="0" anchor="ctr"/>
           <a:lstStyle/>
           <a:p>
-            <a:pPr indent="0" marL="0">
+            <a:pPr marL="0" indent="0">
               <a:buNone/>
             </a:pPr>
             <a:r>
@@ -10994,7 +10764,7 @@
           <a:bodyPr wrap="square" lIns="0" tIns="0" rIns="0" bIns="0" rtlCol="0" anchor="ctr"/>
           <a:lstStyle/>
           <a:p>
-            <a:pPr indent="0" marL="0">
+            <a:pPr marL="0" indent="0">
               <a:buNone/>
             </a:pPr>
             <a:r>
@@ -11028,6 +10798,7 @@
         <a:solidFill>
           <a:srgbClr val="FFFFFF"/>
         </a:solidFill>
+        <a:effectLst/>
       </p:bgPr>
     </p:bg>
     <p:spTree>
@@ -11065,11 +10836,11 @@
           <a:bodyPr wrap="square" lIns="0" tIns="0" rIns="0" bIns="0" rtlCol="0" anchor="ctr"/>
           <a:lstStyle/>
           <a:p>
-            <a:pPr indent="0" marL="0">
-              <a:buNone/>
-            </a:pPr>
-            <a:r>
-              <a:rPr lang="en-US" sz="1100" b="1" spc="200" kern="0" dirty="0">
+            <a:pPr marL="0" indent="0">
+              <a:buNone/>
+            </a:pPr>
+            <a:r>
+              <a:rPr lang="en-US" sz="1100" b="1" kern="0" spc="200" dirty="0">
                 <a:solidFill>
                   <a:srgbClr val="4A5A86"/>
                 </a:solidFill>
@@ -11104,7 +10875,7 @@
           <a:bodyPr wrap="square" lIns="0" tIns="0" rIns="0" bIns="0" rtlCol="0" anchor="ctr"/>
           <a:lstStyle/>
           <a:p>
-            <a:pPr indent="0" marL="0">
+            <a:pPr marL="0" indent="0">
               <a:lnSpc>
                 <a:spcPts val="3800"/>
               </a:lnSpc>
@@ -11146,7 +10917,7 @@
           <a:bodyPr wrap="square" lIns="0" tIns="0" rIns="0" bIns="0" rtlCol="0" anchor="ctr"/>
           <a:lstStyle/>
           <a:p>
-            <a:pPr algn="r" indent="0" marL="0">
+            <a:pPr marL="0" indent="0" algn="r">
               <a:buNone/>
             </a:pPr>
             <a:r>
@@ -11185,7 +10956,7 @@
           <a:bodyPr wrap="square" lIns="0" tIns="0" rIns="0" bIns="0" rtlCol="0" anchor="ctr"/>
           <a:lstStyle/>
           <a:p>
-            <a:pPr indent="0" marL="0">
+            <a:pPr marL="0" indent="0">
               <a:buNone/>
             </a:pPr>
             <a:r>
@@ -11226,12 +10997,48 @@
             <a:tbl>
               <a:tblPr/>
               <a:tblGrid>
-                <a:gridCol w="2651760"/>
-                <a:gridCol w="1645920"/>
-                <a:gridCol w="1280160"/>
-                <a:gridCol w="1737360"/>
-                <a:gridCol w="1645920"/>
-                <a:gridCol w="1920240"/>
+                <a:gridCol w="2651760">
+                  <a:extLst>
+                    <a:ext uri="{9D8B030D-6E8A-4147-A177-3AD203B41FA5}">
+                      <a16:colId xmlns:a16="http://schemas.microsoft.com/office/drawing/2014/main" val="20000"/>
+                    </a:ext>
+                  </a:extLst>
+                </a:gridCol>
+                <a:gridCol w="1645920">
+                  <a:extLst>
+                    <a:ext uri="{9D8B030D-6E8A-4147-A177-3AD203B41FA5}">
+                      <a16:colId xmlns:a16="http://schemas.microsoft.com/office/drawing/2014/main" val="20001"/>
+                    </a:ext>
+                  </a:extLst>
+                </a:gridCol>
+                <a:gridCol w="1280160">
+                  <a:extLst>
+                    <a:ext uri="{9D8B030D-6E8A-4147-A177-3AD203B41FA5}">
+                      <a16:colId xmlns:a16="http://schemas.microsoft.com/office/drawing/2014/main" val="20002"/>
+                    </a:ext>
+                  </a:extLst>
+                </a:gridCol>
+                <a:gridCol w="1737360">
+                  <a:extLst>
+                    <a:ext uri="{9D8B030D-6E8A-4147-A177-3AD203B41FA5}">
+                      <a16:colId xmlns:a16="http://schemas.microsoft.com/office/drawing/2014/main" val="20003"/>
+                    </a:ext>
+                  </a:extLst>
+                </a:gridCol>
+                <a:gridCol w="1645920">
+                  <a:extLst>
+                    <a:ext uri="{9D8B030D-6E8A-4147-A177-3AD203B41FA5}">
+                      <a16:colId xmlns:a16="http://schemas.microsoft.com/office/drawing/2014/main" val="20004"/>
+                    </a:ext>
+                  </a:extLst>
+                </a:gridCol>
+                <a:gridCol w="1920240">
+                  <a:extLst>
+                    <a:ext uri="{9D8B030D-6E8A-4147-A177-3AD203B41FA5}">
+                      <a16:colId xmlns:a16="http://schemas.microsoft.com/office/drawing/2014/main" val="20005"/>
+                    </a:ext>
+                  </a:extLst>
+                </a:gridCol>
               </a:tblGrid>
               <a:tr h="475488">
                 <a:tc>
@@ -11239,7 +11046,7 @@
                     <a:bodyPr/>
                     <a:lstStyle/>
                     <a:p>
-                      <a:pPr algn="ctr" indent="0" marL="0">
+                      <a:pPr marL="0" indent="0" algn="ctr">
                         <a:buNone/>
                       </a:pPr>
                       <a:r>
@@ -11260,7 +11067,7 @@
                       </a:endParaRPr>
                     </a:p>
                   </a:txBody>
-                  <a:tcPr marL="91440" marR="91440" marT="45720" marB="45720" anchor="ctr">
+                  <a:tcPr anchor="ctr">
                     <a:lnL w="9525" cap="flat" cmpd="sng" algn="ctr">
                       <a:solidFill>
                         <a:srgbClr val="E7DCC9"/>
@@ -11307,7 +11114,7 @@
                     <a:bodyPr/>
                     <a:lstStyle/>
                     <a:p>
-                      <a:pPr algn="ctr" indent="0" marL="0">
+                      <a:pPr marL="0" indent="0" algn="ctr">
                         <a:buNone/>
                       </a:pPr>
                       <a:r>
@@ -11328,7 +11135,7 @@
                       </a:endParaRPr>
                     </a:p>
                     <a:p>
-                      <a:pPr algn="ctr" indent="0" marL="0">
+                      <a:pPr marL="0" indent="0" algn="ctr">
                         <a:buNone/>
                       </a:pPr>
                       <a:r>
@@ -11349,7 +11156,7 @@
                       </a:endParaRPr>
                     </a:p>
                   </a:txBody>
-                  <a:tcPr marL="91440" marR="91440" marT="45720" marB="45720" anchor="ctr">
+                  <a:tcPr anchor="ctr">
                     <a:lnL w="9525" cap="flat" cmpd="sng" algn="ctr">
                       <a:solidFill>
                         <a:srgbClr val="E7DCC9"/>
@@ -11396,7 +11203,7 @@
                     <a:bodyPr/>
                     <a:lstStyle/>
                     <a:p>
-                      <a:pPr algn="ctr" indent="0" marL="0">
+                      <a:pPr marL="0" indent="0" algn="ctr">
                         <a:buNone/>
                       </a:pPr>
                       <a:r>
@@ -11417,7 +11224,7 @@
                       </a:endParaRPr>
                     </a:p>
                     <a:p>
-                      <a:pPr algn="ctr" indent="0" marL="0">
+                      <a:pPr marL="0" indent="0" algn="ctr">
                         <a:buNone/>
                       </a:pPr>
                       <a:r>
@@ -11438,7 +11245,7 @@
                       </a:endParaRPr>
                     </a:p>
                   </a:txBody>
-                  <a:tcPr marL="91440" marR="91440" marT="45720" marB="45720" anchor="ctr">
+                  <a:tcPr anchor="ctr">
                     <a:lnL w="9525" cap="flat" cmpd="sng" algn="ctr">
                       <a:solidFill>
                         <a:srgbClr val="E7DCC9"/>
@@ -11485,7 +11292,7 @@
                     <a:bodyPr/>
                     <a:lstStyle/>
                     <a:p>
-                      <a:pPr algn="ctr" indent="0" marL="0">
+                      <a:pPr marL="0" indent="0" algn="ctr">
                         <a:buNone/>
                       </a:pPr>
                       <a:r>
@@ -11506,7 +11313,7 @@
                       </a:endParaRPr>
                     </a:p>
                     <a:p>
-                      <a:pPr algn="ctr" indent="0" marL="0">
+                      <a:pPr marL="0" indent="0" algn="ctr">
                         <a:buNone/>
                       </a:pPr>
                       <a:r>
@@ -11527,7 +11334,7 @@
                       </a:endParaRPr>
                     </a:p>
                   </a:txBody>
-                  <a:tcPr marL="91440" marR="91440" marT="45720" marB="45720" anchor="ctr">
+                  <a:tcPr anchor="ctr">
                     <a:lnL w="9525" cap="flat" cmpd="sng" algn="ctr">
                       <a:solidFill>
                         <a:srgbClr val="E7DCC9"/>
@@ -11574,7 +11381,7 @@
                     <a:bodyPr/>
                     <a:lstStyle/>
                     <a:p>
-                      <a:pPr algn="ctr" indent="0" marL="0">
+                      <a:pPr marL="0" indent="0" algn="ctr">
                         <a:buNone/>
                       </a:pPr>
                       <a:r>
@@ -11595,7 +11402,7 @@
                       </a:endParaRPr>
                     </a:p>
                     <a:p>
-                      <a:pPr algn="ctr" indent="0" marL="0">
+                      <a:pPr marL="0" indent="0" algn="ctr">
                         <a:buNone/>
                       </a:pPr>
                       <a:r>
@@ -11616,7 +11423,7 @@
                       </a:endParaRPr>
                     </a:p>
                   </a:txBody>
-                  <a:tcPr marL="91440" marR="91440" marT="45720" marB="45720" anchor="ctr">
+                  <a:tcPr anchor="ctr">
                     <a:lnL w="9525" cap="flat" cmpd="sng" algn="ctr">
                       <a:solidFill>
                         <a:srgbClr val="E7DCC9"/>
@@ -11663,7 +11470,7 @@
                     <a:bodyPr/>
                     <a:lstStyle/>
                     <a:p>
-                      <a:pPr algn="ctr" indent="0" marL="0">
+                      <a:pPr marL="0" indent="0" algn="ctr">
                         <a:buNone/>
                       </a:pPr>
                       <a:r>
@@ -11684,7 +11491,7 @@
                       </a:endParaRPr>
                     </a:p>
                     <a:p>
-                      <a:pPr algn="ctr" indent="0" marL="0">
+                      <a:pPr marL="0" indent="0" algn="ctr">
                         <a:buNone/>
                       </a:pPr>
                       <a:r>
@@ -11705,7 +11512,7 @@
                       </a:endParaRPr>
                     </a:p>
                   </a:txBody>
-                  <a:tcPr marL="91440" marR="91440" marT="45720" marB="45720" anchor="ctr">
+                  <a:tcPr anchor="ctr">
                     <a:lnL w="9525" cap="flat" cmpd="sng" algn="ctr">
                       <a:solidFill>
                         <a:srgbClr val="E7DCC9"/>
@@ -11747,6 +11554,11 @@
                     </a:solidFill>
                   </a:tcPr>
                 </a:tc>
+                <a:extLst>
+                  <a:ext uri="{0D108BD9-81ED-4DB2-BD59-A6C34878D82A}">
+                    <a16:rowId xmlns:a16="http://schemas.microsoft.com/office/drawing/2014/main" val="10000"/>
+                  </a:ext>
+                </a:extLst>
               </a:tr>
               <a:tr h="384048">
                 <a:tc>
@@ -11754,7 +11566,7 @@
                     <a:bodyPr/>
                     <a:lstStyle/>
                     <a:p>
-                      <a:pPr algn="l" indent="0" marL="0">
+                      <a:pPr marL="0" indent="0" algn="l">
                         <a:buNone/>
                       </a:pPr>
                       <a:r>
@@ -11775,7 +11587,7 @@
                       </a:endParaRPr>
                     </a:p>
                   </a:txBody>
-                  <a:tcPr marL="91440" marR="91440" marT="45720" marB="45720" anchor="ctr">
+                  <a:tcPr anchor="ctr">
                     <a:lnL w="9525" cap="flat" cmpd="sng" algn="ctr">
                       <a:solidFill>
                         <a:srgbClr val="E7DCC9"/>
@@ -11822,7 +11634,7 @@
                     <a:bodyPr/>
                     <a:lstStyle/>
                     <a:p>
-                      <a:pPr algn="ctr" indent="0" marL="0">
+                      <a:pPr marL="0" indent="0" algn="ctr">
                         <a:buNone/>
                       </a:pPr>
                       <a:r>
@@ -11843,7 +11655,7 @@
                       </a:endParaRPr>
                     </a:p>
                   </a:txBody>
-                  <a:tcPr marL="91440" marR="91440" marT="45720" marB="45720" anchor="ctr">
+                  <a:tcPr anchor="ctr">
                     <a:lnL w="9525" cap="flat" cmpd="sng" algn="ctr">
                       <a:solidFill>
                         <a:srgbClr val="E7DCC9"/>
@@ -11890,7 +11702,7 @@
                     <a:bodyPr/>
                     <a:lstStyle/>
                     <a:p>
-                      <a:pPr algn="ctr" indent="0" marL="0">
+                      <a:pPr marL="0" indent="0" algn="ctr">
                         <a:buNone/>
                       </a:pPr>
                       <a:r>
@@ -11911,7 +11723,7 @@
                       </a:endParaRPr>
                     </a:p>
                   </a:txBody>
-                  <a:tcPr marL="91440" marR="91440" marT="45720" marB="45720" anchor="ctr">
+                  <a:tcPr anchor="ctr">
                     <a:lnL w="9525" cap="flat" cmpd="sng" algn="ctr">
                       <a:solidFill>
                         <a:srgbClr val="E7DCC9"/>
@@ -11958,7 +11770,7 @@
                     <a:bodyPr/>
                     <a:lstStyle/>
                     <a:p>
-                      <a:pPr algn="ctr" indent="0" marL="0">
+                      <a:pPr marL="0" indent="0" algn="ctr">
                         <a:buNone/>
                       </a:pPr>
                       <a:r>
@@ -11979,7 +11791,7 @@
                       </a:endParaRPr>
                     </a:p>
                   </a:txBody>
-                  <a:tcPr marL="91440" marR="91440" marT="45720" marB="45720" anchor="ctr">
+                  <a:tcPr anchor="ctr">
                     <a:lnL w="9525" cap="flat" cmpd="sng" algn="ctr">
                       <a:solidFill>
                         <a:srgbClr val="E7DCC9"/>
@@ -12026,7 +11838,7 @@
                     <a:bodyPr/>
                     <a:lstStyle/>
                     <a:p>
-                      <a:pPr algn="ctr" indent="0" marL="0">
+                      <a:pPr marL="0" indent="0" algn="ctr">
                         <a:buNone/>
                       </a:pPr>
                       <a:r>
@@ -12047,7 +11859,7 @@
                       </a:endParaRPr>
                     </a:p>
                   </a:txBody>
-                  <a:tcPr marL="91440" marR="91440" marT="45720" marB="45720" anchor="ctr">
+                  <a:tcPr anchor="ctr">
                     <a:lnL w="9525" cap="flat" cmpd="sng" algn="ctr">
                       <a:solidFill>
                         <a:srgbClr val="E7DCC9"/>
@@ -12094,7 +11906,7 @@
                     <a:bodyPr/>
                     <a:lstStyle/>
                     <a:p>
-                      <a:pPr algn="ctr" indent="0" marL="0">
+                      <a:pPr marL="0" indent="0" algn="ctr">
                         <a:buNone/>
                       </a:pPr>
                       <a:r>
@@ -12115,7 +11927,7 @@
                       </a:endParaRPr>
                     </a:p>
                   </a:txBody>
-                  <a:tcPr marL="91440" marR="91440" marT="45720" marB="45720" anchor="ctr">
+                  <a:tcPr anchor="ctr">
                     <a:lnL w="9525" cap="flat" cmpd="sng" algn="ctr">
                       <a:solidFill>
                         <a:srgbClr val="E7DCC9"/>
@@ -12157,6 +11969,11 @@
                     </a:solidFill>
                   </a:tcPr>
                 </a:tc>
+                <a:extLst>
+                  <a:ext uri="{0D108BD9-81ED-4DB2-BD59-A6C34878D82A}">
+                    <a16:rowId xmlns:a16="http://schemas.microsoft.com/office/drawing/2014/main" val="10001"/>
+                  </a:ext>
+                </a:extLst>
               </a:tr>
               <a:tr h="384048">
                 <a:tc>
@@ -12164,7 +11981,7 @@
                     <a:bodyPr/>
                     <a:lstStyle/>
                     <a:p>
-                      <a:pPr algn="l" indent="0" marL="0">
+                      <a:pPr marL="0" indent="0" algn="l">
                         <a:buNone/>
                       </a:pPr>
                       <a:r>
@@ -12185,7 +12002,7 @@
                       </a:endParaRPr>
                     </a:p>
                   </a:txBody>
-                  <a:tcPr marL="91440" marR="91440" marT="45720" marB="45720" anchor="ctr">
+                  <a:tcPr anchor="ctr">
                     <a:lnL w="9525" cap="flat" cmpd="sng" algn="ctr">
                       <a:solidFill>
                         <a:srgbClr val="E7DCC9"/>
@@ -12232,7 +12049,7 @@
                     <a:bodyPr/>
                     <a:lstStyle/>
                     <a:p>
-                      <a:pPr algn="ctr" indent="0" marL="0">
+                      <a:pPr marL="0" indent="0" algn="ctr">
                         <a:buNone/>
                       </a:pPr>
                       <a:r>
@@ -12253,7 +12070,7 @@
                       </a:endParaRPr>
                     </a:p>
                   </a:txBody>
-                  <a:tcPr marL="91440" marR="91440" marT="45720" marB="45720" anchor="ctr">
+                  <a:tcPr anchor="ctr">
                     <a:lnL w="9525" cap="flat" cmpd="sng" algn="ctr">
                       <a:solidFill>
                         <a:srgbClr val="E7DCC9"/>
@@ -12300,7 +12117,7 @@
                     <a:bodyPr/>
                     <a:lstStyle/>
                     <a:p>
-                      <a:pPr algn="ctr" indent="0" marL="0">
+                      <a:pPr marL="0" indent="0" algn="ctr">
                         <a:buNone/>
                       </a:pPr>
                       <a:r>
@@ -12321,7 +12138,7 @@
                       </a:endParaRPr>
                     </a:p>
                   </a:txBody>
-                  <a:tcPr marL="91440" marR="91440" marT="45720" marB="45720" anchor="ctr">
+                  <a:tcPr anchor="ctr">
                     <a:lnL w="9525" cap="flat" cmpd="sng" algn="ctr">
                       <a:solidFill>
                         <a:srgbClr val="E7DCC9"/>
@@ -12368,7 +12185,7 @@
                     <a:bodyPr/>
                     <a:lstStyle/>
                     <a:p>
-                      <a:pPr algn="ctr" indent="0" marL="0">
+                      <a:pPr marL="0" indent="0" algn="ctr">
                         <a:buNone/>
                       </a:pPr>
                       <a:r>
@@ -12389,7 +12206,7 @@
                       </a:endParaRPr>
                     </a:p>
                   </a:txBody>
-                  <a:tcPr marL="91440" marR="91440" marT="45720" marB="45720" anchor="ctr">
+                  <a:tcPr anchor="ctr">
                     <a:lnL w="9525" cap="flat" cmpd="sng" algn="ctr">
                       <a:solidFill>
                         <a:srgbClr val="E7DCC9"/>
@@ -12436,7 +12253,7 @@
                     <a:bodyPr/>
                     <a:lstStyle/>
                     <a:p>
-                      <a:pPr algn="ctr" indent="0" marL="0">
+                      <a:pPr marL="0" indent="0" algn="ctr">
                         <a:buNone/>
                       </a:pPr>
                       <a:r>
@@ -12457,7 +12274,7 @@
                       </a:endParaRPr>
                     </a:p>
                   </a:txBody>
-                  <a:tcPr marL="91440" marR="91440" marT="45720" marB="45720" anchor="ctr">
+                  <a:tcPr anchor="ctr">
                     <a:lnL w="9525" cap="flat" cmpd="sng" algn="ctr">
                       <a:solidFill>
                         <a:srgbClr val="E7DCC9"/>
@@ -12504,7 +12321,7 @@
                     <a:bodyPr/>
                     <a:lstStyle/>
                     <a:p>
-                      <a:pPr algn="ctr" indent="0" marL="0">
+                      <a:pPr marL="0" indent="0" algn="ctr">
                         <a:buNone/>
                       </a:pPr>
                       <a:r>
@@ -12525,7 +12342,7 @@
                       </a:endParaRPr>
                     </a:p>
                   </a:txBody>
-                  <a:tcPr marL="91440" marR="91440" marT="45720" marB="45720" anchor="ctr">
+                  <a:tcPr anchor="ctr">
                     <a:lnL w="9525" cap="flat" cmpd="sng" algn="ctr">
                       <a:solidFill>
                         <a:srgbClr val="E7DCC9"/>
@@ -12567,6 +12384,11 @@
                     </a:solidFill>
                   </a:tcPr>
                 </a:tc>
+                <a:extLst>
+                  <a:ext uri="{0D108BD9-81ED-4DB2-BD59-A6C34878D82A}">
+                    <a16:rowId xmlns:a16="http://schemas.microsoft.com/office/drawing/2014/main" val="10002"/>
+                  </a:ext>
+                </a:extLst>
               </a:tr>
               <a:tr h="384048">
                 <a:tc>
@@ -12574,7 +12396,7 @@
                     <a:bodyPr/>
                     <a:lstStyle/>
                     <a:p>
-                      <a:pPr algn="l" indent="0" marL="0">
+                      <a:pPr marL="0" indent="0" algn="l">
                         <a:buNone/>
                       </a:pPr>
                       <a:r>
@@ -12595,7 +12417,7 @@
                       </a:endParaRPr>
                     </a:p>
                   </a:txBody>
-                  <a:tcPr marL="91440" marR="91440" marT="45720" marB="45720" anchor="ctr">
+                  <a:tcPr anchor="ctr">
                     <a:lnL w="9525" cap="flat" cmpd="sng" algn="ctr">
                       <a:solidFill>
                         <a:srgbClr val="E7DCC9"/>
@@ -12642,7 +12464,7 @@
                     <a:bodyPr/>
                     <a:lstStyle/>
                     <a:p>
-                      <a:pPr algn="ctr" indent="0" marL="0">
+                      <a:pPr marL="0" indent="0" algn="ctr">
                         <a:buNone/>
                       </a:pPr>
                       <a:r>
@@ -12663,7 +12485,7 @@
                       </a:endParaRPr>
                     </a:p>
                   </a:txBody>
-                  <a:tcPr marL="91440" marR="91440" marT="45720" marB="45720" anchor="ctr">
+                  <a:tcPr anchor="ctr">
                     <a:lnL w="9525" cap="flat" cmpd="sng" algn="ctr">
                       <a:solidFill>
                         <a:srgbClr val="E7DCC9"/>
@@ -12710,7 +12532,7 @@
                     <a:bodyPr/>
                     <a:lstStyle/>
                     <a:p>
-                      <a:pPr algn="ctr" indent="0" marL="0">
+                      <a:pPr marL="0" indent="0" algn="ctr">
                         <a:buNone/>
                       </a:pPr>
                       <a:r>
@@ -12731,7 +12553,7 @@
                       </a:endParaRPr>
                     </a:p>
                   </a:txBody>
-                  <a:tcPr marL="91440" marR="91440" marT="45720" marB="45720" anchor="ctr">
+                  <a:tcPr anchor="ctr">
                     <a:lnL w="9525" cap="flat" cmpd="sng" algn="ctr">
                       <a:solidFill>
                         <a:srgbClr val="E7DCC9"/>
@@ -12778,7 +12600,7 @@
                     <a:bodyPr/>
                     <a:lstStyle/>
                     <a:p>
-                      <a:pPr algn="ctr" indent="0" marL="0">
+                      <a:pPr marL="0" indent="0" algn="ctr">
                         <a:buNone/>
                       </a:pPr>
                       <a:r>
@@ -12799,7 +12621,7 @@
                       </a:endParaRPr>
                     </a:p>
                   </a:txBody>
-                  <a:tcPr marL="91440" marR="91440" marT="45720" marB="45720" anchor="ctr">
+                  <a:tcPr anchor="ctr">
                     <a:lnL w="9525" cap="flat" cmpd="sng" algn="ctr">
                       <a:solidFill>
                         <a:srgbClr val="E7DCC9"/>
@@ -12846,7 +12668,7 @@
                     <a:bodyPr/>
                     <a:lstStyle/>
                     <a:p>
-                      <a:pPr algn="ctr" indent="0" marL="0">
+                      <a:pPr marL="0" indent="0" algn="ctr">
                         <a:buNone/>
                       </a:pPr>
                       <a:r>
@@ -12867,7 +12689,7 @@
                       </a:endParaRPr>
                     </a:p>
                   </a:txBody>
-                  <a:tcPr marL="91440" marR="91440" marT="45720" marB="45720" anchor="ctr">
+                  <a:tcPr anchor="ctr">
                     <a:lnL w="9525" cap="flat" cmpd="sng" algn="ctr">
                       <a:solidFill>
                         <a:srgbClr val="E7DCC9"/>
@@ -12914,7 +12736,7 @@
                     <a:bodyPr/>
                     <a:lstStyle/>
                     <a:p>
-                      <a:pPr algn="ctr" indent="0" marL="0">
+                      <a:pPr marL="0" indent="0" algn="ctr">
                         <a:buNone/>
                       </a:pPr>
                       <a:r>
@@ -12935,7 +12757,7 @@
                       </a:endParaRPr>
                     </a:p>
                   </a:txBody>
-                  <a:tcPr marL="91440" marR="91440" marT="45720" marB="45720" anchor="ctr">
+                  <a:tcPr anchor="ctr">
                     <a:lnL w="9525" cap="flat" cmpd="sng" algn="ctr">
                       <a:solidFill>
                         <a:srgbClr val="E7DCC9"/>
@@ -12977,6 +12799,11 @@
                     </a:solidFill>
                   </a:tcPr>
                 </a:tc>
+                <a:extLst>
+                  <a:ext uri="{0D108BD9-81ED-4DB2-BD59-A6C34878D82A}">
+                    <a16:rowId xmlns:a16="http://schemas.microsoft.com/office/drawing/2014/main" val="10003"/>
+                  </a:ext>
+                </a:extLst>
               </a:tr>
               <a:tr h="384048">
                 <a:tc>
@@ -12984,7 +12811,7 @@
                     <a:bodyPr/>
                     <a:lstStyle/>
                     <a:p>
-                      <a:pPr algn="l" indent="0" marL="0">
+                      <a:pPr marL="0" indent="0" algn="l">
                         <a:buNone/>
                       </a:pPr>
                       <a:r>
@@ -13005,7 +12832,7 @@
                       </a:endParaRPr>
                     </a:p>
                   </a:txBody>
-                  <a:tcPr marL="91440" marR="91440" marT="45720" marB="45720" anchor="ctr">
+                  <a:tcPr anchor="ctr">
                     <a:lnL w="9525" cap="flat" cmpd="sng" algn="ctr">
                       <a:solidFill>
                         <a:srgbClr val="E7DCC9"/>
@@ -13052,7 +12879,7 @@
                     <a:bodyPr/>
                     <a:lstStyle/>
                     <a:p>
-                      <a:pPr algn="ctr" indent="0" marL="0">
+                      <a:pPr marL="0" indent="0" algn="ctr">
                         <a:buNone/>
                       </a:pPr>
                       <a:r>
@@ -13073,7 +12900,7 @@
                       </a:endParaRPr>
                     </a:p>
                   </a:txBody>
-                  <a:tcPr marL="91440" marR="91440" marT="45720" marB="45720" anchor="ctr">
+                  <a:tcPr anchor="ctr">
                     <a:lnL w="9525" cap="flat" cmpd="sng" algn="ctr">
                       <a:solidFill>
                         <a:srgbClr val="E7DCC9"/>
@@ -13120,7 +12947,7 @@
                     <a:bodyPr/>
                     <a:lstStyle/>
                     <a:p>
-                      <a:pPr algn="ctr" indent="0" marL="0">
+                      <a:pPr marL="0" indent="0" algn="ctr">
                         <a:buNone/>
                       </a:pPr>
                       <a:r>
@@ -13141,7 +12968,7 @@
                       </a:endParaRPr>
                     </a:p>
                   </a:txBody>
-                  <a:tcPr marL="91440" marR="91440" marT="45720" marB="45720" anchor="ctr">
+                  <a:tcPr anchor="ctr">
                     <a:lnL w="9525" cap="flat" cmpd="sng" algn="ctr">
                       <a:solidFill>
                         <a:srgbClr val="E7DCC9"/>
@@ -13188,7 +13015,7 @@
                     <a:bodyPr/>
                     <a:lstStyle/>
                     <a:p>
-                      <a:pPr algn="ctr" indent="0" marL="0">
+                      <a:pPr marL="0" indent="0" algn="ctr">
                         <a:buNone/>
                       </a:pPr>
                       <a:r>
@@ -13209,7 +13036,7 @@
                       </a:endParaRPr>
                     </a:p>
                   </a:txBody>
-                  <a:tcPr marL="91440" marR="91440" marT="45720" marB="45720" anchor="ctr">
+                  <a:tcPr anchor="ctr">
                     <a:lnL w="9525" cap="flat" cmpd="sng" algn="ctr">
                       <a:solidFill>
                         <a:srgbClr val="E7DCC9"/>
@@ -13256,7 +13083,7 @@
                     <a:bodyPr/>
                     <a:lstStyle/>
                     <a:p>
-                      <a:pPr algn="ctr" indent="0" marL="0">
+                      <a:pPr marL="0" indent="0" algn="ctr">
                         <a:buNone/>
                       </a:pPr>
                       <a:r>
@@ -13277,7 +13104,7 @@
                       </a:endParaRPr>
                     </a:p>
                   </a:txBody>
-                  <a:tcPr marL="91440" marR="91440" marT="45720" marB="45720" anchor="ctr">
+                  <a:tcPr anchor="ctr">
                     <a:lnL w="9525" cap="flat" cmpd="sng" algn="ctr">
                       <a:solidFill>
                         <a:srgbClr val="E7DCC9"/>
@@ -13324,7 +13151,7 @@
                     <a:bodyPr/>
                     <a:lstStyle/>
                     <a:p>
-                      <a:pPr algn="ctr" indent="0" marL="0">
+                      <a:pPr marL="0" indent="0" algn="ctr">
                         <a:buNone/>
                       </a:pPr>
                       <a:r>
@@ -13345,7 +13172,7 @@
                       </a:endParaRPr>
                     </a:p>
                   </a:txBody>
-                  <a:tcPr marL="91440" marR="91440" marT="45720" marB="45720" anchor="ctr">
+                  <a:tcPr anchor="ctr">
                     <a:lnL w="9525" cap="flat" cmpd="sng" algn="ctr">
                       <a:solidFill>
                         <a:srgbClr val="E7DCC9"/>
@@ -13387,6 +13214,11 @@
                     </a:solidFill>
                   </a:tcPr>
                 </a:tc>
+                <a:extLst>
+                  <a:ext uri="{0D108BD9-81ED-4DB2-BD59-A6C34878D82A}">
+                    <a16:rowId xmlns:a16="http://schemas.microsoft.com/office/drawing/2014/main" val="10004"/>
+                  </a:ext>
+                </a:extLst>
               </a:tr>
               <a:tr h="384048">
                 <a:tc>
@@ -13394,7 +13226,7 @@
                     <a:bodyPr/>
                     <a:lstStyle/>
                     <a:p>
-                      <a:pPr algn="l" indent="0" marL="0">
+                      <a:pPr marL="0" indent="0" algn="l">
                         <a:buNone/>
                       </a:pPr>
                       <a:r>
@@ -13415,7 +13247,7 @@
                       </a:endParaRPr>
                     </a:p>
                   </a:txBody>
-                  <a:tcPr marL="91440" marR="91440" marT="45720" marB="45720" anchor="ctr">
+                  <a:tcPr anchor="ctr">
                     <a:lnL w="9525" cap="flat" cmpd="sng" algn="ctr">
                       <a:solidFill>
                         <a:srgbClr val="E7DCC9"/>
@@ -13462,7 +13294,7 @@
                     <a:bodyPr/>
                     <a:lstStyle/>
                     <a:p>
-                      <a:pPr algn="ctr" indent="0" marL="0">
+                      <a:pPr marL="0" indent="0" algn="ctr">
                         <a:buNone/>
                       </a:pPr>
                       <a:r>
@@ -13483,7 +13315,7 @@
                       </a:endParaRPr>
                     </a:p>
                   </a:txBody>
-                  <a:tcPr marL="91440" marR="91440" marT="45720" marB="45720" anchor="ctr">
+                  <a:tcPr anchor="ctr">
                     <a:lnL w="9525" cap="flat" cmpd="sng" algn="ctr">
                       <a:solidFill>
                         <a:srgbClr val="E7DCC9"/>
@@ -13530,7 +13362,7 @@
                     <a:bodyPr/>
                     <a:lstStyle/>
                     <a:p>
-                      <a:pPr algn="ctr" indent="0" marL="0">
+                      <a:pPr marL="0" indent="0" algn="ctr">
                         <a:buNone/>
                       </a:pPr>
                       <a:r>
@@ -13551,7 +13383,7 @@
                       </a:endParaRPr>
                     </a:p>
                   </a:txBody>
-                  <a:tcPr marL="91440" marR="91440" marT="45720" marB="45720" anchor="ctr">
+                  <a:tcPr anchor="ctr">
                     <a:lnL w="9525" cap="flat" cmpd="sng" algn="ctr">
                       <a:solidFill>
                         <a:srgbClr val="E7DCC9"/>
@@ -13598,7 +13430,7 @@
                     <a:bodyPr/>
                     <a:lstStyle/>
                     <a:p>
-                      <a:pPr algn="ctr" indent="0" marL="0">
+                      <a:pPr marL="0" indent="0" algn="ctr">
                         <a:buNone/>
                       </a:pPr>
                       <a:r>
@@ -13619,7 +13451,7 @@
                       </a:endParaRPr>
                     </a:p>
                   </a:txBody>
-                  <a:tcPr marL="91440" marR="91440" marT="45720" marB="45720" anchor="ctr">
+                  <a:tcPr anchor="ctr">
                     <a:lnL w="9525" cap="flat" cmpd="sng" algn="ctr">
                       <a:solidFill>
                         <a:srgbClr val="E7DCC9"/>
@@ -13666,7 +13498,7 @@
                     <a:bodyPr/>
                     <a:lstStyle/>
                     <a:p>
-                      <a:pPr algn="ctr" indent="0" marL="0">
+                      <a:pPr marL="0" indent="0" algn="ctr">
                         <a:buNone/>
                       </a:pPr>
                       <a:r>
@@ -13687,7 +13519,7 @@
                       </a:endParaRPr>
                     </a:p>
                   </a:txBody>
-                  <a:tcPr marL="91440" marR="91440" marT="45720" marB="45720" anchor="ctr">
+                  <a:tcPr anchor="ctr">
                     <a:lnL w="9525" cap="flat" cmpd="sng" algn="ctr">
                       <a:solidFill>
                         <a:srgbClr val="E7DCC9"/>
@@ -13734,7 +13566,7 @@
                     <a:bodyPr/>
                     <a:lstStyle/>
                     <a:p>
-                      <a:pPr algn="ctr" indent="0" marL="0">
+                      <a:pPr marL="0" indent="0" algn="ctr">
                         <a:buNone/>
                       </a:pPr>
                       <a:r>
@@ -13755,7 +13587,7 @@
                       </a:endParaRPr>
                     </a:p>
                   </a:txBody>
-                  <a:tcPr marL="91440" marR="91440" marT="45720" marB="45720" anchor="ctr">
+                  <a:tcPr anchor="ctr">
                     <a:lnL w="9525" cap="flat" cmpd="sng" algn="ctr">
                       <a:solidFill>
                         <a:srgbClr val="E7DCC9"/>
@@ -13797,6 +13629,11 @@
                     </a:solidFill>
                   </a:tcPr>
                 </a:tc>
+                <a:extLst>
+                  <a:ext uri="{0D108BD9-81ED-4DB2-BD59-A6C34878D82A}">
+                    <a16:rowId xmlns:a16="http://schemas.microsoft.com/office/drawing/2014/main" val="10005"/>
+                  </a:ext>
+                </a:extLst>
               </a:tr>
               <a:tr h="384048">
                 <a:tc>
@@ -13804,7 +13641,7 @@
                     <a:bodyPr/>
                     <a:lstStyle/>
                     <a:p>
-                      <a:pPr algn="l" indent="0" marL="0">
+                      <a:pPr marL="0" indent="0" algn="l">
                         <a:buNone/>
                       </a:pPr>
                       <a:r>
@@ -13825,7 +13662,7 @@
                       </a:endParaRPr>
                     </a:p>
                   </a:txBody>
-                  <a:tcPr marL="91440" marR="91440" marT="45720" marB="45720" anchor="ctr">
+                  <a:tcPr anchor="ctr">
                     <a:lnL w="9525" cap="flat" cmpd="sng" algn="ctr">
                       <a:solidFill>
                         <a:srgbClr val="E7DCC9"/>
@@ -13872,7 +13709,7 @@
                     <a:bodyPr/>
                     <a:lstStyle/>
                     <a:p>
-                      <a:pPr algn="ctr" indent="0" marL="0">
+                      <a:pPr marL="0" indent="0" algn="ctr">
                         <a:buNone/>
                       </a:pPr>
                       <a:r>
@@ -13893,7 +13730,7 @@
                       </a:endParaRPr>
                     </a:p>
                   </a:txBody>
-                  <a:tcPr marL="91440" marR="91440" marT="45720" marB="45720" anchor="ctr">
+                  <a:tcPr anchor="ctr">
                     <a:lnL w="9525" cap="flat" cmpd="sng" algn="ctr">
                       <a:solidFill>
                         <a:srgbClr val="E7DCC9"/>
@@ -13940,7 +13777,7 @@
                     <a:bodyPr/>
                     <a:lstStyle/>
                     <a:p>
-                      <a:pPr algn="ctr" indent="0" marL="0">
+                      <a:pPr marL="0" indent="0" algn="ctr">
                         <a:buNone/>
                       </a:pPr>
                       <a:r>
@@ -13961,7 +13798,7 @@
                       </a:endParaRPr>
                     </a:p>
                   </a:txBody>
-                  <a:tcPr marL="91440" marR="91440" marT="45720" marB="45720" anchor="ctr">
+                  <a:tcPr anchor="ctr">
                     <a:lnL w="9525" cap="flat" cmpd="sng" algn="ctr">
                       <a:solidFill>
                         <a:srgbClr val="E7DCC9"/>
@@ -14008,7 +13845,7 @@
                     <a:bodyPr/>
                     <a:lstStyle/>
                     <a:p>
-                      <a:pPr algn="ctr" indent="0" marL="0">
+                      <a:pPr marL="0" indent="0" algn="ctr">
                         <a:buNone/>
                       </a:pPr>
                       <a:r>
@@ -14029,7 +13866,7 @@
                       </a:endParaRPr>
                     </a:p>
                   </a:txBody>
-                  <a:tcPr marL="91440" marR="91440" marT="45720" marB="45720" anchor="ctr">
+                  <a:tcPr anchor="ctr">
                     <a:lnL w="9525" cap="flat" cmpd="sng" algn="ctr">
                       <a:solidFill>
                         <a:srgbClr val="E7DCC9"/>
@@ -14076,7 +13913,7 @@
                     <a:bodyPr/>
                     <a:lstStyle/>
                     <a:p>
-                      <a:pPr algn="ctr" indent="0" marL="0">
+                      <a:pPr marL="0" indent="0" algn="ctr">
                         <a:buNone/>
                       </a:pPr>
                       <a:r>
@@ -14097,7 +13934,7 @@
                       </a:endParaRPr>
                     </a:p>
                   </a:txBody>
-                  <a:tcPr marL="91440" marR="91440" marT="45720" marB="45720" anchor="ctr">
+                  <a:tcPr anchor="ctr">
                     <a:lnL w="9525" cap="flat" cmpd="sng" algn="ctr">
                       <a:solidFill>
                         <a:srgbClr val="E7DCC9"/>
@@ -14144,7 +13981,7 @@
                     <a:bodyPr/>
                     <a:lstStyle/>
                     <a:p>
-                      <a:pPr algn="ctr" indent="0" marL="0">
+                      <a:pPr marL="0" indent="0" algn="ctr">
                         <a:buNone/>
                       </a:pPr>
                       <a:r>
@@ -14165,7 +14002,7 @@
                       </a:endParaRPr>
                     </a:p>
                   </a:txBody>
-                  <a:tcPr marL="91440" marR="91440" marT="45720" marB="45720" anchor="ctr">
+                  <a:tcPr anchor="ctr">
                     <a:lnL w="9525" cap="flat" cmpd="sng" algn="ctr">
                       <a:solidFill>
                         <a:srgbClr val="E7DCC9"/>
@@ -14207,6 +14044,11 @@
                     </a:solidFill>
                   </a:tcPr>
                 </a:tc>
+                <a:extLst>
+                  <a:ext uri="{0D108BD9-81ED-4DB2-BD59-A6C34878D82A}">
+                    <a16:rowId xmlns:a16="http://schemas.microsoft.com/office/drawing/2014/main" val="10006"/>
+                  </a:ext>
+                </a:extLst>
               </a:tr>
             </a:tbl>
           </a:graphicData>
@@ -14233,7 +14075,7 @@
           <a:bodyPr wrap="square" lIns="0" tIns="0" rIns="0" bIns="0" rtlCol="0" anchor="ctr"/>
           <a:lstStyle/>
           <a:p>
-            <a:pPr indent="0" marL="0">
+            <a:pPr marL="0" indent="0">
               <a:buNone/>
             </a:pPr>
             <a:r>
@@ -14299,7 +14141,7 @@
           <a:bodyPr wrap="square" lIns="0" tIns="0" rIns="0" bIns="0" rtlCol="0" anchor="ctr"/>
           <a:lstStyle/>
           <a:p>
-            <a:pPr indent="0" marL="0">
+            <a:pPr marL="0" indent="0">
               <a:buNone/>
             </a:pPr>
             <a:r>
@@ -14319,7 +14161,7 @@
       </p:sp>
       <p:sp>
         <p:nvSpPr>
-          <p:cNvPr id="10" name="Text 7"/>
+          <p:cNvPr id="6" name="Text 7"/>
           <p:cNvSpPr/>
           <p:nvPr/>
         </p:nvSpPr>
@@ -14338,7 +14180,7 @@
           <a:bodyPr wrap="square" lIns="0" tIns="0" rIns="0" bIns="0" rtlCol="0" anchor="ctr"/>
           <a:lstStyle/>
           <a:p>
-            <a:pPr indent="0" marL="0">
+            <a:pPr marL="0" indent="0">
               <a:lnSpc>
                 <a:spcPts val="1700"/>
               </a:lnSpc>
@@ -14660,4 +14502,299 @@
     </a:ext>
   </a:extLst>
 </a:theme>
+</file>
+
+<file path=ppt/theme/theme2.xml><?xml version="1.0" encoding="utf-8"?>
+<a:theme xmlns:a="http://schemas.openxmlformats.org/drawingml/2006/main" name="Office Theme">
+  <a:themeElements>
+    <a:clrScheme name="Office">
+      <a:dk1>
+        <a:sysClr val="windowText" lastClr="000000"/>
+      </a:dk1>
+      <a:lt1>
+        <a:sysClr val="window" lastClr="FFFFFF"/>
+      </a:lt1>
+      <a:dk2>
+        <a:srgbClr val="44546A"/>
+      </a:dk2>
+      <a:lt2>
+        <a:srgbClr val="E7E6E6"/>
+      </a:lt2>
+      <a:accent1>
+        <a:srgbClr val="4472C4"/>
+      </a:accent1>
+      <a:accent2>
+        <a:srgbClr val="ED7D31"/>
+      </a:accent2>
+      <a:accent3>
+        <a:srgbClr val="A5A5A5"/>
+      </a:accent3>
+      <a:accent4>
+        <a:srgbClr val="FFC000"/>
+      </a:accent4>
+      <a:accent5>
+        <a:srgbClr val="5B9BD5"/>
+      </a:accent5>
+      <a:accent6>
+        <a:srgbClr val="70AD47"/>
+      </a:accent6>
+      <a:hlink>
+        <a:srgbClr val="0563C1"/>
+      </a:hlink>
+      <a:folHlink>
+        <a:srgbClr val="954F72"/>
+      </a:folHlink>
+    </a:clrScheme>
+    <a:fontScheme name="Office">
+      <a:majorFont>
+        <a:latin typeface="Calibri Light" panose="020F0302020204030204"/>
+        <a:ea typeface=""/>
+        <a:cs typeface=""/>
+        <a:font script="Jpan" typeface="游ゴシック Light"/>
+        <a:font script="Hang" typeface="맑은 고딕"/>
+        <a:font script="Hans" typeface="等线 Light"/>
+        <a:font script="Hant" typeface="新細明體"/>
+        <a:font script="Arab" typeface="Times New Roman"/>
+        <a:font script="Hebr" typeface="Times New Roman"/>
+        <a:font script="Thai" typeface="Angsana New"/>
+        <a:font script="Ethi" typeface="Nyala"/>
+        <a:font script="Beng" typeface="Vrinda"/>
+        <a:font script="Gujr" typeface="Shruti"/>
+        <a:font script="Khmr" typeface="MoolBoran"/>
+        <a:font script="Knda" typeface="Tunga"/>
+        <a:font script="Guru" typeface="Raavi"/>
+        <a:font script="Cans" typeface="Euphemia"/>
+        <a:font script="Cher" typeface="Plantagenet Cherokee"/>
+        <a:font script="Yiii" typeface="Microsoft Yi Baiti"/>
+        <a:font script="Tibt" typeface="Microsoft Himalaya"/>
+        <a:font script="Thaa" typeface="MV Boli"/>
+        <a:font script="Deva" typeface="Mangal"/>
+        <a:font script="Telu" typeface="Gautami"/>
+        <a:font script="Taml" typeface="Latha"/>
+        <a:font script="Syrc" typeface="Estrangelo Edessa"/>
+        <a:font script="Orya" typeface="Kalinga"/>
+        <a:font script="Mlym" typeface="Kartika"/>
+        <a:font script="Laoo" typeface="DokChampa"/>
+        <a:font script="Sinh" typeface="Iskoola Pota"/>
+        <a:font script="Mong" typeface="Mongolian Baiti"/>
+        <a:font script="Viet" typeface="Times New Roman"/>
+        <a:font script="Uigh" typeface="Microsoft Uighur"/>
+        <a:font script="Geor" typeface="Sylfaen"/>
+        <a:font script="Armn" typeface="Arial"/>
+        <a:font script="Bugi" typeface="Leelawadee UI"/>
+        <a:font script="Bopo" typeface="Microsoft JhengHei"/>
+        <a:font script="Java" typeface="Javanese Text"/>
+        <a:font script="Lisu" typeface="Segoe UI"/>
+        <a:font script="Mymr" typeface="Myanmar Text"/>
+        <a:font script="Nkoo" typeface="Ebrima"/>
+        <a:font script="Olck" typeface="Nirmala UI"/>
+        <a:font script="Osma" typeface="Ebrima"/>
+        <a:font script="Phag" typeface="Phagspa"/>
+        <a:font script="Syrn" typeface="Estrangelo Edessa"/>
+        <a:font script="Syrj" typeface="Estrangelo Edessa"/>
+        <a:font script="Syre" typeface="Estrangelo Edessa"/>
+        <a:font script="Sora" typeface="Nirmala UI"/>
+        <a:font script="Tale" typeface="Microsoft Tai Le"/>
+        <a:font script="Talu" typeface="Microsoft New Tai Lue"/>
+        <a:font script="Tfng" typeface="Ebrima"/>
+      </a:majorFont>
+      <a:minorFont>
+        <a:latin typeface="Calibri" panose="020F0502020204030204"/>
+        <a:ea typeface=""/>
+        <a:cs typeface=""/>
+        <a:font script="Jpan" typeface="游ゴシック"/>
+        <a:font script="Hang" typeface="맑은 고딕"/>
+        <a:font script="Hans" typeface="等线"/>
+        <a:font script="Hant" typeface="新細明體"/>
+        <a:font script="Arab" typeface="Arial"/>
+        <a:font script="Hebr" typeface="Arial"/>
+        <a:font script="Thai" typeface="Cordia New"/>
+        <a:font script="Ethi" typeface="Nyala"/>
+        <a:font script="Beng" typeface="Vrinda"/>
+        <a:font script="Gujr" typeface="Shruti"/>
+        <a:font script="Khmr" typeface="DaunPenh"/>
+        <a:font script="Knda" typeface="Tunga"/>
+        <a:font script="Guru" typeface="Raavi"/>
+        <a:font script="Cans" typeface="Euphemia"/>
+        <a:font script="Cher" typeface="Plantagenet Cherokee"/>
+        <a:font script="Yiii" typeface="Microsoft Yi Baiti"/>
+        <a:font script="Tibt" typeface="Microsoft Himalaya"/>
+        <a:font script="Thaa" typeface="MV Boli"/>
+        <a:font script="Deva" typeface="Mangal"/>
+        <a:font script="Telu" typeface="Gautami"/>
+        <a:font script="Taml" typeface="Latha"/>
+        <a:font script="Syrc" typeface="Estrangelo Edessa"/>
+        <a:font script="Orya" typeface="Kalinga"/>
+        <a:font script="Mlym" typeface="Kartika"/>
+        <a:font script="Laoo" typeface="DokChampa"/>
+        <a:font script="Sinh" typeface="Iskoola Pota"/>
+        <a:font script="Mong" typeface="Mongolian Baiti"/>
+        <a:font script="Viet" typeface="Arial"/>
+        <a:font script="Uigh" typeface="Microsoft Uighur"/>
+        <a:font script="Geor" typeface="Sylfaen"/>
+        <a:font script="Armn" typeface="Arial"/>
+        <a:font script="Bugi" typeface="Leelawadee UI"/>
+        <a:font script="Bopo" typeface="Microsoft JhengHei"/>
+        <a:font script="Java" typeface="Javanese Text"/>
+        <a:font script="Lisu" typeface="Segoe UI"/>
+        <a:font script="Mymr" typeface="Myanmar Text"/>
+        <a:font script="Nkoo" typeface="Ebrima"/>
+        <a:font script="Olck" typeface="Nirmala UI"/>
+        <a:font script="Osma" typeface="Ebrima"/>
+        <a:font script="Phag" typeface="Phagspa"/>
+        <a:font script="Syrn" typeface="Estrangelo Edessa"/>
+        <a:font script="Syrj" typeface="Estrangelo Edessa"/>
+        <a:font script="Syre" typeface="Estrangelo Edessa"/>
+        <a:font script="Sora" typeface="Nirmala UI"/>
+        <a:font script="Tale" typeface="Microsoft Tai Le"/>
+        <a:font script="Talu" typeface="Microsoft New Tai Lue"/>
+        <a:font script="Tfng" typeface="Ebrima"/>
+      </a:minorFont>
+    </a:fontScheme>
+    <a:fmtScheme name="Office">
+      <a:fillStyleLst>
+        <a:solidFill>
+          <a:schemeClr val="phClr"/>
+        </a:solidFill>
+        <a:gradFill rotWithShape="1">
+          <a:gsLst>
+            <a:gs pos="0">
+              <a:schemeClr val="phClr">
+                <a:lumMod val="110000"/>
+                <a:satMod val="105000"/>
+                <a:tint val="67000"/>
+              </a:schemeClr>
+            </a:gs>
+            <a:gs pos="50000">
+              <a:schemeClr val="phClr">
+                <a:lumMod val="105000"/>
+                <a:satMod val="103000"/>
+                <a:tint val="73000"/>
+              </a:schemeClr>
+            </a:gs>
+            <a:gs pos="100000">
+              <a:schemeClr val="phClr">
+                <a:lumMod val="105000"/>
+                <a:satMod val="109000"/>
+                <a:tint val="81000"/>
+              </a:schemeClr>
+            </a:gs>
+          </a:gsLst>
+          <a:lin ang="5400000" scaled="0"/>
+        </a:gradFill>
+        <a:gradFill rotWithShape="1">
+          <a:gsLst>
+            <a:gs pos="0">
+              <a:schemeClr val="phClr">
+                <a:satMod val="103000"/>
+                <a:lumMod val="102000"/>
+                <a:tint val="94000"/>
+              </a:schemeClr>
+            </a:gs>
+            <a:gs pos="50000">
+              <a:schemeClr val="phClr">
+                <a:satMod val="110000"/>
+                <a:lumMod val="100000"/>
+                <a:shade val="100000"/>
+              </a:schemeClr>
+            </a:gs>
+            <a:gs pos="100000">
+              <a:schemeClr val="phClr">
+                <a:lumMod val="99000"/>
+                <a:satMod val="120000"/>
+                <a:shade val="78000"/>
+              </a:schemeClr>
+            </a:gs>
+          </a:gsLst>
+          <a:lin ang="5400000" scaled="0"/>
+        </a:gradFill>
+      </a:fillStyleLst>
+      <a:lnStyleLst>
+        <a:ln w="6350" cap="flat" cmpd="sng" algn="ctr">
+          <a:solidFill>
+            <a:schemeClr val="phClr"/>
+          </a:solidFill>
+          <a:prstDash val="solid"/>
+          <a:miter lim="800000"/>
+        </a:ln>
+        <a:ln w="12700" cap="flat" cmpd="sng" algn="ctr">
+          <a:solidFill>
+            <a:schemeClr val="phClr"/>
+          </a:solidFill>
+          <a:prstDash val="solid"/>
+          <a:miter lim="800000"/>
+        </a:ln>
+        <a:ln w="19050" cap="flat" cmpd="sng" algn="ctr">
+          <a:solidFill>
+            <a:schemeClr val="phClr"/>
+          </a:solidFill>
+          <a:prstDash val="solid"/>
+          <a:miter lim="800000"/>
+        </a:ln>
+      </a:lnStyleLst>
+      <a:effectStyleLst>
+        <a:effectStyle>
+          <a:effectLst/>
+        </a:effectStyle>
+        <a:effectStyle>
+          <a:effectLst/>
+        </a:effectStyle>
+        <a:effectStyle>
+          <a:effectLst>
+            <a:outerShdw blurRad="57150" dist="19050" dir="5400000" algn="ctr" rotWithShape="0">
+              <a:srgbClr val="000000">
+                <a:alpha val="63000"/>
+              </a:srgbClr>
+            </a:outerShdw>
+          </a:effectLst>
+        </a:effectStyle>
+      </a:effectStyleLst>
+      <a:bgFillStyleLst>
+        <a:solidFill>
+          <a:schemeClr val="phClr"/>
+        </a:solidFill>
+        <a:solidFill>
+          <a:schemeClr val="phClr">
+            <a:tint val="95000"/>
+            <a:satMod val="170000"/>
+          </a:schemeClr>
+        </a:solidFill>
+        <a:gradFill rotWithShape="1">
+          <a:gsLst>
+            <a:gs pos="0">
+              <a:schemeClr val="phClr">
+                <a:tint val="93000"/>
+                <a:satMod val="150000"/>
+                <a:shade val="98000"/>
+                <a:lumMod val="102000"/>
+              </a:schemeClr>
+            </a:gs>
+            <a:gs pos="50000">
+              <a:schemeClr val="phClr">
+                <a:tint val="98000"/>
+                <a:satMod val="130000"/>
+                <a:shade val="90000"/>
+                <a:lumMod val="103000"/>
+              </a:schemeClr>
+            </a:gs>
+            <a:gs pos="100000">
+              <a:schemeClr val="phClr">
+                <a:shade val="63000"/>
+                <a:satMod val="120000"/>
+              </a:schemeClr>
+            </a:gs>
+          </a:gsLst>
+          <a:lin ang="5400000" scaled="0"/>
+        </a:gradFill>
+      </a:bgFillStyleLst>
+    </a:fmtScheme>
+  </a:themeElements>
+  <a:objectDefaults/>
+  <a:extraClrSchemeLst/>
+  <a:extLst>
+    <a:ext uri="{05A4C25C-085E-4340-85A3-A5531E510DB2}">
+      <thm15:themeFamily xmlns:thm15="http://schemas.microsoft.com/office/thememl/2012/main" name="Office Theme" id="{62F939B6-93AF-4DB8-9C6B-D6C7DFDC589F}" vid="{4A3C46E8-61CC-4603-A589-7422A47A8E4A}"/>
+    </a:ext>
+  </a:extLst>
+</a:theme>
 </file>